--- a/content/2026-2/cea055-estatistica-probabilidade/03-introducao-probabilidade/Aula_03_Introducao_Probabilidade.pptx
+++ b/content/2026-2/cea055-estatistica-probabilidade/03-introducao-probabilidade/Aula_03_Introducao_Probabilidade.pptx
@@ -5,7 +5,7 @@
     <p:sldMasterId id="2147483648" r:id="rId1"/>
   </p:sldMasterIdLst>
   <p:notesMasterIdLst>
-    <p:notesMasterId r:id="rId14"/>
+    <p:notesMasterId r:id="rId34"/>
   </p:notesMasterIdLst>
   <p:sldIdLst>
     <p:sldId id="257" r:id="rId2"/>
@@ -20,21 +20,26 @@
     <p:sldId id="275" r:id="rId11"/>
     <p:sldId id="277" r:id="rId12"/>
     <p:sldId id="266" r:id="rId13"/>
-    <p:sldId id="400" r:id="rId20"/>
-    <p:sldId id="401" r:id="rId21"/>
-    <p:sldId id="402" r:id="rId22"/>
-    <p:sldId id="403" r:id="rId23"/>
-    <p:sldId id="404" r:id="rId24"/>
-    <p:sldId id="405" r:id="rId25"/>
-    <p:sldId id="406" r:id="rId26"/>
-    <p:sldId id="407" r:id="rId27"/>
-    <p:sldId id="408" r:id="rId28"/>
-    <p:sldId id="409" r:id="rId29"/>
-    <p:sldId id="410" r:id="rId30"/>
-    <p:sldId id="411" r:id="rId31"/>
-    <p:sldId id="412" r:id="rId32"/>
-    <p:sldId id="413" r:id="rId33"/>
-    <p:sldId id="278" r:id="rId19"/>
+    <p:sldId id="419" r:id="rId14"/>
+    <p:sldId id="400" r:id="rId15"/>
+    <p:sldId id="401" r:id="rId16"/>
+    <p:sldId id="418" r:id="rId17"/>
+    <p:sldId id="402" r:id="rId18"/>
+    <p:sldId id="414" r:id="rId19"/>
+    <p:sldId id="403" r:id="rId20"/>
+    <p:sldId id="404" r:id="rId21"/>
+    <p:sldId id="417" r:id="rId22"/>
+    <p:sldId id="406" r:id="rId23"/>
+    <p:sldId id="415" r:id="rId24"/>
+    <p:sldId id="407" r:id="rId25"/>
+    <p:sldId id="408" r:id="rId26"/>
+    <p:sldId id="409" r:id="rId27"/>
+    <p:sldId id="410" r:id="rId28"/>
+    <p:sldId id="416" r:id="rId29"/>
+    <p:sldId id="411" r:id="rId30"/>
+    <p:sldId id="412" r:id="rId31"/>
+    <p:sldId id="413" r:id="rId32"/>
+    <p:sldId id="278" r:id="rId33"/>
   </p:sldIdLst>
   <p:sldSz cx="12192000" cy="6858000"/>
   <p:notesSz cx="6858000" cy="9144000"/>
@@ -237,7 +242,7 @@
           <a:p>
             <a:fld id="{44623A65-BD25-40B6-8815-498297225DF7}" type="datetimeFigureOut">
               <a:rPr lang="pt-BR" smtClean="0"/>
-              <a:t>09/04/2024</a:t>
+              <a:t>01/09/2026</a:t>
             </a:fld>
             <a:endParaRPr lang="pt-BR" dirty="0"/>
           </a:p>
@@ -553,7 +558,7 @@
           <a:bodyPr/>
           <a:lstStyle/>
           <a:p>
-            <a:endParaRPr lang="pt-BR" dirty="0"/>
+            <a:endParaRPr/>
           </a:p>
         </p:txBody>
       </p:sp>
@@ -586,6 +591,210 @@
         <p14:creationId xmlns:p14="http://schemas.microsoft.com/office/powerpoint/2010/main" val="3466203219"/>
       </p:ext>
     </p:extLst>
+  </p:cSld>
+  <p:clrMapOvr>
+    <a:masterClrMapping/>
+  </p:clrMapOvr>
+</p:notes>
+</file>
+
+<file path=ppt/notesSlides/notesSlide2.xml><?xml version="1.0" encoding="utf-8"?>
+<p:notes xmlns:a="http://schemas.openxmlformats.org/drawingml/2006/main" xmlns:r="http://schemas.openxmlformats.org/officeDocument/2006/relationships" xmlns:p="http://schemas.openxmlformats.org/presentationml/2006/main">
+  <p:cSld>
+    <p:spTree>
+      <p:nvGrpSpPr>
+        <p:cNvPr id="1" name=""/>
+        <p:cNvGrpSpPr/>
+        <p:nvPr/>
+      </p:nvGrpSpPr>
+      <p:grpSpPr>
+        <a:xfrm>
+          <a:off x="0" y="0"/>
+          <a:ext cx="0" cy="0"/>
+          <a:chOff x="0" y="0"/>
+          <a:chExt cx="0" cy="0"/>
+        </a:xfrm>
+      </p:grpSpPr>
+      <p:sp>
+        <p:nvSpPr>
+          <p:cNvPr id="2" name="Slide Image Placeholder 1"/>
+          <p:cNvSpPr>
+            <a:spLocks noGrp="1" noRot="1" noChangeAspect="1"/>
+          </p:cNvSpPr>
+          <p:nvPr>
+            <p:ph type="sldImg" idx="2"/>
+          </p:nvPr>
+        </p:nvSpPr>
+        <p:spPr/>
+      </p:sp>
+      <p:sp>
+        <p:nvSpPr>
+          <p:cNvPr id="3" name="Notes Placeholder 2"/>
+          <p:cNvSpPr>
+            <a:spLocks noGrp="1"/>
+          </p:cNvSpPr>
+          <p:nvPr>
+            <p:ph type="body" sz="quarter" idx="3"/>
+          </p:nvPr>
+        </p:nvSpPr>
+        <p:spPr/>
+        <p:txBody>
+          <a:bodyPr/>
+          <a:lstStyle/>
+          <a:p>
+            <a:endParaRPr/>
+          </a:p>
+        </p:txBody>
+      </p:sp>
+      <p:sp>
+        <p:nvSpPr>
+          <p:cNvPr id="4" name="Slide Number Placeholder 3"/>
+          <p:cNvSpPr>
+            <a:spLocks noGrp="1"/>
+          </p:cNvSpPr>
+          <p:nvPr>
+            <p:ph type="sldNum" sz="quarter" idx="5"/>
+          </p:nvPr>
+        </p:nvSpPr>
+        <p:spPr/>
+      </p:sp>
+    </p:spTree>
+  </p:cSld>
+  <p:clrMapOvr>
+    <a:masterClrMapping/>
+  </p:clrMapOvr>
+</p:notes>
+</file>
+
+<file path=ppt/notesSlides/notesSlide3.xml><?xml version="1.0" encoding="utf-8"?>
+<p:notes xmlns:a="http://schemas.openxmlformats.org/drawingml/2006/main" xmlns:r="http://schemas.openxmlformats.org/officeDocument/2006/relationships" xmlns:p="http://schemas.openxmlformats.org/presentationml/2006/main">
+  <p:cSld>
+    <p:spTree>
+      <p:nvGrpSpPr>
+        <p:cNvPr id="1" name=""/>
+        <p:cNvGrpSpPr/>
+        <p:nvPr/>
+      </p:nvGrpSpPr>
+      <p:grpSpPr>
+        <a:xfrm>
+          <a:off x="0" y="0"/>
+          <a:ext cx="0" cy="0"/>
+          <a:chOff x="0" y="0"/>
+          <a:chExt cx="0" cy="0"/>
+        </a:xfrm>
+      </p:grpSpPr>
+      <p:sp>
+        <p:nvSpPr>
+          <p:cNvPr id="2" name="Slide Image Placeholder 1"/>
+          <p:cNvSpPr>
+            <a:spLocks noGrp="1" noRot="1" noChangeAspect="1"/>
+          </p:cNvSpPr>
+          <p:nvPr>
+            <p:ph type="sldImg" idx="2"/>
+          </p:nvPr>
+        </p:nvSpPr>
+        <p:spPr/>
+      </p:sp>
+      <p:sp>
+        <p:nvSpPr>
+          <p:cNvPr id="3" name="Notes Placeholder 2"/>
+          <p:cNvSpPr>
+            <a:spLocks noGrp="1"/>
+          </p:cNvSpPr>
+          <p:nvPr>
+            <p:ph type="body" sz="quarter" idx="3"/>
+          </p:nvPr>
+        </p:nvSpPr>
+        <p:spPr/>
+        <p:txBody>
+          <a:bodyPr/>
+          <a:lstStyle/>
+          <a:p>
+            <a:endParaRPr/>
+          </a:p>
+        </p:txBody>
+      </p:sp>
+      <p:sp>
+        <p:nvSpPr>
+          <p:cNvPr id="4" name="Slide Number Placeholder 3"/>
+          <p:cNvSpPr>
+            <a:spLocks noGrp="1"/>
+          </p:cNvSpPr>
+          <p:nvPr>
+            <p:ph type="sldNum" sz="quarter" idx="5"/>
+          </p:nvPr>
+        </p:nvSpPr>
+        <p:spPr/>
+      </p:sp>
+    </p:spTree>
+  </p:cSld>
+  <p:clrMapOvr>
+    <a:masterClrMapping/>
+  </p:clrMapOvr>
+</p:notes>
+</file>
+
+<file path=ppt/notesSlides/notesSlide4.xml><?xml version="1.0" encoding="utf-8"?>
+<p:notes xmlns:a="http://schemas.openxmlformats.org/drawingml/2006/main" xmlns:r="http://schemas.openxmlformats.org/officeDocument/2006/relationships" xmlns:p="http://schemas.openxmlformats.org/presentationml/2006/main">
+  <p:cSld>
+    <p:spTree>
+      <p:nvGrpSpPr>
+        <p:cNvPr id="1" name=""/>
+        <p:cNvGrpSpPr/>
+        <p:nvPr/>
+      </p:nvGrpSpPr>
+      <p:grpSpPr>
+        <a:xfrm>
+          <a:off x="0" y="0"/>
+          <a:ext cx="0" cy="0"/>
+          <a:chOff x="0" y="0"/>
+          <a:chExt cx="0" cy="0"/>
+        </a:xfrm>
+      </p:grpSpPr>
+      <p:sp>
+        <p:nvSpPr>
+          <p:cNvPr id="2" name="Slide Image Placeholder 1"/>
+          <p:cNvSpPr>
+            <a:spLocks noGrp="1" noRot="1" noChangeAspect="1"/>
+          </p:cNvSpPr>
+          <p:nvPr>
+            <p:ph type="sldImg" idx="2"/>
+          </p:nvPr>
+        </p:nvSpPr>
+        <p:spPr/>
+      </p:sp>
+      <p:sp>
+        <p:nvSpPr>
+          <p:cNvPr id="3" name="Notes Placeholder 2"/>
+          <p:cNvSpPr>
+            <a:spLocks noGrp="1"/>
+          </p:cNvSpPr>
+          <p:nvPr>
+            <p:ph type="body" sz="quarter" idx="3"/>
+          </p:nvPr>
+        </p:nvSpPr>
+        <p:spPr/>
+        <p:txBody>
+          <a:bodyPr/>
+          <a:lstStyle/>
+          <a:p>
+            <a:endParaRPr/>
+          </a:p>
+        </p:txBody>
+      </p:sp>
+      <p:sp>
+        <p:nvSpPr>
+          <p:cNvPr id="4" name="Slide Number Placeholder 3"/>
+          <p:cNvSpPr>
+            <a:spLocks noGrp="1"/>
+          </p:cNvSpPr>
+          <p:nvPr>
+            <p:ph type="sldNum" sz="quarter" idx="5"/>
+          </p:nvPr>
+        </p:nvSpPr>
+        <p:spPr/>
+      </p:sp>
+    </p:spTree>
   </p:cSld>
   <p:clrMapOvr>
     <a:masterClrMapping/>
@@ -740,7 +949,7 @@
           <a:p>
             <a:fld id="{5B45E566-B383-4B2D-B951-1136FD38326E}" type="datetimeFigureOut">
               <a:rPr lang="pt-BR" smtClean="0"/>
-              <a:t>09/04/2024</a:t>
+              <a:t>01/09/2026</a:t>
             </a:fld>
             <a:endParaRPr lang="pt-BR" dirty="0"/>
           </a:p>
@@ -938,7 +1147,7 @@
           <a:p>
             <a:fld id="{5B45E566-B383-4B2D-B951-1136FD38326E}" type="datetimeFigureOut">
               <a:rPr lang="pt-BR" smtClean="0"/>
-              <a:t>09/04/2024</a:t>
+              <a:t>01/09/2026</a:t>
             </a:fld>
             <a:endParaRPr lang="pt-BR" dirty="0"/>
           </a:p>
@@ -1146,7 +1355,7 @@
           <a:p>
             <a:fld id="{5B45E566-B383-4B2D-B951-1136FD38326E}" type="datetimeFigureOut">
               <a:rPr lang="pt-BR" smtClean="0"/>
-              <a:t>09/04/2024</a:t>
+              <a:t>01/09/2026</a:t>
             </a:fld>
             <a:endParaRPr lang="pt-BR" dirty="0"/>
           </a:p>
@@ -1344,7 +1553,7 @@
           <a:p>
             <a:fld id="{5B45E566-B383-4B2D-B951-1136FD38326E}" type="datetimeFigureOut">
               <a:rPr lang="pt-BR" smtClean="0"/>
-              <a:t>09/04/2024</a:t>
+              <a:t>01/09/2026</a:t>
             </a:fld>
             <a:endParaRPr lang="pt-BR" dirty="0"/>
           </a:p>
@@ -1619,7 +1828,7 @@
           <a:p>
             <a:fld id="{5B45E566-B383-4B2D-B951-1136FD38326E}" type="datetimeFigureOut">
               <a:rPr lang="pt-BR" smtClean="0"/>
-              <a:t>09/04/2024</a:t>
+              <a:t>01/09/2026</a:t>
             </a:fld>
             <a:endParaRPr lang="pt-BR" dirty="0"/>
           </a:p>
@@ -1884,7 +2093,7 @@
           <a:p>
             <a:fld id="{5B45E566-B383-4B2D-B951-1136FD38326E}" type="datetimeFigureOut">
               <a:rPr lang="pt-BR" smtClean="0"/>
-              <a:t>09/04/2024</a:t>
+              <a:t>01/09/2026</a:t>
             </a:fld>
             <a:endParaRPr lang="pt-BR" dirty="0"/>
           </a:p>
@@ -2296,7 +2505,7 @@
           <a:p>
             <a:fld id="{5B45E566-B383-4B2D-B951-1136FD38326E}" type="datetimeFigureOut">
               <a:rPr lang="pt-BR" smtClean="0"/>
-              <a:t>09/04/2024</a:t>
+              <a:t>01/09/2026</a:t>
             </a:fld>
             <a:endParaRPr lang="pt-BR" dirty="0"/>
           </a:p>
@@ -2437,7 +2646,7 @@
           <a:p>
             <a:fld id="{5B45E566-B383-4B2D-B951-1136FD38326E}" type="datetimeFigureOut">
               <a:rPr lang="pt-BR" smtClean="0"/>
-              <a:t>09/04/2024</a:t>
+              <a:t>01/09/2026</a:t>
             </a:fld>
             <a:endParaRPr lang="pt-BR" dirty="0"/>
           </a:p>
@@ -2550,7 +2759,7 @@
           <a:p>
             <a:fld id="{5B45E566-B383-4B2D-B951-1136FD38326E}" type="datetimeFigureOut">
               <a:rPr lang="pt-BR" smtClean="0"/>
-              <a:t>09/04/2024</a:t>
+              <a:t>01/09/2026</a:t>
             </a:fld>
             <a:endParaRPr lang="pt-BR" dirty="0"/>
           </a:p>
@@ -2861,7 +3070,7 @@
           <a:p>
             <a:fld id="{5B45E566-B383-4B2D-B951-1136FD38326E}" type="datetimeFigureOut">
               <a:rPr lang="pt-BR" smtClean="0"/>
-              <a:t>09/04/2024</a:t>
+              <a:t>01/09/2026</a:t>
             </a:fld>
             <a:endParaRPr lang="pt-BR" dirty="0"/>
           </a:p>
@@ -3149,7 +3358,7 @@
           <a:p>
             <a:fld id="{5B45E566-B383-4B2D-B951-1136FD38326E}" type="datetimeFigureOut">
               <a:rPr lang="pt-BR" smtClean="0"/>
-              <a:t>09/04/2024</a:t>
+              <a:t>01/09/2026</a:t>
             </a:fld>
             <a:endParaRPr lang="pt-BR" dirty="0"/>
           </a:p>
@@ -3414,7 +3623,7 @@
           <a:p>
             <a:fld id="{5B45E566-B383-4B2D-B951-1136FD38326E}" type="datetimeFigureOut">
               <a:rPr lang="pt-BR" smtClean="0"/>
-              <a:t>09/04/2024</a:t>
+              <a:t>01/09/2026</a:t>
             </a:fld>
             <a:endParaRPr lang="pt-BR" dirty="0"/>
           </a:p>
@@ -3896,7 +4105,7 @@
         <p:spPr>
           <a:xfrm>
             <a:off x="881687" y="1441868"/>
-            <a:ext cx="10067277" cy="4295185"/>
+            <a:ext cx="10067277" cy="5122941"/>
           </a:xfrm>
           <a:prstGeom prst="rect">
             <a:avLst/>
@@ -3909,6 +4118,11 @@
           </a:bodyPr>
           <a:lstStyle/>
           <a:p>
+            <a:pPr>
+              <a:lnSpc>
+                <a:spcPct val="150000"/>
+              </a:lnSpc>
+            </a:pPr>
             <a:r>
               <a:rPr lang="pt-BR" sz="2400" b="1" dirty="0"/>
               <a:t>Objetivos do aula:</a:t>
@@ -3916,6 +4130,9 @@
           </a:p>
           <a:p>
             <a:pPr marL="285737" indent="-285737">
+              <a:lnSpc>
+                <a:spcPct val="150000"/>
+              </a:lnSpc>
               <a:buFont typeface="Arial" panose="020B0604020202020204" pitchFamily="34" charset="0"/>
               <a:buChar char="•"/>
             </a:pPr>
@@ -3926,6 +4143,9 @@
           </a:p>
           <a:p>
             <a:pPr marL="285737" indent="-285737">
+              <a:lnSpc>
+                <a:spcPct val="150000"/>
+              </a:lnSpc>
               <a:buFont typeface="Arial" panose="020B0604020202020204" pitchFamily="34" charset="0"/>
               <a:buChar char="•"/>
             </a:pPr>
@@ -3936,6 +4156,9 @@
           </a:p>
           <a:p>
             <a:pPr marL="285737" indent="-285737">
+              <a:lnSpc>
+                <a:spcPct val="150000"/>
+              </a:lnSpc>
               <a:buFont typeface="Arial" panose="020B0604020202020204" pitchFamily="34" charset="0"/>
               <a:buChar char="•"/>
             </a:pPr>
@@ -3945,19 +4168,27 @@
             </a:r>
           </a:p>
           <a:p>
+            <a:pPr>
+              <a:lnSpc>
+                <a:spcPct val="150000"/>
+              </a:lnSpc>
+            </a:pPr>
             <a:r>
               <a:rPr lang="pt-BR" sz="2400" b="1" dirty="0"/>
-              <a:t xml:space="preserve">Referências: </a:t>
+              <a:t>Referências: </a:t>
             </a:r>
           </a:p>
           <a:p>
             <a:pPr marL="457178" indent="-457178">
+              <a:lnSpc>
+                <a:spcPct val="150000"/>
+              </a:lnSpc>
               <a:buFont typeface="Arial" panose="020B0604020202020204" pitchFamily="34" charset="0"/>
               <a:buChar char="•"/>
             </a:pPr>
             <a:r>
               <a:rPr lang="pt-BR" sz="2000" dirty="0"/>
-              <a:t xml:space="preserve">Bussab, Morettin. </a:t>
+              <a:t>Bussab, Morettin. </a:t>
             </a:r>
             <a:r>
               <a:rPr lang="pt-BR" sz="2000" b="1" dirty="0"/>
@@ -3970,12 +4201,15 @@
           </a:p>
           <a:p>
             <a:pPr marL="457178" indent="-457178">
+              <a:lnSpc>
+                <a:spcPct val="150000"/>
+              </a:lnSpc>
               <a:buFont typeface="Arial" panose="020B0604020202020204" pitchFamily="34" charset="0"/>
               <a:buChar char="•"/>
             </a:pPr>
             <a:r>
               <a:rPr lang="pt-BR" sz="2000" dirty="0"/>
-              <a:t xml:space="preserve">Montgomery, Runger. </a:t>
+              <a:t>Montgomery, Runger. </a:t>
             </a:r>
             <a:r>
               <a:rPr lang="pt-BR" sz="2000" b="1" dirty="0"/>
@@ -3988,12 +4222,15 @@
           </a:p>
           <a:p>
             <a:pPr marL="457178" indent="-457178">
+              <a:lnSpc>
+                <a:spcPct val="150000"/>
+              </a:lnSpc>
               <a:buFont typeface="Arial" panose="020B0604020202020204" pitchFamily="34" charset="0"/>
               <a:buChar char="•"/>
             </a:pPr>
             <a:r>
               <a:rPr lang="pt-BR" sz="2000" dirty="0"/>
-              <a:t xml:space="preserve">Magalhães, Lima. </a:t>
+              <a:t>Magalhães, Lima. </a:t>
             </a:r>
             <a:r>
               <a:rPr lang="pt-BR" sz="2000" b="1" dirty="0"/>
@@ -4006,12 +4243,15 @@
           </a:p>
           <a:p>
             <a:pPr marL="457178" indent="-457178">
+              <a:lnSpc>
+                <a:spcPct val="150000"/>
+              </a:lnSpc>
               <a:buFont typeface="Arial" panose="020B0604020202020204" pitchFamily="34" charset="0"/>
               <a:buChar char="•"/>
             </a:pPr>
             <a:r>
               <a:rPr lang="pt-BR" sz="2000" dirty="0"/>
-              <a:t xml:space="preserve">Morettin. </a:t>
+              <a:t>Morettin. </a:t>
             </a:r>
             <a:r>
               <a:rPr lang="pt-BR" sz="2000" b="1" dirty="0"/>
@@ -4019,7 +4259,7 @@
             </a:r>
             <a:r>
               <a:rPr lang="pt-BR" sz="2000" dirty="0"/>
-              <a:t xml:space="preserve"> — Cap. 1 (1.1 a 1.6) e Cap. 2 (2.1)</a:t>
+              <a:t> — Cap. 1 (1.1 a 1.6) e Cap. 2 (2.1)</a:t>
             </a:r>
           </a:p>
         </p:txBody>
@@ -5718,6 +5958,14 @@
 <file path=ppt/slides/slide13.xml><?xml version="1.0" encoding="utf-8"?>
 <p:sld xmlns:a="http://schemas.openxmlformats.org/drawingml/2006/main" xmlns:r="http://schemas.openxmlformats.org/officeDocument/2006/relationships" xmlns:p="http://schemas.openxmlformats.org/presentationml/2006/main">
   <p:cSld>
+    <p:bg>
+      <p:bgPr>
+        <a:solidFill>
+          <a:srgbClr val="E6CCCC"/>
+        </a:solidFill>
+        <a:effectLst/>
+      </p:bgPr>
+    </p:bg>
     <p:spTree>
       <p:nvGrpSpPr>
         <p:cNvPr id="1" name=""/>
@@ -5734,70 +5982,65 @@
       </p:grpSpPr>
       <p:sp>
         <p:nvSpPr>
-          <p:cNvPr id="2" name="Título 1">
-            <a:extLst>
-              <a:ext uri="{FF2B5EF4-FFF2-40B4-BE49-F238E27FC236}">
-                <a16:creationId xmlns:a16="http://schemas.microsoft.com/office/drawing/2014/main" id="{BC798918-7CB4-450A-A042-F0B538CA25DE}"/>
-              </a:ext>
-            </a:extLst>
-          </p:cNvPr>
-          <p:cNvSpPr>
-            <a:spLocks noGrp="1"/>
-          </p:cNvSpPr>
-          <p:nvPr>
-            <p:ph type="title"/>
-          </p:nvPr>
+          <p:cNvPr id="2" name="Oval 1"/>
+          <p:cNvSpPr/>
+          <p:nvPr/>
         </p:nvSpPr>
         <p:spPr>
           <a:xfrm>
-            <a:off x="1032611" y="0"/>
-            <a:ext cx="10827959" cy="1574800"/>
+            <a:off x="5775960" y="457200"/>
+            <a:ext cx="640080" cy="640080"/>
           </a:xfrm>
+          <a:prstGeom prst="ellipse">
+            <a:avLst/>
+          </a:prstGeom>
+          <a:solidFill>
+            <a:srgbClr val="8A3B3F"/>
+          </a:solidFill>
+          <a:ln>
+            <a:noFill/>
+          </a:ln>
         </p:spPr>
+        <p:style>
+          <a:lnRef idx="1">
+            <a:schemeClr val="accent1"/>
+          </a:lnRef>
+          <a:fillRef idx="3">
+            <a:schemeClr val="accent1"/>
+          </a:fillRef>
+          <a:effectRef idx="2">
+            <a:schemeClr val="accent1"/>
+          </a:effectRef>
+          <a:fontRef idx="minor">
+            <a:schemeClr val="lt1"/>
+          </a:fontRef>
+        </p:style>
         <p:txBody>
-          <a:bodyPr>
-            <a:normAutofit/>
-          </a:bodyPr>
+          <a:bodyPr wrap="none" rtlCol="0" anchor="ctr"/>
           <a:lstStyle/>
           <a:p>
             <a:pPr algn="ctr"/>
             <a:r>
-              <a:rPr lang="pt-BR" dirty="0">
-                <a:latin typeface="AlternateGothic2 BT" panose="020B0608020202050204" pitchFamily="34" charset="0"/>
+              <a:rPr sz="2800" b="1">
+                <a:solidFill>
+                  <a:srgbClr val="FFFFFF"/>
+                </a:solidFill>
               </a:rPr>
-              <a:t>CEA055 – Estatística e Probabilidade</a:t>
-            </a:r>
-            <a:br>
-              <a:rPr lang="pt-BR" dirty="0">
-                <a:latin typeface="AlternateGothic2 BT" panose="020B0608020202050204" pitchFamily="34" charset="0"/>
-              </a:rPr>
-            </a:br>
-            <a:r>
-              <a:rPr lang="pt-BR" sz="2200" b="1" dirty="0"/>
-              <a:t>Espaço Amostral e Eventos</a:t>
-            </a:r>
-            <a:endParaRPr lang="pt-BR" dirty="0">
-              <a:latin typeface="AlternateGothic2 BT" panose="020B0608020202050204" pitchFamily="34" charset="0"/>
-            </a:endParaRPr>
+              <a:t>!</a:t>
+            </a:r>
           </a:p>
         </p:txBody>
       </p:sp>
       <p:sp>
         <p:nvSpPr>
-          <p:cNvPr id="6" name="CaixaDeTexto 5">
-            <a:extLst>
-              <a:ext uri="{FF2B5EF4-FFF2-40B4-BE49-F238E27FC236}">
-                <a16:creationId xmlns:a16="http://schemas.microsoft.com/office/drawing/2014/main" id="{720B10DA-C761-4DEE-8D86-E170E1C2E981}"/>
-              </a:ext>
-            </a:extLst>
-          </p:cNvPr>
+          <p:cNvPr id="3" name="TextBox 2"/>
           <p:cNvSpPr txBox="1"/>
           <p:nvPr/>
         </p:nvSpPr>
         <p:spPr>
           <a:xfrm>
-            <a:off x="881687" y="1506234"/>
-            <a:ext cx="10067277" cy="3970318"/>
+            <a:off x="914400" y="1371600"/>
+            <a:ext cx="10363200" cy="457200"/>
           </a:xfrm>
           <a:prstGeom prst="rect">
             <a:avLst/>
@@ -5805,75 +6048,290 @@
           <a:noFill/>
         </p:spPr>
         <p:txBody>
-          <a:bodyPr wrap="square" rtlCol="0">
+          <a:bodyPr wrap="square">
             <a:spAutoFit/>
           </a:bodyPr>
           <a:lstStyle/>
           <a:p>
-            <a:r>
-              <a:rPr lang="pt-BR" sz="2800" b="1" dirty="0"/>
-              <a:t>Definição do dicionário</a:t>
-            </a:r>
-          </a:p>
-          <a:p>
-            <a:pPr marL="285737" indent="-285737">
-              <a:buFont typeface="Arial" panose="020B0604020202020204" pitchFamily="34" charset="0"/>
-              <a:buChar char="•"/>
-            </a:pPr>
-            <a:endParaRPr lang="pt-BR" sz="2800" dirty="0"/>
-          </a:p>
-          <a:p>
-            <a:r>
-              <a:rPr lang="pt-BR" sz="2400" dirty="0"/>
-              <a:t>1.</a:t>
-            </a:r>
-          </a:p>
-          <a:p>
-            <a:r>
-              <a:rPr lang="pt-BR" sz="2400" dirty="0"/>
-              <a:t>perspectiva favorável de que algo venha a ocorrer; possibilidade, chance.</a:t>
-            </a:r>
-          </a:p>
-          <a:p>
-            <a:endParaRPr lang="pt-BR" sz="2400" dirty="0"/>
-          </a:p>
-          <a:p>
-            <a:r>
-              <a:rPr lang="pt-BR" sz="2400" dirty="0"/>
-              <a:t>2.</a:t>
-            </a:r>
-          </a:p>
-          <a:p>
-            <a:r>
-              <a:rPr lang="pt-BR" sz="2400" dirty="0"/>
-              <a:t>grau de segurança com que se pode esperar a realização de um evento, determinado pela frequência relativa dos eventos do mesmo tipo numa série de tentativas.</a:t>
-            </a:r>
-          </a:p>
-          <a:p>
-            <a:pPr marL="742926" lvl="1" indent="-285737">
-              <a:buFont typeface="Arial" panose="020B0604020202020204" pitchFamily="34" charset="0"/>
-              <a:buChar char="•"/>
-            </a:pPr>
-            <a:endParaRPr lang="pt-BR" sz="2800" dirty="0"/>
+            <a:pPr algn="ctr"/>
+            <a:r>
+              <a:rPr sz="1800" b="1">
+                <a:solidFill>
+                  <a:srgbClr val="8A3B3F"/>
+                </a:solidFill>
+              </a:rPr>
+              <a:t>VERIFICAÇÃO RÁPIDA</a:t>
+            </a:r>
           </a:p>
         </p:txBody>
       </p:sp>
+      <mc:AlternateContent xmlns:mc="http://schemas.openxmlformats.org/markup-compatibility/2006">
+        <mc:Choice xmlns:a14="http://schemas.microsoft.com/office/drawing/2010/main" Requires="a14">
+          <p:sp>
+            <p:nvSpPr>
+              <p:cNvPr id="4" name="TextBox 3"/>
+              <p:cNvSpPr txBox="1"/>
+              <p:nvPr/>
+            </p:nvSpPr>
+            <p:spPr>
+              <a:xfrm>
+                <a:off x="1188720" y="2103120"/>
+                <a:ext cx="9814560" cy="1166281"/>
+              </a:xfrm>
+              <a:prstGeom prst="rect">
+                <a:avLst/>
+              </a:prstGeom>
+              <a:noFill/>
+            </p:spPr>
+            <p:txBody>
+              <a:bodyPr wrap="square">
+                <a:spAutoFit/>
+              </a:bodyPr>
+              <a:lstStyle/>
+              <a:p>
+                <a:pPr algn="ctr">
+                  <a:lnSpc>
+                    <a:spcPct val="130000"/>
+                  </a:lnSpc>
+                </a:pPr>
+                <a:r>
+                  <a:rPr sz="2800" b="1" dirty="0">
+                    <a:solidFill>
+                      <a:srgbClr val="3D1F21"/>
+                    </a:solidFill>
+                  </a:rPr>
+                  <a:t>Se </a:t>
+                </a:r>
+                <a14:m>
+                  <m:oMath xmlns:m="http://schemas.openxmlformats.org/officeDocument/2006/math">
+                    <m:r>
+                      <a:rPr lang="pt-BR" sz="2800" b="1" i="1" dirty="0" smtClean="0">
+                        <a:solidFill>
+                          <a:srgbClr val="3D1F21"/>
+                        </a:solidFill>
+                        <a:latin typeface="Cambria Math" panose="02040503050406030204" pitchFamily="18" charset="0"/>
+                      </a:rPr>
+                      <m:t>𝑨</m:t>
+                    </m:r>
+                  </m:oMath>
+                </a14:m>
+                <a:r>
+                  <a:rPr sz="2800" b="1" dirty="0">
+                    <a:solidFill>
+                      <a:srgbClr val="3D1F21"/>
+                    </a:solidFill>
+                  </a:rPr>
+                  <a:t> e </a:t>
+                </a:r>
+                <a14:m>
+                  <m:oMath xmlns:m="http://schemas.openxmlformats.org/officeDocument/2006/math">
+                    <m:r>
+                      <a:rPr lang="pt-BR" sz="2800" b="1" i="1" dirty="0" smtClean="0">
+                        <a:solidFill>
+                          <a:srgbClr val="3D1F21"/>
+                        </a:solidFill>
+                        <a:latin typeface="Cambria Math" panose="02040503050406030204" pitchFamily="18" charset="0"/>
+                      </a:rPr>
+                      <m:t>𝑩</m:t>
+                    </m:r>
+                  </m:oMath>
+                </a14:m>
+                <a:r>
+                  <a:rPr sz="2800" b="1" dirty="0">
+                    <a:solidFill>
+                      <a:srgbClr val="3D1F21"/>
+                    </a:solidFill>
+                  </a:rPr>
+                  <a:t> </a:t>
+                </a:r>
+                <a:r>
+                  <a:rPr sz="2800" b="1" dirty="0" err="1">
+                    <a:solidFill>
+                      <a:srgbClr val="3D1F21"/>
+                    </a:solidFill>
+                  </a:rPr>
+                  <a:t>são</a:t>
+                </a:r>
+                <a:r>
+                  <a:rPr sz="2800" b="1" dirty="0">
+                    <a:solidFill>
+                      <a:srgbClr val="3D1F21"/>
+                    </a:solidFill>
+                  </a:rPr>
+                  <a:t> </a:t>
+                </a:r>
+                <a:r>
+                  <a:rPr sz="2800" b="1" dirty="0" err="1">
+                    <a:solidFill>
+                      <a:srgbClr val="3D1F21"/>
+                    </a:solidFill>
+                  </a:rPr>
+                  <a:t>dois</a:t>
+                </a:r>
+                <a:r>
+                  <a:rPr sz="2800" b="1" dirty="0">
+                    <a:solidFill>
+                      <a:srgbClr val="3D1F21"/>
+                    </a:solidFill>
+                  </a:rPr>
+                  <a:t> conjuntos </a:t>
+                </a:r>
+                <a:r>
+                  <a:rPr sz="2800" b="1" dirty="0" err="1">
+                    <a:solidFill>
+                      <a:srgbClr val="3D1F21"/>
+                    </a:solidFill>
+                  </a:rPr>
+                  <a:t>disjuntos</a:t>
+                </a:r>
+                <a:r>
+                  <a:rPr sz="2800" b="1" dirty="0">
+                    <a:solidFill>
+                      <a:srgbClr val="3D1F21"/>
+                    </a:solidFill>
+                  </a:rPr>
+                  <a:t>, o que </a:t>
+                </a:r>
+                <a:r>
+                  <a:rPr sz="2800" b="1" dirty="0" err="1">
+                    <a:solidFill>
+                      <a:srgbClr val="3D1F21"/>
+                    </a:solidFill>
+                  </a:rPr>
+                  <a:t>isso</a:t>
+                </a:r>
+                <a:r>
+                  <a:rPr sz="2800" b="1" dirty="0">
+                    <a:solidFill>
+                      <a:srgbClr val="3D1F21"/>
+                    </a:solidFill>
+                  </a:rPr>
+                  <a:t> </a:t>
+                </a:r>
+                <a:r>
+                  <a:rPr sz="2800" b="1" dirty="0" err="1">
+                    <a:solidFill>
+                      <a:srgbClr val="3D1F21"/>
+                    </a:solidFill>
+                  </a:rPr>
+                  <a:t>significa</a:t>
+                </a:r>
+                <a:r>
+                  <a:rPr sz="2800" b="1" dirty="0">
+                    <a:solidFill>
+                      <a:srgbClr val="3D1F21"/>
+                    </a:solidFill>
+                  </a:rPr>
+                  <a:t> </a:t>
+                </a:r>
+                <a:r>
+                  <a:rPr sz="2800" b="1" dirty="0" err="1">
+                    <a:solidFill>
+                      <a:srgbClr val="3D1F21"/>
+                    </a:solidFill>
+                  </a:rPr>
+                  <a:t>sobre</a:t>
+                </a:r>
+                <a:r>
+                  <a:rPr sz="2800" b="1" dirty="0">
+                    <a:solidFill>
+                      <a:srgbClr val="3D1F21"/>
+                    </a:solidFill>
+                  </a:rPr>
+                  <a:t> </a:t>
+                </a:r>
+                <a14:m>
+                  <m:oMath xmlns:m="http://schemas.openxmlformats.org/officeDocument/2006/math">
+                    <m:r>
+                      <a:rPr lang="pt-BR" sz="2800" b="1" i="1" dirty="0" smtClean="0">
+                        <a:solidFill>
+                          <a:srgbClr val="3D1F21"/>
+                        </a:solidFill>
+                        <a:latin typeface="Cambria Math" panose="02040503050406030204" pitchFamily="18" charset="0"/>
+                      </a:rPr>
+                      <m:t>𝑨</m:t>
+                    </m:r>
+                    <m:r>
+                      <a:rPr lang="pt-BR" sz="2800" b="1" i="1" dirty="0" smtClean="0">
+                        <a:solidFill>
+                          <a:srgbClr val="3D1F21"/>
+                        </a:solidFill>
+                        <a:latin typeface="Cambria Math" panose="02040503050406030204" pitchFamily="18" charset="0"/>
+                      </a:rPr>
+                      <m:t> ∩ </m:t>
+                    </m:r>
+                    <m:r>
+                      <a:rPr lang="pt-BR" sz="2800" b="1" i="1" dirty="0" smtClean="0">
+                        <a:solidFill>
+                          <a:srgbClr val="3D1F21"/>
+                        </a:solidFill>
+                        <a:latin typeface="Cambria Math" panose="02040503050406030204" pitchFamily="18" charset="0"/>
+                      </a:rPr>
+                      <m:t>𝑩</m:t>
+                    </m:r>
+                  </m:oMath>
+                </a14:m>
+                <a:r>
+                  <a:rPr sz="2800" b="1" dirty="0">
+                    <a:solidFill>
+                      <a:srgbClr val="3D1F21"/>
+                    </a:solidFill>
+                  </a:rPr>
+                  <a:t>?</a:t>
+                </a:r>
+              </a:p>
+            </p:txBody>
+          </p:sp>
+        </mc:Choice>
+        <mc:Fallback>
+          <p:sp>
+            <p:nvSpPr>
+              <p:cNvPr id="4" name="TextBox 3"/>
+              <p:cNvSpPr txBox="1">
+                <a:spLocks noRot="1" noChangeAspect="1" noMove="1" noResize="1" noEditPoints="1" noAdjustHandles="1" noChangeArrowheads="1" noChangeShapeType="1" noTextEdit="1"/>
+              </p:cNvSpPr>
+              <p:nvPr/>
+            </p:nvSpPr>
+            <p:spPr>
+              <a:xfrm>
+                <a:off x="1188720" y="2103120"/>
+                <a:ext cx="9814560" cy="1166281"/>
+              </a:xfrm>
+              <a:prstGeom prst="rect">
+                <a:avLst/>
+              </a:prstGeom>
+              <a:blipFill>
+                <a:blip r:embed="rId2"/>
+                <a:stretch>
+                  <a:fillRect b="-14136"/>
+                </a:stretch>
+              </a:blipFill>
+            </p:spPr>
+            <p:txBody>
+              <a:bodyPr/>
+              <a:lstStyle/>
+              <a:p>
+                <a:r>
+                  <a:rPr lang="pt-BR">
+                    <a:noFill/>
+                  </a:rPr>
+                  <a:t> </a:t>
+                </a:r>
+              </a:p>
+            </p:txBody>
+          </p:sp>
+        </mc:Fallback>
+      </mc:AlternateContent>
       <p:sp>
         <p:nvSpPr>
-          <p:cNvPr id="3" name="CaixaDeTexto 2">
-            <a:extLst>
-              <a:ext uri="{FF2B5EF4-FFF2-40B4-BE49-F238E27FC236}">
-                <a16:creationId xmlns:a16="http://schemas.microsoft.com/office/drawing/2014/main" id="{19131A04-B5D6-4211-8B49-4615DE5797E9}"/>
-              </a:ext>
-            </a:extLst>
-          </p:cNvPr>
+          <p:cNvPr id="5" name="TextBox 4"/>
           <p:cNvSpPr txBox="1"/>
           <p:nvPr/>
         </p:nvSpPr>
         <p:spPr>
           <a:xfrm>
-            <a:off x="361395" y="6488668"/>
-            <a:ext cx="2395336" cy="300210"/>
+            <a:off x="914400" y="5577840"/>
+            <a:ext cx="10363200" cy="457200"/>
           </a:xfrm>
           <a:prstGeom prst="rect">
             <a:avLst/>
@@ -5881,60 +6339,57 @@
           <a:noFill/>
         </p:spPr>
         <p:txBody>
-          <a:bodyPr wrap="none" rtlCol="0">
+          <a:bodyPr wrap="square">
             <a:spAutoFit/>
           </a:bodyPr>
           <a:lstStyle/>
           <a:p>
-            <a:r>
-              <a:rPr lang="pt-BR" sz="1351" dirty="0"/>
-              <a:t>Professor: Marcos Goulart Lima</a:t>
+            <a:pPr algn="ctr"/>
+            <a:r>
+              <a:rPr sz="1600" i="1">
+                <a:solidFill>
+                  <a:srgbClr val="8A5C5E"/>
+                </a:solidFill>
+              </a:rPr>
+              <a:t>Sorteie um aluno antes de continuar</a:t>
             </a:r>
           </a:p>
         </p:txBody>
       </p:sp>
-      <p:pic>
-        <p:nvPicPr>
-          <p:cNvPr id="8" name="Espaço Reservado para Conteúdo 4">
-            <a:extLst>
-              <a:ext uri="{FF2B5EF4-FFF2-40B4-BE49-F238E27FC236}">
-                <a16:creationId xmlns:a16="http://schemas.microsoft.com/office/drawing/2014/main" id="{65AB402D-D1A8-4F31-BA42-34A6F0FC69F9}"/>
-              </a:ext>
-            </a:extLst>
-          </p:cNvPr>
-          <p:cNvPicPr>
-            <a:picLocks noChangeAspect="1"/>
-          </p:cNvPicPr>
+      <p:sp>
+        <p:nvSpPr>
+          <p:cNvPr id="6" name="TextBox 5"/>
+          <p:cNvSpPr txBox="1"/>
           <p:nvPr/>
-        </p:nvPicPr>
-        <p:blipFill>
-          <a:blip r:embed="rId2">
-            <a:extLst>
-              <a:ext uri="{28A0092B-C50C-407E-A947-70E740481C1C}">
-                <a14:useLocalDpi xmlns:a14="http://schemas.microsoft.com/office/drawing/2010/main" val="0"/>
-              </a:ext>
-            </a:extLst>
-          </a:blip>
-          <a:stretch>
-            <a:fillRect/>
-          </a:stretch>
-        </p:blipFill>
+        </p:nvSpPr>
         <p:spPr>
           <a:xfrm>
-            <a:off x="62144" y="112237"/>
-            <a:ext cx="588096" cy="1228523"/>
+            <a:off x="365760" y="6464808"/>
+            <a:ext cx="4828032" cy="310896"/>
           </a:xfrm>
           <a:prstGeom prst="rect">
             <a:avLst/>
           </a:prstGeom>
+          <a:noFill/>
         </p:spPr>
-      </p:pic>
+        <p:txBody>
+          <a:bodyPr wrap="none">
+            <a:spAutoFit/>
+          </a:bodyPr>
+          <a:lstStyle/>
+          <a:p>
+            <a:r>
+              <a:rPr sz="1400">
+                <a:solidFill>
+                  <a:srgbClr val="8A5C5E"/>
+                </a:solidFill>
+              </a:rPr>
+              <a:t>Professor: Marcos Goulart Lima</a:t>
+            </a:r>
+          </a:p>
+        </p:txBody>
+      </p:sp>
     </p:spTree>
-    <p:extLst>
-      <p:ext uri="{BB962C8B-B14F-4D97-AF65-F5344CB8AC3E}">
-        <p14:creationId xmlns:p14="http://schemas.microsoft.com/office/powerpoint/2010/main" val="2882561520"/>
-      </p:ext>
-    </p:extLst>
   </p:cSld>
   <p:clrMapOvr>
     <a:masterClrMapping/>
@@ -6024,7 +6479,7 @@
         <p:spPr>
           <a:xfrm>
             <a:off x="881687" y="1506234"/>
-            <a:ext cx="10067277" cy="4647426"/>
+            <a:ext cx="10067277" cy="4220835"/>
           </a:xfrm>
           <a:prstGeom prst="rect">
             <a:avLst/>
@@ -6039,7 +6494,7 @@
           <a:p>
             <a:r>
               <a:rPr lang="pt-BR" sz="2800" b="1" dirty="0"/>
-              <a:t>Evento aleatório</a:t>
+              <a:t>Definição do dicionário</a:t>
             </a:r>
           </a:p>
           <a:p>
@@ -6050,66 +6505,47 @@
             <a:endParaRPr lang="pt-BR" sz="2800" dirty="0"/>
           </a:p>
           <a:p>
+            <a:pPr>
+              <a:lnSpc>
+                <a:spcPct val="150000"/>
+              </a:lnSpc>
+            </a:pPr>
             <a:r>
               <a:rPr lang="pt-BR" sz="2400" dirty="0"/>
-              <a:t xml:space="preserve">Uma série de experimentos cujas condições iniciais são iguais e a condição final (resultado) não é previsível, é chamado de </a:t>
-            </a:r>
-            <a:r>
-              <a:rPr lang="pt-BR" sz="2400" u="sng" dirty="0"/>
-              <a:t>experimento aleatório</a:t>
-            </a:r>
+              <a:t>1.</a:t>
+            </a:r>
+          </a:p>
+          <a:p>
+            <a:pPr>
+              <a:lnSpc>
+                <a:spcPct val="150000"/>
+              </a:lnSpc>
+            </a:pPr>
             <a:r>
               <a:rPr lang="pt-BR" sz="2400" dirty="0"/>
-              <a:t>.</a:t>
-            </a:r>
-          </a:p>
-          <a:p>
-            <a:endParaRPr lang="pt-BR" sz="2400" dirty="0"/>
-          </a:p>
-          <a:p>
+              <a:t>perspectiva favorável de que algo venha a ocorrer; possibilidade, chance.</a:t>
+            </a:r>
+          </a:p>
+          <a:p>
+            <a:pPr>
+              <a:lnSpc>
+                <a:spcPct val="150000"/>
+              </a:lnSpc>
+            </a:pPr>
             <a:r>
               <a:rPr lang="pt-BR" sz="2400" dirty="0"/>
-              <a:t>Um experimento aleatório, associado a um resultado obtido , é chamado de evento aleatório.</a:t>
-            </a:r>
-          </a:p>
-          <a:p>
-            <a:endParaRPr lang="pt-BR" sz="2400" dirty="0"/>
-          </a:p>
-          <a:p>
+              <a:t>2.</a:t>
+            </a:r>
+          </a:p>
+          <a:p>
+            <a:pPr>
+              <a:lnSpc>
+                <a:spcPct val="150000"/>
+              </a:lnSpc>
+            </a:pPr>
             <a:r>
               <a:rPr lang="pt-BR" sz="2400" dirty="0"/>
-              <a:t>Exemplos de experimentos aleatórios:</a:t>
-            </a:r>
-            <a:endParaRPr lang="pt-BR" sz="2800" dirty="0"/>
-          </a:p>
-          <a:p>
-            <a:pPr marL="800089" lvl="1" indent="-342900">
-              <a:buFont typeface="Arial" panose="020B0604020202020204" pitchFamily="34" charset="0"/>
-              <a:buChar char="•"/>
-            </a:pPr>
-            <a:r>
-              <a:rPr lang="pt-BR" sz="2400" dirty="0"/>
-              <a:t>Lançamento de uma moeda honesta,</a:t>
-            </a:r>
-          </a:p>
-          <a:p>
-            <a:pPr marL="800089" lvl="1" indent="-342900">
-              <a:buFont typeface="Arial" panose="020B0604020202020204" pitchFamily="34" charset="0"/>
-              <a:buChar char="•"/>
-            </a:pPr>
-            <a:r>
-              <a:rPr lang="pt-BR" sz="2400" dirty="0"/>
-              <a:t>Retirada de uma carta de um baralho com 52 cartas</a:t>
-            </a:r>
-          </a:p>
-          <a:p>
-            <a:pPr marL="800089" lvl="1" indent="-342900">
-              <a:buFont typeface="Arial" panose="020B0604020202020204" pitchFamily="34" charset="0"/>
-              <a:buChar char="•"/>
-            </a:pPr>
-            <a:r>
-              <a:rPr lang="pt-BR" sz="2400" dirty="0"/>
-              <a:t>Determinação da vida útil de um componente eletrônico.</a:t>
+              <a:t>grau de segurança com que se pode esperar a realização de um evento, determinado pela frequência relativa dos eventos do mesmo tipo numa série de tentativas.</a:t>
             </a:r>
           </a:p>
         </p:txBody>
@@ -6188,7 +6624,7 @@
     </p:spTree>
     <p:extLst>
       <p:ext uri="{BB962C8B-B14F-4D97-AF65-F5344CB8AC3E}">
-        <p14:creationId xmlns:p14="http://schemas.microsoft.com/office/powerpoint/2010/main" val="3503725877"/>
+        <p14:creationId xmlns:p14="http://schemas.microsoft.com/office/powerpoint/2010/main" val="2882561520"/>
       </p:ext>
     </p:extLst>
   </p:cSld>
@@ -6265,147 +6701,111 @@
           </a:p>
         </p:txBody>
       </p:sp>
-      <mc:AlternateContent xmlns:mc="http://schemas.openxmlformats.org/markup-compatibility/2006" xmlns:a14="http://schemas.microsoft.com/office/drawing/2010/main">
-        <mc:Choice Requires="a14">
-          <p:sp>
-            <p:nvSpPr>
-              <p:cNvPr id="6" name="CaixaDeTexto 5">
-                <a:extLst>
-                  <a:ext uri="{FF2B5EF4-FFF2-40B4-BE49-F238E27FC236}">
-                    <a16:creationId xmlns:a16="http://schemas.microsoft.com/office/drawing/2014/main" id="{720B10DA-C761-4DEE-8D86-E170E1C2E981}"/>
-                  </a:ext>
-                </a:extLst>
-              </p:cNvPr>
-              <p:cNvSpPr txBox="1"/>
-              <p:nvPr/>
-            </p:nvSpPr>
-            <p:spPr>
-              <a:xfrm>
-                <a:off x="881687" y="1506234"/>
-                <a:ext cx="10067277" cy="4278094"/>
-              </a:xfrm>
-              <a:prstGeom prst="rect">
-                <a:avLst/>
-              </a:prstGeom>
-              <a:noFill/>
-            </p:spPr>
-            <p:txBody>
-              <a:bodyPr wrap="square" rtlCol="0">
-                <a:spAutoFit/>
-              </a:bodyPr>
-              <a:lstStyle/>
-              <a:p>
-                <a:r>
-                  <a:rPr lang="pt-BR" sz="2800" b="1" dirty="0"/>
-                  <a:t>Espaço amostral</a:t>
-                </a:r>
-              </a:p>
-              <a:p>
-                <a:pPr marL="285737" indent="-285737">
-                  <a:buFont typeface="Arial" panose="020B0604020202020204" pitchFamily="34" charset="0"/>
-                  <a:buChar char="•"/>
-                </a:pPr>
-                <a:endParaRPr lang="pt-BR" sz="2800" dirty="0"/>
-              </a:p>
-              <a:p>
-                <a:r>
-                  <a:rPr lang="pt-BR" sz="2400" dirty="0"/>
-                  <a:t>Espaço amostral de um experimento aleatório é o conjunto de todos os resultados possíveis do experimento.</a:t>
-                </a:r>
-              </a:p>
-              <a:p>
-                <a:endParaRPr lang="pt-BR" sz="2400" dirty="0"/>
-              </a:p>
-              <a:p>
-                <a:r>
-                  <a:rPr lang="pt-BR" sz="2400" dirty="0"/>
-                  <a:t>Os elementos do espaço amostral serão chamados de pontos amostrais.</a:t>
-                </a:r>
-              </a:p>
-              <a:p>
-                <a:endParaRPr lang="pt-BR" sz="2400" dirty="0"/>
-              </a:p>
-              <a:p>
-                <a:r>
-                  <a:rPr lang="pt-BR" sz="2400" dirty="0"/>
-                  <a:t xml:space="preserve">Notação: </a:t>
-                </a:r>
-                <a14:m>
-                  <m:oMath xmlns:m="http://schemas.openxmlformats.org/officeDocument/2006/math">
-                    <m:r>
-                      <m:rPr>
-                        <m:sty m:val="p"/>
-                      </m:rPr>
-                      <a:rPr lang="pt-BR" sz="2400" b="0" i="0" smtClean="0">
-                        <a:latin typeface="Cambria Math" panose="02040503050406030204" pitchFamily="18" charset="0"/>
-                      </a:rPr>
-                      <m:t>Ω</m:t>
-                    </m:r>
-                  </m:oMath>
-                </a14:m>
-                <a:endParaRPr lang="pt-BR" sz="2400" dirty="0"/>
-              </a:p>
-              <a:p>
-                <a:endParaRPr lang="pt-BR" sz="2400" dirty="0"/>
-              </a:p>
-              <a:p>
-                <a:r>
-                  <a:rPr lang="pt-BR" sz="2400" b="1" dirty="0"/>
-                  <a:t xml:space="preserve">Exemplo: </a:t>
-                </a:r>
-                <a:r>
-                  <a:rPr lang="pt-BR" sz="2400" dirty="0"/>
-                  <a:t>No slide anterior, identifique os espaços amostrais dos experimentos aleatórios.</a:t>
-                </a:r>
-              </a:p>
-            </p:txBody>
-          </p:sp>
-        </mc:Choice>
-        <mc:Fallback xmlns="">
-          <p:sp>
-            <p:nvSpPr>
-              <p:cNvPr id="6" name="CaixaDeTexto 5">
-                <a:extLst>
-                  <a:ext uri="{FF2B5EF4-FFF2-40B4-BE49-F238E27FC236}">
-                    <a16:creationId xmlns:a16="http://schemas.microsoft.com/office/drawing/2014/main" id="{720B10DA-C761-4DEE-8D86-E170E1C2E981}"/>
-                  </a:ext>
-                </a:extLst>
-              </p:cNvPr>
-              <p:cNvSpPr txBox="1">
-                <a:spLocks noRot="1" noChangeAspect="1" noMove="1" noResize="1" noEditPoints="1" noAdjustHandles="1" noChangeArrowheads="1" noChangeShapeType="1" noTextEdit="1"/>
-              </p:cNvSpPr>
-              <p:nvPr/>
-            </p:nvSpPr>
-            <p:spPr>
-              <a:xfrm>
-                <a:off x="881687" y="1506234"/>
-                <a:ext cx="10067277" cy="4278094"/>
-              </a:xfrm>
-              <a:prstGeom prst="rect">
-                <a:avLst/>
-              </a:prstGeom>
-              <a:blipFill>
-                <a:blip r:embed="rId2"/>
-                <a:stretch>
-                  <a:fillRect l="-1272" t="-1282" b="-2279"/>
-                </a:stretch>
-              </a:blipFill>
-            </p:spPr>
-            <p:txBody>
-              <a:bodyPr/>
-              <a:lstStyle/>
-              <a:p>
-                <a:r>
-                  <a:rPr lang="pt-BR">
-                    <a:noFill/>
-                  </a:rPr>
-                  <a:t> </a:t>
-                </a:r>
-              </a:p>
-            </p:txBody>
-          </p:sp>
-        </mc:Fallback>
-      </mc:AlternateContent>
+      <p:sp>
+        <p:nvSpPr>
+          <p:cNvPr id="6" name="CaixaDeTexto 5">
+            <a:extLst>
+              <a:ext uri="{FF2B5EF4-FFF2-40B4-BE49-F238E27FC236}">
+                <a16:creationId xmlns:a16="http://schemas.microsoft.com/office/drawing/2014/main" id="{720B10DA-C761-4DEE-8D86-E170E1C2E981}"/>
+              </a:ext>
+            </a:extLst>
+          </p:cNvPr>
+          <p:cNvSpPr txBox="1"/>
+          <p:nvPr/>
+        </p:nvSpPr>
+        <p:spPr>
+          <a:xfrm>
+            <a:off x="881687" y="1506234"/>
+            <a:ext cx="10067277" cy="4647426"/>
+          </a:xfrm>
+          <a:prstGeom prst="rect">
+            <a:avLst/>
+          </a:prstGeom>
+          <a:noFill/>
+        </p:spPr>
+        <p:txBody>
+          <a:bodyPr wrap="square" rtlCol="0">
+            <a:spAutoFit/>
+          </a:bodyPr>
+          <a:lstStyle/>
+          <a:p>
+            <a:r>
+              <a:rPr lang="pt-BR" sz="2800" b="1" dirty="0"/>
+              <a:t>Evento aleatório</a:t>
+            </a:r>
+          </a:p>
+          <a:p>
+            <a:pPr marL="285737" indent="-285737">
+              <a:buFont typeface="Arial" panose="020B0604020202020204" pitchFamily="34" charset="0"/>
+              <a:buChar char="•"/>
+            </a:pPr>
+            <a:endParaRPr lang="pt-BR" sz="2800" dirty="0"/>
+          </a:p>
+          <a:p>
+            <a:r>
+              <a:rPr lang="pt-BR" sz="2400" dirty="0"/>
+              <a:t>Uma série de experimentos cujas condições iniciais são iguais e a condição final (resultado) não é previsível, é chamado de </a:t>
+            </a:r>
+            <a:r>
+              <a:rPr lang="pt-BR" sz="2400" u="sng" dirty="0"/>
+              <a:t>experimento aleatório</a:t>
+            </a:r>
+            <a:r>
+              <a:rPr lang="pt-BR" sz="2400" dirty="0"/>
+              <a:t>.</a:t>
+            </a:r>
+          </a:p>
+          <a:p>
+            <a:endParaRPr lang="pt-BR" sz="2400" dirty="0"/>
+          </a:p>
+          <a:p>
+            <a:r>
+              <a:rPr lang="pt-BR" sz="2400" dirty="0"/>
+              <a:t>Um experimento aleatório, associado a um resultado obtido, é chamado de evento aleatório.</a:t>
+            </a:r>
+          </a:p>
+          <a:p>
+            <a:endParaRPr lang="pt-BR" sz="2400" dirty="0"/>
+          </a:p>
+          <a:p>
+            <a:r>
+              <a:rPr lang="pt-BR" sz="2400" dirty="0"/>
+              <a:t>Exemplos de experimentos aleatórios:</a:t>
+            </a:r>
+            <a:endParaRPr lang="pt-BR" sz="2800" dirty="0"/>
+          </a:p>
+          <a:p>
+            <a:pPr marL="800089" lvl="1" indent="-342900">
+              <a:buFont typeface="Arial" panose="020B0604020202020204" pitchFamily="34" charset="0"/>
+              <a:buChar char="•"/>
+            </a:pPr>
+            <a:r>
+              <a:rPr lang="pt-BR" sz="2400" dirty="0"/>
+              <a:t>Lançamento de uma moeda honesta,</a:t>
+            </a:r>
+          </a:p>
+          <a:p>
+            <a:pPr marL="800089" lvl="1" indent="-342900">
+              <a:buFont typeface="Arial" panose="020B0604020202020204" pitchFamily="34" charset="0"/>
+              <a:buChar char="•"/>
+            </a:pPr>
+            <a:r>
+              <a:rPr lang="pt-BR" sz="2400" dirty="0"/>
+              <a:t>Retirada de uma carta de um baralho com 52 cartas</a:t>
+            </a:r>
+          </a:p>
+          <a:p>
+            <a:pPr marL="800089" lvl="1" indent="-342900">
+              <a:buFont typeface="Arial" panose="020B0604020202020204" pitchFamily="34" charset="0"/>
+              <a:buChar char="•"/>
+            </a:pPr>
+            <a:r>
+              <a:rPr lang="pt-BR" sz="2400" dirty="0"/>
+              <a:t>Determinação da vida útil de um componente eletrônico.</a:t>
+            </a:r>
+          </a:p>
+        </p:txBody>
+      </p:sp>
       <p:sp>
         <p:nvSpPr>
           <p:cNvPr id="3" name="CaixaDeTexto 2">
@@ -6480,7 +6880,7 @@
     </p:spTree>
     <p:extLst>
       <p:ext uri="{BB962C8B-B14F-4D97-AF65-F5344CB8AC3E}">
-        <p14:creationId xmlns:p14="http://schemas.microsoft.com/office/powerpoint/2010/main" val="2443557799"/>
+        <p14:creationId xmlns:p14="http://schemas.microsoft.com/office/powerpoint/2010/main" val="3503725877"/>
       </p:ext>
     </p:extLst>
   </p:cSld>
@@ -6493,6 +6893,14 @@
 <file path=ppt/slides/slide16.xml><?xml version="1.0" encoding="utf-8"?>
 <p:sld xmlns:a="http://schemas.openxmlformats.org/drawingml/2006/main" xmlns:r="http://schemas.openxmlformats.org/officeDocument/2006/relationships" xmlns:p="http://schemas.openxmlformats.org/presentationml/2006/main">
   <p:cSld>
+    <p:bg>
+      <p:bgPr>
+        <a:solidFill>
+          <a:srgbClr val="E6CCCC"/>
+        </a:solidFill>
+        <a:effectLst/>
+      </p:bgPr>
+    </p:bg>
     <p:spTree>
       <p:nvGrpSpPr>
         <p:cNvPr id="1" name=""/>
@@ -6509,70 +6917,65 @@
       </p:grpSpPr>
       <p:sp>
         <p:nvSpPr>
-          <p:cNvPr id="2" name="Título 1">
-            <a:extLst>
-              <a:ext uri="{FF2B5EF4-FFF2-40B4-BE49-F238E27FC236}">
-                <a16:creationId xmlns:a16="http://schemas.microsoft.com/office/drawing/2014/main" id="{BC798918-7CB4-450A-A042-F0B538CA25DE}"/>
-              </a:ext>
-            </a:extLst>
-          </p:cNvPr>
-          <p:cNvSpPr>
-            <a:spLocks noGrp="1"/>
-          </p:cNvSpPr>
-          <p:nvPr>
-            <p:ph type="title"/>
-          </p:nvPr>
+          <p:cNvPr id="2" name="Oval 1"/>
+          <p:cNvSpPr/>
+          <p:nvPr/>
         </p:nvSpPr>
         <p:spPr>
           <a:xfrm>
-            <a:off x="1032611" y="0"/>
-            <a:ext cx="10827959" cy="1574800"/>
+            <a:off x="5775960" y="457200"/>
+            <a:ext cx="640080" cy="640080"/>
           </a:xfrm>
+          <a:prstGeom prst="ellipse">
+            <a:avLst/>
+          </a:prstGeom>
+          <a:solidFill>
+            <a:srgbClr val="8A3B3F"/>
+          </a:solidFill>
+          <a:ln>
+            <a:noFill/>
+          </a:ln>
         </p:spPr>
+        <p:style>
+          <a:lnRef idx="1">
+            <a:schemeClr val="accent1"/>
+          </a:lnRef>
+          <a:fillRef idx="3">
+            <a:schemeClr val="accent1"/>
+          </a:fillRef>
+          <a:effectRef idx="2">
+            <a:schemeClr val="accent1"/>
+          </a:effectRef>
+          <a:fontRef idx="minor">
+            <a:schemeClr val="lt1"/>
+          </a:fontRef>
+        </p:style>
         <p:txBody>
-          <a:bodyPr>
-            <a:normAutofit/>
-          </a:bodyPr>
+          <a:bodyPr wrap="none" rtlCol="0" anchor="ctr"/>
           <a:lstStyle/>
           <a:p>
             <a:pPr algn="ctr"/>
             <a:r>
-              <a:rPr lang="pt-BR" dirty="0">
-                <a:latin typeface="AlternateGothic2 BT" panose="020B0608020202050204" pitchFamily="34" charset="0"/>
+              <a:rPr sz="2800" b="1">
+                <a:solidFill>
+                  <a:srgbClr val="FFFFFF"/>
+                </a:solidFill>
               </a:rPr>
-              <a:t>CEA055 – Estatística e Probabilidade</a:t>
-            </a:r>
-            <a:br>
-              <a:rPr lang="pt-BR" dirty="0">
-                <a:latin typeface="AlternateGothic2 BT" panose="020B0608020202050204" pitchFamily="34" charset="0"/>
-              </a:rPr>
-            </a:br>
-            <a:r>
-              <a:rPr lang="pt-BR" sz="2200" b="1" dirty="0"/>
-              <a:t>Espaço Amostral e Eventos</a:t>
-            </a:r>
-            <a:endParaRPr lang="pt-BR" dirty="0">
-              <a:latin typeface="AlternateGothic2 BT" panose="020B0608020202050204" pitchFamily="34" charset="0"/>
-            </a:endParaRPr>
+              <a:t>!</a:t>
+            </a:r>
           </a:p>
         </p:txBody>
       </p:sp>
       <p:sp>
         <p:nvSpPr>
-          <p:cNvPr id="6" name="CaixaDeTexto 5">
-            <a:extLst>
-              <a:ext uri="{FF2B5EF4-FFF2-40B4-BE49-F238E27FC236}">
-                <a16:creationId xmlns:a16="http://schemas.microsoft.com/office/drawing/2014/main" id="{720B10DA-C761-4DEE-8D86-E170E1C2E981}"/>
-              </a:ext>
-            </a:extLst>
-          </p:cNvPr>
+          <p:cNvPr id="3" name="TextBox 2"/>
           <p:cNvSpPr txBox="1"/>
           <p:nvPr/>
         </p:nvSpPr>
         <p:spPr>
           <a:xfrm>
-            <a:off x="881687" y="1506234"/>
-            <a:ext cx="10067277" cy="3970318"/>
+            <a:off x="914400" y="1371600"/>
+            <a:ext cx="10363200" cy="457200"/>
           </a:xfrm>
           <a:prstGeom prst="rect">
             <a:avLst/>
@@ -6580,65 +6983,33 @@
           <a:noFill/>
         </p:spPr>
         <p:txBody>
-          <a:bodyPr wrap="square" rtlCol="0">
+          <a:bodyPr wrap="square">
             <a:spAutoFit/>
           </a:bodyPr>
           <a:lstStyle/>
           <a:p>
-            <a:r>
-              <a:rPr lang="pt-BR" sz="2800" b="1" dirty="0"/>
-              <a:t xml:space="preserve">Exemplos: </a:t>
-            </a:r>
-            <a:r>
-              <a:rPr lang="pt-BR" sz="2800" dirty="0"/>
-              <a:t>Lançam-se dois dados de 6 faces. Encontre os subconjuntos do espaço amostral que corresponde aos eventos abaixo:</a:t>
-            </a:r>
-          </a:p>
-          <a:p>
-            <a:endParaRPr lang="pt-BR" sz="2800" dirty="0"/>
-          </a:p>
-          <a:p>
-            <a:endParaRPr lang="pt-BR" sz="2800" dirty="0"/>
-          </a:p>
-          <a:p>
-            <a:r>
-              <a:rPr lang="pt-BR" sz="2800" dirty="0"/>
-              <a:t>A: saída de faces iguais;</a:t>
-            </a:r>
-          </a:p>
-          <a:p>
-            <a:r>
-              <a:rPr lang="pt-BR" sz="2800" dirty="0"/>
-              <a:t>B: saída de faces cuja soma seja igual a 10;</a:t>
-            </a:r>
-          </a:p>
-          <a:p>
-            <a:r>
-              <a:rPr lang="pt-BR" sz="2800" dirty="0"/>
-              <a:t>C: saída de faces cuja soma seja menor que 2;</a:t>
-            </a:r>
-          </a:p>
-          <a:p>
-            <a:endParaRPr lang="pt-BR" sz="2800" b="1" dirty="0"/>
+            <a:pPr algn="ctr"/>
+            <a:r>
+              <a:rPr sz="1800" b="1">
+                <a:solidFill>
+                  <a:srgbClr val="8A3B3F"/>
+                </a:solidFill>
+              </a:rPr>
+              <a:t>VERIFICAÇÃO RÁPIDA</a:t>
+            </a:r>
           </a:p>
         </p:txBody>
       </p:sp>
       <p:sp>
         <p:nvSpPr>
-          <p:cNvPr id="3" name="CaixaDeTexto 2">
-            <a:extLst>
-              <a:ext uri="{FF2B5EF4-FFF2-40B4-BE49-F238E27FC236}">
-                <a16:creationId xmlns:a16="http://schemas.microsoft.com/office/drawing/2014/main" id="{19131A04-B5D6-4211-8B49-4615DE5797E9}"/>
-              </a:ext>
-            </a:extLst>
-          </p:cNvPr>
+          <p:cNvPr id="4" name="TextBox 3"/>
           <p:cNvSpPr txBox="1"/>
           <p:nvPr/>
         </p:nvSpPr>
         <p:spPr>
           <a:xfrm>
-            <a:off x="361395" y="6488668"/>
-            <a:ext cx="2395336" cy="300210"/>
+            <a:off x="1188720" y="2103120"/>
+            <a:ext cx="9814560" cy="2926080"/>
           </a:xfrm>
           <a:prstGeom prst="rect">
             <a:avLst/>
@@ -6646,60 +7017,95 @@
           <a:noFill/>
         </p:spPr>
         <p:txBody>
-          <a:bodyPr wrap="none" rtlCol="0">
+          <a:bodyPr wrap="square">
             <a:spAutoFit/>
           </a:bodyPr>
           <a:lstStyle/>
           <a:p>
-            <a:r>
-              <a:rPr lang="pt-BR" sz="1351" dirty="0"/>
-              <a:t>Professor: Marcos Goulart Lima</a:t>
+            <a:pPr algn="ctr">
+              <a:lnSpc>
+                <a:spcPct val="130000"/>
+              </a:lnSpc>
+            </a:pPr>
+            <a:r>
+              <a:rPr sz="2800" b="1">
+                <a:solidFill>
+                  <a:srgbClr val="3D1F21"/>
+                </a:solidFill>
+              </a:rPr>
+              <a:t>Lançar um dado é um experimento aleatório. E 'anotar a temperatura de hoje às 14h' — é um experimento aleatório? Por quê?</a:t>
             </a:r>
           </a:p>
         </p:txBody>
       </p:sp>
-      <p:pic>
-        <p:nvPicPr>
-          <p:cNvPr id="8" name="Espaço Reservado para Conteúdo 4">
-            <a:extLst>
-              <a:ext uri="{FF2B5EF4-FFF2-40B4-BE49-F238E27FC236}">
-                <a16:creationId xmlns:a16="http://schemas.microsoft.com/office/drawing/2014/main" id="{65AB402D-D1A8-4F31-BA42-34A6F0FC69F9}"/>
-              </a:ext>
-            </a:extLst>
-          </p:cNvPr>
-          <p:cNvPicPr>
-            <a:picLocks noChangeAspect="1"/>
-          </p:cNvPicPr>
+      <p:sp>
+        <p:nvSpPr>
+          <p:cNvPr id="5" name="TextBox 4"/>
+          <p:cNvSpPr txBox="1"/>
           <p:nvPr/>
-        </p:nvPicPr>
-        <p:blipFill>
-          <a:blip r:embed="rId2">
-            <a:extLst>
-              <a:ext uri="{28A0092B-C50C-407E-A947-70E740481C1C}">
-                <a14:useLocalDpi xmlns:a14="http://schemas.microsoft.com/office/drawing/2010/main" val="0"/>
-              </a:ext>
-            </a:extLst>
-          </a:blip>
-          <a:stretch>
-            <a:fillRect/>
-          </a:stretch>
-        </p:blipFill>
+        </p:nvSpPr>
         <p:spPr>
           <a:xfrm>
-            <a:off x="62144" y="112237"/>
-            <a:ext cx="588096" cy="1228523"/>
+            <a:off x="914400" y="5577840"/>
+            <a:ext cx="10363200" cy="457200"/>
           </a:xfrm>
           <a:prstGeom prst="rect">
             <a:avLst/>
           </a:prstGeom>
+          <a:noFill/>
         </p:spPr>
-      </p:pic>
+        <p:txBody>
+          <a:bodyPr wrap="square">
+            <a:spAutoFit/>
+          </a:bodyPr>
+          <a:lstStyle/>
+          <a:p>
+            <a:pPr algn="ctr"/>
+            <a:r>
+              <a:rPr sz="1600" i="1">
+                <a:solidFill>
+                  <a:srgbClr val="8A5C5E"/>
+                </a:solidFill>
+              </a:rPr>
+              <a:t>Sorteie um aluno antes de continuar</a:t>
+            </a:r>
+          </a:p>
+        </p:txBody>
+      </p:sp>
+      <p:sp>
+        <p:nvSpPr>
+          <p:cNvPr id="6" name="TextBox 5"/>
+          <p:cNvSpPr txBox="1"/>
+          <p:nvPr/>
+        </p:nvSpPr>
+        <p:spPr>
+          <a:xfrm>
+            <a:off x="365760" y="6464808"/>
+            <a:ext cx="4828032" cy="310896"/>
+          </a:xfrm>
+          <a:prstGeom prst="rect">
+            <a:avLst/>
+          </a:prstGeom>
+          <a:noFill/>
+        </p:spPr>
+        <p:txBody>
+          <a:bodyPr wrap="none">
+            <a:spAutoFit/>
+          </a:bodyPr>
+          <a:lstStyle/>
+          <a:p>
+            <a:r>
+              <a:rPr sz="1400">
+                <a:solidFill>
+                  <a:srgbClr val="8A5C5E"/>
+                </a:solidFill>
+              </a:rPr>
+              <a:t>Professor: Marcos Goulart Lima</a:t>
+            </a:r>
+          </a:p>
+        </p:txBody>
+      </p:sp>
     </p:spTree>
-    <p:extLst>
-      <p:ext uri="{BB962C8B-B14F-4D97-AF65-F5344CB8AC3E}">
-        <p14:creationId xmlns:p14="http://schemas.microsoft.com/office/powerpoint/2010/main" val="2410628895"/>
-      </p:ext>
-    </p:extLst>
   </p:cSld>
   <p:clrMapOvr>
     <a:masterClrMapping/>
@@ -6774,63 +7180,154 @@
           </a:p>
         </p:txBody>
       </p:sp>
-      <p:sp>
-        <p:nvSpPr>
-          <p:cNvPr id="6" name="CaixaDeTexto 5">
-            <a:extLst>
-              <a:ext uri="{FF2B5EF4-FFF2-40B4-BE49-F238E27FC236}">
-                <a16:creationId xmlns:a16="http://schemas.microsoft.com/office/drawing/2014/main" id="{720B10DA-C761-4DEE-8D86-E170E1C2E981}"/>
-              </a:ext>
-            </a:extLst>
-          </p:cNvPr>
-          <p:cNvSpPr txBox="1"/>
-          <p:nvPr/>
-        </p:nvSpPr>
-        <p:spPr>
-          <a:xfrm>
-            <a:off x="881687" y="1506234"/>
-            <a:ext cx="10067277" cy="3970318"/>
-          </a:xfrm>
-          <a:prstGeom prst="rect">
-            <a:avLst/>
-          </a:prstGeom>
-          <a:noFill/>
-        </p:spPr>
-        <p:txBody>
-          <a:bodyPr wrap="square" rtlCol="0">
-            <a:spAutoFit/>
-          </a:bodyPr>
-          <a:lstStyle/>
-          <a:p>
-            <a:r>
-              <a:rPr lang="pt-BR" sz="2800" b="1" dirty="0"/>
-              <a:t>Árvore de eventos aleatórios</a:t>
-            </a:r>
-          </a:p>
-          <a:p>
-            <a:endParaRPr lang="pt-BR" sz="2800" b="1" dirty="0"/>
-          </a:p>
-          <a:p>
-            <a:r>
-              <a:rPr lang="pt-BR" sz="2800" dirty="0"/>
-              <a:t>É um diagrama que exibe todos os eventos aleatórios de uma experimento.</a:t>
-            </a:r>
-          </a:p>
-          <a:p>
-            <a:endParaRPr lang="pt-BR" sz="2800" dirty="0"/>
-          </a:p>
-          <a:p>
-            <a:r>
-              <a:rPr lang="pt-BR" sz="2800" dirty="0"/>
-              <a:t xml:space="preserve">Exemplo: Considere o seguinte experimento: joga-se uma moeda honesta e, em seguida, uma dado com quatro faces. Exiba a árvore de eventos aleatórios desse experimento.  </a:t>
-            </a:r>
-          </a:p>
-          <a:p>
-            <a:pPr lvl="1"/>
-            <a:endParaRPr lang="pt-BR" sz="2800" dirty="0"/>
-          </a:p>
-        </p:txBody>
-      </p:sp>
+      <mc:AlternateContent xmlns:mc="http://schemas.openxmlformats.org/markup-compatibility/2006" xmlns:a14="http://schemas.microsoft.com/office/drawing/2010/main">
+        <mc:Choice Requires="a14">
+          <p:sp>
+            <p:nvSpPr>
+              <p:cNvPr id="6" name="CaixaDeTexto 5">
+                <a:extLst>
+                  <a:ext uri="{FF2B5EF4-FFF2-40B4-BE49-F238E27FC236}">
+                    <a16:creationId xmlns:a16="http://schemas.microsoft.com/office/drawing/2014/main" id="{720B10DA-C761-4DEE-8D86-E170E1C2E981}"/>
+                  </a:ext>
+                </a:extLst>
+              </p:cNvPr>
+              <p:cNvSpPr txBox="1"/>
+              <p:nvPr/>
+            </p:nvSpPr>
+            <p:spPr>
+              <a:xfrm>
+                <a:off x="881687" y="1506234"/>
+                <a:ext cx="10067277" cy="3970318"/>
+              </a:xfrm>
+              <a:prstGeom prst="rect">
+                <a:avLst/>
+              </a:prstGeom>
+              <a:noFill/>
+            </p:spPr>
+            <p:txBody>
+              <a:bodyPr wrap="square" rtlCol="0">
+                <a:spAutoFit/>
+              </a:bodyPr>
+              <a:lstStyle/>
+              <a:p>
+                <a:pPr>
+                  <a:lnSpc>
+                    <a:spcPct val="150000"/>
+                  </a:lnSpc>
+                </a:pPr>
+                <a:r>
+                  <a:rPr lang="pt-BR" sz="2800" b="1" dirty="0"/>
+                  <a:t>Espaço amostral</a:t>
+                </a:r>
+              </a:p>
+              <a:p>
+                <a:pPr marL="285737" indent="-285737">
+                  <a:lnSpc>
+                    <a:spcPct val="150000"/>
+                  </a:lnSpc>
+                  <a:buFont typeface="Arial" panose="020B0604020202020204" pitchFamily="34" charset="0"/>
+                  <a:buChar char="•"/>
+                </a:pPr>
+                <a:endParaRPr lang="pt-BR" sz="2800" dirty="0"/>
+              </a:p>
+              <a:p>
+                <a:pPr>
+                  <a:lnSpc>
+                    <a:spcPct val="150000"/>
+                  </a:lnSpc>
+                </a:pPr>
+                <a:r>
+                  <a:rPr lang="pt-BR" sz="2400" dirty="0"/>
+                  <a:t>Espaço amostral de um experimento aleatório é o conjunto de todos os resultados possíveis do experimento.</a:t>
+                </a:r>
+              </a:p>
+              <a:p>
+                <a:pPr>
+                  <a:lnSpc>
+                    <a:spcPct val="150000"/>
+                  </a:lnSpc>
+                </a:pPr>
+                <a:r>
+                  <a:rPr lang="pt-BR" sz="2400" dirty="0"/>
+                  <a:t>Os elementos do espaço amostral serão chamados de pontos amostrais.</a:t>
+                </a:r>
+              </a:p>
+              <a:p>
+                <a:pPr>
+                  <a:lnSpc>
+                    <a:spcPct val="150000"/>
+                  </a:lnSpc>
+                </a:pPr>
+                <a:r>
+                  <a:rPr lang="pt-BR" sz="2400" dirty="0"/>
+                  <a:t>Notação: </a:t>
+                </a:r>
+                <a14:m>
+                  <m:oMath xmlns:m="http://schemas.openxmlformats.org/officeDocument/2006/math">
+                    <m:r>
+                      <m:rPr>
+                        <m:sty m:val="p"/>
+                      </m:rPr>
+                      <a:rPr lang="pt-BR" sz="2400" b="0" i="0" smtClean="0">
+                        <a:latin typeface="Cambria Math" panose="02040503050406030204" pitchFamily="18" charset="0"/>
+                      </a:rPr>
+                      <m:t>Ω</m:t>
+                    </m:r>
+                  </m:oMath>
+                </a14:m>
+                <a:endParaRPr lang="pt-BR" sz="2400" dirty="0"/>
+              </a:p>
+              <a:p>
+                <a:endParaRPr lang="pt-BR" sz="2400" dirty="0"/>
+              </a:p>
+            </p:txBody>
+          </p:sp>
+        </mc:Choice>
+        <mc:Fallback xmlns="">
+          <p:sp>
+            <p:nvSpPr>
+              <p:cNvPr id="6" name="CaixaDeTexto 5">
+                <a:extLst>
+                  <a:ext uri="{FF2B5EF4-FFF2-40B4-BE49-F238E27FC236}">
+                    <a16:creationId xmlns:a16="http://schemas.microsoft.com/office/drawing/2014/main" id="{720B10DA-C761-4DEE-8D86-E170E1C2E981}"/>
+                  </a:ext>
+                </a:extLst>
+              </p:cNvPr>
+              <p:cNvSpPr txBox="1">
+                <a:spLocks noRot="1" noChangeAspect="1" noMove="1" noResize="1" noEditPoints="1" noAdjustHandles="1" noChangeArrowheads="1" noChangeShapeType="1" noTextEdit="1"/>
+              </p:cNvSpPr>
+              <p:nvPr/>
+            </p:nvSpPr>
+            <p:spPr>
+              <a:xfrm>
+                <a:off x="881687" y="1506234"/>
+                <a:ext cx="10067277" cy="3970318"/>
+              </a:xfrm>
+              <a:prstGeom prst="rect">
+                <a:avLst/>
+              </a:prstGeom>
+              <a:blipFill>
+                <a:blip r:embed="rId2"/>
+                <a:stretch>
+                  <a:fillRect l="-1272"/>
+                </a:stretch>
+              </a:blipFill>
+            </p:spPr>
+            <p:txBody>
+              <a:bodyPr/>
+              <a:lstStyle/>
+              <a:p>
+                <a:r>
+                  <a:rPr lang="pt-BR">
+                    <a:noFill/>
+                  </a:rPr>
+                  <a:t> </a:t>
+                </a:r>
+              </a:p>
+            </p:txBody>
+          </p:sp>
+        </mc:Fallback>
+      </mc:AlternateContent>
       <p:sp>
         <p:nvSpPr>
           <p:cNvPr id="3" name="CaixaDeTexto 2">
@@ -6881,7 +7378,7 @@
           <p:nvPr/>
         </p:nvPicPr>
         <p:blipFill>
-          <a:blip r:embed="rId2">
+          <a:blip r:embed="rId3">
             <a:extLst>
               <a:ext uri="{28A0092B-C50C-407E-A947-70E740481C1C}">
                 <a14:useLocalDpi xmlns:a14="http://schemas.microsoft.com/office/drawing/2010/main" val="0"/>
@@ -6905,7 +7402,7 @@
     </p:spTree>
     <p:extLst>
       <p:ext uri="{BB962C8B-B14F-4D97-AF65-F5344CB8AC3E}">
-        <p14:creationId xmlns:p14="http://schemas.microsoft.com/office/powerpoint/2010/main" val="3902405498"/>
+        <p14:creationId xmlns:p14="http://schemas.microsoft.com/office/powerpoint/2010/main" val="2443557799"/>
       </p:ext>
     </p:extLst>
   </p:cSld>
@@ -6982,152 +7479,100 @@
           </a:p>
         </p:txBody>
       </p:sp>
-      <mc:AlternateContent xmlns:mc="http://schemas.openxmlformats.org/markup-compatibility/2006" xmlns:a14="http://schemas.microsoft.com/office/drawing/2010/main">
-        <mc:Choice Requires="a14">
-          <p:sp>
-            <p:nvSpPr>
-              <p:cNvPr id="6" name="CaixaDeTexto 5">
-                <a:extLst>
-                  <a:ext uri="{FF2B5EF4-FFF2-40B4-BE49-F238E27FC236}">
-                    <a16:creationId xmlns:a16="http://schemas.microsoft.com/office/drawing/2014/main" id="{720B10DA-C761-4DEE-8D86-E170E1C2E981}"/>
-                  </a:ext>
-                </a:extLst>
-              </p:cNvPr>
-              <p:cNvSpPr txBox="1"/>
-              <p:nvPr/>
-            </p:nvSpPr>
-            <p:spPr>
-              <a:xfrm>
-                <a:off x="881687" y="1506234"/>
-                <a:ext cx="10067277" cy="4278094"/>
-              </a:xfrm>
-              <a:prstGeom prst="rect">
-                <a:avLst/>
-              </a:prstGeom>
-              <a:noFill/>
-            </p:spPr>
-            <p:txBody>
-              <a:bodyPr wrap="square" rtlCol="0">
-                <a:spAutoFit/>
-              </a:bodyPr>
-              <a:lstStyle/>
-              <a:p>
-                <a:r>
-                  <a:rPr lang="pt-BR" sz="2800" b="1" dirty="0"/>
-                  <a:t>Classe dos eventos aleatórios</a:t>
-                </a:r>
-              </a:p>
-              <a:p>
-                <a:endParaRPr lang="pt-BR" sz="2800" b="1" dirty="0"/>
-              </a:p>
-              <a:p>
-                <a:r>
-                  <a:rPr lang="pt-BR" sz="2400" dirty="0"/>
-                  <a:t>E o conjunto formado de todos os eventos (subconjuntos) do espaço amostral.</a:t>
-                </a:r>
-              </a:p>
-              <a:p>
-                <a:endParaRPr lang="pt-BR" sz="2400" dirty="0"/>
-              </a:p>
-              <a:p>
-                <a:r>
-                  <a:rPr lang="pt-BR" sz="2400" b="1" dirty="0"/>
-                  <a:t xml:space="preserve">Exercício: </a:t>
-                </a:r>
-                <a:r>
-                  <a:rPr lang="pt-BR" sz="2400" dirty="0"/>
-                  <a:t>Leia o slide sobre teoria de conjuntos, a seção 1.3 do livro e responda:</a:t>
-                </a:r>
-              </a:p>
-              <a:p>
-                <a:pPr marL="457200" indent="-457200">
-                  <a:buFont typeface="Arial" panose="020B0604020202020204" pitchFamily="34" charset="0"/>
-                  <a:buChar char="•"/>
-                </a:pPr>
-                <a:endParaRPr lang="pt-BR" sz="2400" dirty="0"/>
-              </a:p>
-              <a:p>
-                <a:pPr marL="457200" indent="-457200">
-                  <a:buFont typeface="Arial" panose="020B0604020202020204" pitchFamily="34" charset="0"/>
-                  <a:buChar char="•"/>
-                </a:pPr>
-                <a:r>
-                  <a:rPr lang="pt-BR" sz="2400" dirty="0"/>
-                  <a:t>Quantos elementos tem a classe de conjuntos aleatórios de um experimento?</a:t>
-                </a:r>
-              </a:p>
-              <a:p>
-                <a:pPr marL="457200" indent="-457200">
-                  <a:buFont typeface="Arial" panose="020B0604020202020204" pitchFamily="34" charset="0"/>
-                  <a:buChar char="•"/>
-                </a:pPr>
-                <a:r>
-                  <a:rPr lang="pt-BR" sz="2400" dirty="0"/>
-                  <a:t xml:space="preserve">Como calcular a quantidade de eventos aleatórios com </a:t>
-                </a:r>
-                <a14:m>
-                  <m:oMath xmlns:m="http://schemas.openxmlformats.org/officeDocument/2006/math">
-                    <m:r>
-                      <a:rPr lang="pt-BR" sz="2400" b="0" i="1" smtClean="0">
-                        <a:latin typeface="Cambria Math" panose="02040503050406030204" pitchFamily="18" charset="0"/>
-                      </a:rPr>
-                      <m:t>𝑘</m:t>
-                    </m:r>
-                  </m:oMath>
-                </a14:m>
-                <a:r>
-                  <a:rPr lang="pt-BR" sz="2400" dirty="0"/>
-                  <a:t xml:space="preserve"> resultados possíveis?</a:t>
-                </a:r>
-              </a:p>
-            </p:txBody>
-          </p:sp>
-        </mc:Choice>
-        <mc:Fallback xmlns="">
-          <p:sp>
-            <p:nvSpPr>
-              <p:cNvPr id="6" name="CaixaDeTexto 5">
-                <a:extLst>
-                  <a:ext uri="{FF2B5EF4-FFF2-40B4-BE49-F238E27FC236}">
-                    <a16:creationId xmlns:a16="http://schemas.microsoft.com/office/drawing/2014/main" id="{720B10DA-C761-4DEE-8D86-E170E1C2E981}"/>
-                  </a:ext>
-                </a:extLst>
-              </p:cNvPr>
-              <p:cNvSpPr txBox="1">
-                <a:spLocks noRot="1" noChangeAspect="1" noMove="1" noResize="1" noEditPoints="1" noAdjustHandles="1" noChangeArrowheads="1" noChangeShapeType="1" noTextEdit="1"/>
-              </p:cNvSpPr>
-              <p:nvPr/>
-            </p:nvSpPr>
-            <p:spPr>
-              <a:xfrm>
-                <a:off x="881687" y="1506234"/>
-                <a:ext cx="10067277" cy="4278094"/>
-              </a:xfrm>
-              <a:prstGeom prst="rect">
-                <a:avLst/>
-              </a:prstGeom>
-              <a:blipFill>
-                <a:blip r:embed="rId2"/>
-                <a:stretch>
-                  <a:fillRect l="-1272" t="-1282" b="-2279"/>
-                </a:stretch>
-              </a:blipFill>
-            </p:spPr>
-            <p:txBody>
-              <a:bodyPr/>
-              <a:lstStyle/>
-              <a:p>
-                <a:r>
-                  <a:rPr lang="pt-BR">
-                    <a:noFill/>
-                  </a:rPr>
-                  <a:t> </a:t>
-                </a:r>
-              </a:p>
-            </p:txBody>
-          </p:sp>
-        </mc:Fallback>
-      </mc:AlternateContent>
+      <p:sp>
+        <p:nvSpPr>
+          <p:cNvPr id="6" name="CaixaDeTexto 5">
+            <a:extLst>
+              <a:ext uri="{FF2B5EF4-FFF2-40B4-BE49-F238E27FC236}">
+                <a16:creationId xmlns:a16="http://schemas.microsoft.com/office/drawing/2014/main" id="{720B10DA-C761-4DEE-8D86-E170E1C2E981}"/>
+              </a:ext>
+            </a:extLst>
+          </p:cNvPr>
+          <p:cNvSpPr txBox="1"/>
+          <p:nvPr/>
+        </p:nvSpPr>
+        <p:spPr>
+          <a:xfrm>
+            <a:off x="881687" y="1506234"/>
+            <a:ext cx="10067277" cy="3231654"/>
+          </a:xfrm>
+          <a:prstGeom prst="rect">
+            <a:avLst/>
+          </a:prstGeom>
+          <a:noFill/>
+        </p:spPr>
+        <p:txBody>
+          <a:bodyPr wrap="square" rtlCol="0">
+            <a:spAutoFit/>
+          </a:bodyPr>
+          <a:lstStyle/>
+          <a:p>
+            <a:pPr>
+              <a:lnSpc>
+                <a:spcPct val="150000"/>
+              </a:lnSpc>
+            </a:pPr>
+            <a:r>
+              <a:rPr lang="pt-BR" sz="2400" b="1" dirty="0"/>
+              <a:t>Exemplo: I</a:t>
+            </a:r>
+            <a:r>
+              <a:rPr lang="pt-BR" sz="2400" dirty="0"/>
+              <a:t>dentifique os espaços amostrais dos experimentos aleatórios.</a:t>
+            </a:r>
+          </a:p>
+          <a:p>
+            <a:pPr>
+              <a:lnSpc>
+                <a:spcPct val="150000"/>
+              </a:lnSpc>
+            </a:pPr>
+            <a:endParaRPr lang="pt-BR" sz="2400" dirty="0"/>
+          </a:p>
+          <a:p>
+            <a:pPr marL="800089" lvl="1" indent="-342900">
+              <a:lnSpc>
+                <a:spcPct val="150000"/>
+              </a:lnSpc>
+              <a:buFont typeface="Arial" panose="020B0604020202020204" pitchFamily="34" charset="0"/>
+              <a:buChar char="•"/>
+            </a:pPr>
+            <a:r>
+              <a:rPr lang="pt-BR" sz="2400" dirty="0"/>
+              <a:t>Lançamento de uma moeda honesta,</a:t>
+            </a:r>
+          </a:p>
+          <a:p>
+            <a:pPr marL="800089" lvl="1" indent="-342900">
+              <a:lnSpc>
+                <a:spcPct val="150000"/>
+              </a:lnSpc>
+              <a:buFont typeface="Arial" panose="020B0604020202020204" pitchFamily="34" charset="0"/>
+              <a:buChar char="•"/>
+            </a:pPr>
+            <a:r>
+              <a:rPr lang="pt-BR" sz="2400" dirty="0"/>
+              <a:t>Retirada de uma carta de um baralho com 52 cartas</a:t>
+            </a:r>
+          </a:p>
+          <a:p>
+            <a:pPr marL="800089" lvl="1" indent="-342900">
+              <a:lnSpc>
+                <a:spcPct val="150000"/>
+              </a:lnSpc>
+              <a:buFont typeface="Arial" panose="020B0604020202020204" pitchFamily="34" charset="0"/>
+              <a:buChar char="•"/>
+            </a:pPr>
+            <a:r>
+              <a:rPr lang="pt-BR" sz="2400" dirty="0"/>
+              <a:t>Determinação da vida útil de um componente eletrônico.</a:t>
+            </a:r>
+          </a:p>
+          <a:p>
+            <a:endParaRPr lang="pt-BR" sz="2400" dirty="0"/>
+          </a:p>
+        </p:txBody>
+      </p:sp>
       <p:sp>
         <p:nvSpPr>
           <p:cNvPr id="3" name="CaixaDeTexto 2">
@@ -7178,7 +7623,7 @@
           <p:nvPr/>
         </p:nvPicPr>
         <p:blipFill>
-          <a:blip r:embed="rId3">
+          <a:blip r:embed="rId2">
             <a:extLst>
               <a:ext uri="{28A0092B-C50C-407E-A947-70E740481C1C}">
                 <a14:useLocalDpi xmlns:a14="http://schemas.microsoft.com/office/drawing/2010/main" val="0"/>
@@ -7202,7 +7647,7 @@
     </p:spTree>
     <p:extLst>
       <p:ext uri="{BB962C8B-B14F-4D97-AF65-F5344CB8AC3E}">
-        <p14:creationId xmlns:p14="http://schemas.microsoft.com/office/powerpoint/2010/main" val="3926042831"/>
+        <p14:creationId xmlns:p14="http://schemas.microsoft.com/office/powerpoint/2010/main" val="2356251838"/>
       </p:ext>
     </p:extLst>
   </p:cSld>
@@ -7279,404 +7724,86 @@
           </a:p>
         </p:txBody>
       </p:sp>
-      <mc:AlternateContent xmlns:mc="http://schemas.openxmlformats.org/markup-compatibility/2006">
-        <mc:Choice xmlns:a14="http://schemas.microsoft.com/office/drawing/2010/main" Requires="a14">
-          <p:sp>
-            <p:nvSpPr>
-              <p:cNvPr id="6" name="CaixaDeTexto 5">
-                <a:extLst>
-                  <a:ext uri="{FF2B5EF4-FFF2-40B4-BE49-F238E27FC236}">
-                    <a16:creationId xmlns:a16="http://schemas.microsoft.com/office/drawing/2014/main" id="{720B10DA-C761-4DEE-8D86-E170E1C2E981}"/>
-                  </a:ext>
-                </a:extLst>
-              </p:cNvPr>
-              <p:cNvSpPr txBox="1"/>
-              <p:nvPr/>
-            </p:nvSpPr>
-            <p:spPr>
-              <a:xfrm>
-                <a:off x="881687" y="1506234"/>
-                <a:ext cx="10067277" cy="4887492"/>
-              </a:xfrm>
-              <a:prstGeom prst="rect">
-                <a:avLst/>
-              </a:prstGeom>
-              <a:noFill/>
-            </p:spPr>
-            <p:txBody>
-              <a:bodyPr wrap="square" rtlCol="0">
-                <a:spAutoFit/>
-              </a:bodyPr>
-              <a:lstStyle/>
-              <a:p>
-                <a:r>
-                  <a:rPr lang="pt-BR" sz="2800" b="1" dirty="0"/>
-                  <a:t>Operações com eventos aleatórios</a:t>
-                </a:r>
-              </a:p>
-              <a:p>
-                <a:endParaRPr lang="pt-BR" sz="2800" b="1" dirty="0"/>
-              </a:p>
-              <a:p>
-                <a:pPr marL="457200" indent="-457200">
-                  <a:buFont typeface="Arial" panose="020B0604020202020204" pitchFamily="34" charset="0"/>
-                  <a:buChar char="•"/>
-                </a:pPr>
-                <a:r>
-                  <a:rPr lang="pt-BR" sz="2800" dirty="0"/>
-                  <a:t xml:space="preserve">União: </a:t>
-                </a:r>
-                <a14:m>
-                  <m:oMath xmlns:m="http://schemas.openxmlformats.org/officeDocument/2006/math">
-                    <m:r>
-                      <a:rPr lang="pt-BR" sz="2800" b="0" i="1" smtClean="0">
-                        <a:latin typeface="Cambria Math" panose="02040503050406030204" pitchFamily="18" charset="0"/>
-                      </a:rPr>
-                      <m:t>𝐴</m:t>
-                    </m:r>
-                    <m:r>
-                      <a:rPr lang="pt-BR" sz="2800" b="0" i="1" smtClean="0">
-                        <a:latin typeface="Cambria Math" panose="02040503050406030204" pitchFamily="18" charset="0"/>
-                      </a:rPr>
-                      <m:t>∪</m:t>
-                    </m:r>
-                    <m:r>
-                      <a:rPr lang="pt-BR" sz="2800" b="0" i="1" smtClean="0">
-                        <a:latin typeface="Cambria Math" panose="02040503050406030204" pitchFamily="18" charset="0"/>
-                      </a:rPr>
-                      <m:t>𝐵</m:t>
-                    </m:r>
-                  </m:oMath>
-                </a14:m>
-                <a:r>
-                  <a:rPr lang="pt-BR" sz="2800" b="0" dirty="0"/>
-                  <a:t xml:space="preserve"> </a:t>
-                </a:r>
-              </a:p>
-              <a:p>
-                <a:pPr marL="457200" indent="-457200">
-                  <a:buFont typeface="Arial" panose="020B0604020202020204" pitchFamily="34" charset="0"/>
-                  <a:buChar char="•"/>
-                </a:pPr>
-                <a:r>
-                  <a:rPr lang="pt-BR" sz="2800" dirty="0"/>
-                  <a:t xml:space="preserve">Intersecção: </a:t>
-                </a:r>
-                <a14:m>
-                  <m:oMath xmlns:m="http://schemas.openxmlformats.org/officeDocument/2006/math">
-                    <m:r>
-                      <a:rPr lang="pt-BR" sz="2800" b="0" i="1" smtClean="0">
-                        <a:latin typeface="Cambria Math" panose="02040503050406030204" pitchFamily="18" charset="0"/>
-                      </a:rPr>
-                      <m:t>𝐴</m:t>
-                    </m:r>
-                    <m:r>
-                      <a:rPr lang="pt-BR" sz="2800" b="0" i="1" smtClean="0">
-                        <a:latin typeface="Cambria Math" panose="02040503050406030204" pitchFamily="18" charset="0"/>
-                      </a:rPr>
-                      <m:t>∩</m:t>
-                    </m:r>
-                    <m:r>
-                      <a:rPr lang="pt-BR" sz="2800" b="0" i="1" smtClean="0">
-                        <a:latin typeface="Cambria Math" panose="02040503050406030204" pitchFamily="18" charset="0"/>
-                      </a:rPr>
-                      <m:t>𝐵</m:t>
-                    </m:r>
-                  </m:oMath>
-                </a14:m>
-                <a:endParaRPr lang="pt-BR" sz="2800" b="0" dirty="0"/>
-              </a:p>
-              <a:p>
-                <a:pPr marL="457200" indent="-457200">
-                  <a:buFont typeface="Arial" panose="020B0604020202020204" pitchFamily="34" charset="0"/>
-                  <a:buChar char="•"/>
-                </a:pPr>
-                <a:r>
-                  <a:rPr lang="pt-BR" sz="2800" dirty="0"/>
-                  <a:t xml:space="preserve">Complementação: </a:t>
-                </a:r>
-                <a14:m>
-                  <m:oMath xmlns:m="http://schemas.openxmlformats.org/officeDocument/2006/math">
-                    <m:sSup>
-                      <m:sSupPr>
-                        <m:ctrlPr>
-                          <a:rPr lang="pt-BR" sz="2800" b="0" i="1" smtClean="0">
-                            <a:latin typeface="Cambria Math" panose="02040503050406030204" pitchFamily="18" charset="0"/>
-                          </a:rPr>
-                        </m:ctrlPr>
-                      </m:sSupPr>
-                      <m:e>
-                        <m:r>
-                          <a:rPr lang="pt-BR" sz="2800" b="0" i="1" smtClean="0">
-                            <a:latin typeface="Cambria Math" panose="02040503050406030204" pitchFamily="18" charset="0"/>
-                          </a:rPr>
-                          <m:t>𝐴</m:t>
-                        </m:r>
-                      </m:e>
-                      <m:sup>
-                        <m:r>
-                          <a:rPr lang="pt-BR" sz="2800" b="0" i="1" smtClean="0">
-                            <a:latin typeface="Cambria Math" panose="02040503050406030204" pitchFamily="18" charset="0"/>
-                          </a:rPr>
-                          <m:t>𝐶</m:t>
-                        </m:r>
-                      </m:sup>
-                    </m:sSup>
-                  </m:oMath>
-                </a14:m>
-                <a:r>
-                  <a:rPr lang="pt-BR" sz="2800" dirty="0"/>
-                  <a:t xml:space="preserve"> ou </a:t>
-                </a:r>
-                <a14:m>
-                  <m:oMath xmlns:m="http://schemas.openxmlformats.org/officeDocument/2006/math">
-                    <m:acc>
-                      <m:accPr>
-                        <m:chr m:val="̅"/>
-                        <m:ctrlPr>
-                          <a:rPr lang="pt-BR" sz="2800" i="1" smtClean="0">
-                            <a:latin typeface="Cambria Math" panose="02040503050406030204" pitchFamily="18" charset="0"/>
-                          </a:rPr>
-                        </m:ctrlPr>
-                      </m:accPr>
-                      <m:e>
-                        <m:r>
-                          <a:rPr lang="pt-BR" sz="2800" b="0" i="1" smtClean="0">
-                            <a:latin typeface="Cambria Math" panose="02040503050406030204" pitchFamily="18" charset="0"/>
-                          </a:rPr>
-                          <m:t>𝐴</m:t>
-                        </m:r>
-                      </m:e>
-                    </m:acc>
-                  </m:oMath>
-                </a14:m>
-                <a:endParaRPr lang="pt-BR" sz="2800" dirty="0"/>
-              </a:p>
-              <a:p>
-                <a:endParaRPr lang="pt-BR" sz="2800" dirty="0"/>
-              </a:p>
-              <a:p>
-                <a:r>
-                  <a:rPr lang="pt-BR" sz="2800" b="1" dirty="0"/>
-                  <a:t>Exemplo</a:t>
-                </a:r>
-                <a:r>
-                  <a:rPr lang="pt-BR" sz="2800" dirty="0"/>
-                  <a:t>: Considere dois lançamento de um dado com 4 faces. Defina os eventos:</a:t>
-                </a:r>
-              </a:p>
-              <a:p>
-                <a:pPr marL="457200" indent="-457200">
-                  <a:buFont typeface="Arial" panose="020B0604020202020204" pitchFamily="34" charset="0"/>
-                  <a:buChar char="•"/>
-                </a:pPr>
-                <a14:m>
-                  <m:oMath xmlns:m="http://schemas.openxmlformats.org/officeDocument/2006/math">
-                    <m:r>
-                      <a:rPr lang="pt-BR" sz="2800" i="1" dirty="0" smtClean="0">
-                        <a:latin typeface="Cambria Math" panose="02040503050406030204" pitchFamily="18" charset="0"/>
-                      </a:rPr>
-                      <m:t>𝐴</m:t>
-                    </m:r>
-                  </m:oMath>
-                </a14:m>
-                <a:r>
-                  <a:rPr lang="pt-BR" sz="2800" dirty="0"/>
-                  <a:t>: O primeiro número é par</a:t>
-                </a:r>
-              </a:p>
-              <a:p>
-                <a:pPr marL="457200" indent="-457200">
-                  <a:buFont typeface="Arial" panose="020B0604020202020204" pitchFamily="34" charset="0"/>
-                  <a:buChar char="•"/>
-                </a:pPr>
-                <a14:m>
-                  <m:oMath xmlns:m="http://schemas.openxmlformats.org/officeDocument/2006/math">
-                    <m:r>
-                      <a:rPr lang="pt-BR" sz="2800" b="0" i="1" smtClean="0">
-                        <a:latin typeface="Cambria Math" panose="02040503050406030204" pitchFamily="18" charset="0"/>
-                      </a:rPr>
-                      <m:t>𝐵</m:t>
-                    </m:r>
-                  </m:oMath>
-                </a14:m>
-                <a:r>
-                  <a:rPr lang="pt-BR" sz="2800" dirty="0"/>
-                  <a:t>: A soma dos dois lançamentos é  menor que 4</a:t>
-                </a:r>
-              </a:p>
-              <a:p>
-                <a:r>
-                  <a:rPr lang="pt-BR" sz="2800" dirty="0"/>
-                  <a:t xml:space="preserve">Encontre </a:t>
-                </a:r>
-                <a14:m>
-                  <m:oMath xmlns:m="http://schemas.openxmlformats.org/officeDocument/2006/math">
-                    <m:r>
-                      <a:rPr lang="pt-BR" sz="2800" b="0" i="1" smtClean="0">
-                        <a:latin typeface="Cambria Math" panose="02040503050406030204" pitchFamily="18" charset="0"/>
-                      </a:rPr>
-                      <m:t>𝐴</m:t>
-                    </m:r>
-                    <m:r>
-                      <a:rPr lang="pt-BR" sz="2800" b="0" i="1" smtClean="0">
-                        <a:latin typeface="Cambria Math" panose="02040503050406030204" pitchFamily="18" charset="0"/>
-                      </a:rPr>
-                      <m:t>∩</m:t>
-                    </m:r>
-                    <m:r>
-                      <a:rPr lang="pt-BR" sz="2800" b="0" i="1" smtClean="0">
-                        <a:latin typeface="Cambria Math" panose="02040503050406030204" pitchFamily="18" charset="0"/>
-                      </a:rPr>
-                      <m:t>𝐵</m:t>
-                    </m:r>
-                  </m:oMath>
-                </a14:m>
-                <a:r>
-                  <a:rPr lang="pt-BR" sz="2800" dirty="0"/>
-                  <a:t xml:space="preserve">, </a:t>
-                </a:r>
-                <a14:m>
-                  <m:oMath xmlns:m="http://schemas.openxmlformats.org/officeDocument/2006/math">
-                    <m:r>
-                      <a:rPr lang="pt-BR" sz="2800" b="0" i="1" smtClean="0">
-                        <a:latin typeface="Cambria Math" panose="02040503050406030204" pitchFamily="18" charset="0"/>
-                      </a:rPr>
-                      <m:t>𝐴</m:t>
-                    </m:r>
-                    <m:r>
-                      <a:rPr lang="pt-BR" sz="2800" b="0" i="1" smtClean="0">
-                        <a:latin typeface="Cambria Math" panose="02040503050406030204" pitchFamily="18" charset="0"/>
-                      </a:rPr>
-                      <m:t>∪</m:t>
-                    </m:r>
-                    <m:r>
-                      <a:rPr lang="pt-BR" sz="2800" b="0" i="1" smtClean="0">
-                        <a:latin typeface="Cambria Math" panose="02040503050406030204" pitchFamily="18" charset="0"/>
-                      </a:rPr>
-                      <m:t>𝐵</m:t>
-                    </m:r>
-                  </m:oMath>
-                </a14:m>
-                <a:r>
-                  <a:rPr lang="pt-BR" sz="2800" dirty="0"/>
-                  <a:t xml:space="preserve">, </a:t>
-                </a:r>
-                <a14:m>
-                  <m:oMath xmlns:m="http://schemas.openxmlformats.org/officeDocument/2006/math">
-                    <m:sSup>
-                      <m:sSupPr>
-                        <m:ctrlPr>
-                          <a:rPr lang="pt-BR" sz="2800" b="0" i="1" smtClean="0">
-                            <a:latin typeface="Cambria Math" panose="02040503050406030204" pitchFamily="18" charset="0"/>
-                          </a:rPr>
-                        </m:ctrlPr>
-                      </m:sSupPr>
-                      <m:e>
-                        <m:r>
-                          <a:rPr lang="pt-BR" sz="2800" b="0" i="1" smtClean="0">
-                            <a:latin typeface="Cambria Math" panose="02040503050406030204" pitchFamily="18" charset="0"/>
-                          </a:rPr>
-                          <m:t>𝐴</m:t>
-                        </m:r>
-                      </m:e>
-                      <m:sup>
-                        <m:r>
-                          <a:rPr lang="pt-BR" sz="2800" b="0" i="1" smtClean="0">
-                            <a:latin typeface="Cambria Math" panose="02040503050406030204" pitchFamily="18" charset="0"/>
-                          </a:rPr>
-                          <m:t>𝐶</m:t>
-                        </m:r>
-                      </m:sup>
-                    </m:sSup>
-                  </m:oMath>
-                </a14:m>
-                <a:r>
-                  <a:rPr lang="pt-BR" sz="2800" dirty="0"/>
-                  <a:t xml:space="preserve">e </a:t>
-                </a:r>
-                <a14:m>
-                  <m:oMath xmlns:m="http://schemas.openxmlformats.org/officeDocument/2006/math">
-                    <m:sSup>
-                      <m:sSupPr>
-                        <m:ctrlPr>
-                          <a:rPr lang="pt-BR" sz="2800" b="0" i="1" smtClean="0">
-                            <a:latin typeface="Cambria Math" panose="02040503050406030204" pitchFamily="18" charset="0"/>
-                          </a:rPr>
-                        </m:ctrlPr>
-                      </m:sSupPr>
-                      <m:e>
-                        <m:r>
-                          <a:rPr lang="pt-BR" sz="2800" b="0" i="1" smtClean="0">
-                            <a:latin typeface="Cambria Math" panose="02040503050406030204" pitchFamily="18" charset="0"/>
-                          </a:rPr>
-                          <m:t>𝐵</m:t>
-                        </m:r>
-                      </m:e>
-                      <m:sup>
-                        <m:r>
-                          <a:rPr lang="pt-BR" sz="2800" b="0" i="1" smtClean="0">
-                            <a:latin typeface="Cambria Math" panose="02040503050406030204" pitchFamily="18" charset="0"/>
-                          </a:rPr>
-                          <m:t>𝐶</m:t>
-                        </m:r>
-                      </m:sup>
-                    </m:sSup>
-                  </m:oMath>
-                </a14:m>
-                <a:r>
-                  <a:rPr lang="pt-BR" sz="2800" dirty="0"/>
-                  <a:t>.</a:t>
-                </a:r>
-              </a:p>
-            </p:txBody>
-          </p:sp>
-        </mc:Choice>
-        <mc:Fallback>
-          <p:sp>
-            <p:nvSpPr>
-              <p:cNvPr id="6" name="CaixaDeTexto 5">
-                <a:extLst>
-                  <a:ext uri="{FF2B5EF4-FFF2-40B4-BE49-F238E27FC236}">
-                    <a16:creationId xmlns:a16="http://schemas.microsoft.com/office/drawing/2014/main" id="{720B10DA-C761-4DEE-8D86-E170E1C2E981}"/>
-                  </a:ext>
-                </a:extLst>
-              </p:cNvPr>
-              <p:cNvSpPr txBox="1">
-                <a:spLocks noRot="1" noChangeAspect="1" noMove="1" noResize="1" noEditPoints="1" noAdjustHandles="1" noChangeArrowheads="1" noChangeShapeType="1" noTextEdit="1"/>
-              </p:cNvSpPr>
-              <p:nvPr/>
-            </p:nvSpPr>
-            <p:spPr>
-              <a:xfrm>
-                <a:off x="881687" y="1506234"/>
-                <a:ext cx="10067277" cy="4887492"/>
-              </a:xfrm>
-              <a:prstGeom prst="rect">
-                <a:avLst/>
-              </a:prstGeom>
-              <a:blipFill>
-                <a:blip r:embed="rId2"/>
-                <a:stretch>
-                  <a:fillRect l="-1272" t="-1122" b="-1621"/>
-                </a:stretch>
-              </a:blipFill>
-            </p:spPr>
-            <p:txBody>
-              <a:bodyPr/>
-              <a:lstStyle/>
-              <a:p>
-                <a:r>
-                  <a:rPr lang="pt-BR">
-                    <a:noFill/>
-                  </a:rPr>
-                  <a:t> </a:t>
-                </a:r>
-              </a:p>
-            </p:txBody>
-          </p:sp>
-        </mc:Fallback>
-      </mc:AlternateContent>
+      <p:sp>
+        <p:nvSpPr>
+          <p:cNvPr id="6" name="CaixaDeTexto 5">
+            <a:extLst>
+              <a:ext uri="{FF2B5EF4-FFF2-40B4-BE49-F238E27FC236}">
+                <a16:creationId xmlns:a16="http://schemas.microsoft.com/office/drawing/2014/main" id="{720B10DA-C761-4DEE-8D86-E170E1C2E981}"/>
+              </a:ext>
+            </a:extLst>
+          </p:cNvPr>
+          <p:cNvSpPr txBox="1"/>
+          <p:nvPr/>
+        </p:nvSpPr>
+        <p:spPr>
+          <a:xfrm>
+            <a:off x="881687" y="1506234"/>
+            <a:ext cx="10067277" cy="4401205"/>
+          </a:xfrm>
+          <a:prstGeom prst="rect">
+            <a:avLst/>
+          </a:prstGeom>
+          <a:noFill/>
+        </p:spPr>
+        <p:txBody>
+          <a:bodyPr wrap="square" rtlCol="0">
+            <a:spAutoFit/>
+          </a:bodyPr>
+          <a:lstStyle/>
+          <a:p>
+            <a:pPr>
+              <a:lnSpc>
+                <a:spcPct val="150000"/>
+              </a:lnSpc>
+            </a:pPr>
+            <a:r>
+              <a:rPr lang="pt-BR" sz="2800" b="1" dirty="0"/>
+              <a:t>Exemplos: </a:t>
+            </a:r>
+            <a:r>
+              <a:rPr lang="pt-BR" sz="2800" dirty="0"/>
+              <a:t>Lançam-se dois dados de 6 faces. Encontre os subconjuntos do espaço amostral que corresponde aos eventos abaixo:</a:t>
+            </a:r>
+          </a:p>
+          <a:p>
+            <a:pPr>
+              <a:lnSpc>
+                <a:spcPct val="150000"/>
+              </a:lnSpc>
+            </a:pPr>
+            <a:r>
+              <a:rPr lang="pt-BR" sz="2800" dirty="0"/>
+              <a:t>A: saída de faces iguais;</a:t>
+            </a:r>
+          </a:p>
+          <a:p>
+            <a:pPr>
+              <a:lnSpc>
+                <a:spcPct val="150000"/>
+              </a:lnSpc>
+            </a:pPr>
+            <a:r>
+              <a:rPr lang="pt-BR" sz="2800" dirty="0"/>
+              <a:t>B: saída de faces cuja soma seja igual a 10;</a:t>
+            </a:r>
+          </a:p>
+          <a:p>
+            <a:pPr>
+              <a:lnSpc>
+                <a:spcPct val="150000"/>
+              </a:lnSpc>
+            </a:pPr>
+            <a:r>
+              <a:rPr lang="pt-BR" sz="2800" dirty="0"/>
+              <a:t>C: saída de faces cuja soma seja menor que 2;</a:t>
+            </a:r>
+          </a:p>
+          <a:p>
+            <a:endParaRPr lang="pt-BR" sz="2800" b="1" dirty="0"/>
+          </a:p>
+        </p:txBody>
+      </p:sp>
       <p:sp>
         <p:nvSpPr>
           <p:cNvPr id="3" name="CaixaDeTexto 2">
@@ -7727,7 +7854,7 @@
           <p:nvPr/>
         </p:nvPicPr>
         <p:blipFill>
-          <a:blip r:embed="rId3">
+          <a:blip r:embed="rId2">
             <a:extLst>
               <a:ext uri="{28A0092B-C50C-407E-A947-70E740481C1C}">
                 <a14:useLocalDpi xmlns:a14="http://schemas.microsoft.com/office/drawing/2010/main" val="0"/>
@@ -7751,7 +7878,7 @@
     </p:spTree>
     <p:extLst>
       <p:ext uri="{BB962C8B-B14F-4D97-AF65-F5344CB8AC3E}">
-        <p14:creationId xmlns:p14="http://schemas.microsoft.com/office/powerpoint/2010/main" val="2463638904"/>
+        <p14:creationId xmlns:p14="http://schemas.microsoft.com/office/powerpoint/2010/main" val="2410628895"/>
       </p:ext>
     </p:extLst>
   </p:cSld>
@@ -7811,7 +7938,7 @@
               <a:rPr lang="pt-BR">
                 <a:latin typeface="AlternateGothic2 BT" panose="020B0608020202050204" pitchFamily="34" charset="0"/>
               </a:rPr>
-              <a:t xml:space="preserve">CEA055 </a:t>
+              <a:t>CEA055 </a:t>
             </a:r>
             <a:r>
               <a:rPr lang="pt-BR" dirty="0">
@@ -7881,7 +8008,7 @@
               <a:p>
                 <a:r>
                   <a:rPr lang="pt-BR" sz="2800" dirty="0"/>
-                  <a:t xml:space="preserve">Intuitivamente, por </a:t>
+                  <a:t>Intuitivamente, por </a:t>
                 </a:r>
                 <a:r>
                   <a:rPr lang="pt-BR" sz="2800" b="1" dirty="0"/>
@@ -7889,7 +8016,7 @@
                 </a:r>
                 <a:r>
                   <a:rPr lang="pt-BR" sz="2800" dirty="0"/>
-                  <a:t xml:space="preserve"> entenderemos qualquer coleção de objetos.</a:t>
+                  <a:t> entenderemos qualquer coleção de objetos.</a:t>
                 </a:r>
               </a:p>
               <a:p>
@@ -8174,6 +8301,1271 @@
           </a:p>
         </p:txBody>
       </p:sp>
+      <p:sp>
+        <p:nvSpPr>
+          <p:cNvPr id="6" name="CaixaDeTexto 5">
+            <a:extLst>
+              <a:ext uri="{FF2B5EF4-FFF2-40B4-BE49-F238E27FC236}">
+                <a16:creationId xmlns:a16="http://schemas.microsoft.com/office/drawing/2014/main" id="{720B10DA-C761-4DEE-8D86-E170E1C2E981}"/>
+              </a:ext>
+            </a:extLst>
+          </p:cNvPr>
+          <p:cNvSpPr txBox="1"/>
+          <p:nvPr/>
+        </p:nvSpPr>
+        <p:spPr>
+          <a:xfrm>
+            <a:off x="881687" y="1506234"/>
+            <a:ext cx="10067277" cy="4549835"/>
+          </a:xfrm>
+          <a:prstGeom prst="rect">
+            <a:avLst/>
+          </a:prstGeom>
+          <a:noFill/>
+        </p:spPr>
+        <p:txBody>
+          <a:bodyPr wrap="square" rtlCol="0">
+            <a:spAutoFit/>
+          </a:bodyPr>
+          <a:lstStyle/>
+          <a:p>
+            <a:pPr>
+              <a:lnSpc>
+                <a:spcPct val="150000"/>
+              </a:lnSpc>
+            </a:pPr>
+            <a:r>
+              <a:rPr lang="pt-BR" sz="2800" b="1" dirty="0"/>
+              <a:t>Árvore de eventos aleatórios</a:t>
+            </a:r>
+          </a:p>
+          <a:p>
+            <a:pPr>
+              <a:lnSpc>
+                <a:spcPct val="150000"/>
+              </a:lnSpc>
+            </a:pPr>
+            <a:r>
+              <a:rPr lang="pt-BR" sz="2800" dirty="0"/>
+              <a:t>É um diagrama que exibe todos os eventos aleatórios de uma experimento.</a:t>
+            </a:r>
+          </a:p>
+          <a:p>
+            <a:pPr>
+              <a:lnSpc>
+                <a:spcPct val="150000"/>
+              </a:lnSpc>
+            </a:pPr>
+            <a:endParaRPr lang="pt-BR" sz="2800" dirty="0"/>
+          </a:p>
+          <a:p>
+            <a:pPr>
+              <a:lnSpc>
+                <a:spcPct val="150000"/>
+              </a:lnSpc>
+            </a:pPr>
+            <a:r>
+              <a:rPr lang="pt-BR" sz="2800" b="1" dirty="0"/>
+              <a:t>Exemplo: </a:t>
+            </a:r>
+            <a:r>
+              <a:rPr lang="pt-BR" sz="2800" dirty="0"/>
+              <a:t>Considere o seguinte experimento: joga-se uma moeda honesta e, em seguida, uma dado com quatro faces. Exiba a árvore de eventos aleatórios desse experimento.  </a:t>
+            </a:r>
+          </a:p>
+        </p:txBody>
+      </p:sp>
+      <p:sp>
+        <p:nvSpPr>
+          <p:cNvPr id="3" name="CaixaDeTexto 2">
+            <a:extLst>
+              <a:ext uri="{FF2B5EF4-FFF2-40B4-BE49-F238E27FC236}">
+                <a16:creationId xmlns:a16="http://schemas.microsoft.com/office/drawing/2014/main" id="{19131A04-B5D6-4211-8B49-4615DE5797E9}"/>
+              </a:ext>
+            </a:extLst>
+          </p:cNvPr>
+          <p:cNvSpPr txBox="1"/>
+          <p:nvPr/>
+        </p:nvSpPr>
+        <p:spPr>
+          <a:xfrm>
+            <a:off x="361395" y="6488668"/>
+            <a:ext cx="2395336" cy="300210"/>
+          </a:xfrm>
+          <a:prstGeom prst="rect">
+            <a:avLst/>
+          </a:prstGeom>
+          <a:noFill/>
+        </p:spPr>
+        <p:txBody>
+          <a:bodyPr wrap="none" rtlCol="0">
+            <a:spAutoFit/>
+          </a:bodyPr>
+          <a:lstStyle/>
+          <a:p>
+            <a:r>
+              <a:rPr lang="pt-BR" sz="1351" dirty="0"/>
+              <a:t>Professor: Marcos Goulart Lima</a:t>
+            </a:r>
+          </a:p>
+        </p:txBody>
+      </p:sp>
+      <p:pic>
+        <p:nvPicPr>
+          <p:cNvPr id="8" name="Espaço Reservado para Conteúdo 4">
+            <a:extLst>
+              <a:ext uri="{FF2B5EF4-FFF2-40B4-BE49-F238E27FC236}">
+                <a16:creationId xmlns:a16="http://schemas.microsoft.com/office/drawing/2014/main" id="{65AB402D-D1A8-4F31-BA42-34A6F0FC69F9}"/>
+              </a:ext>
+            </a:extLst>
+          </p:cNvPr>
+          <p:cNvPicPr>
+            <a:picLocks noChangeAspect="1"/>
+          </p:cNvPicPr>
+          <p:nvPr/>
+        </p:nvPicPr>
+        <p:blipFill>
+          <a:blip r:embed="rId3">
+            <a:extLst>
+              <a:ext uri="{28A0092B-C50C-407E-A947-70E740481C1C}">
+                <a14:useLocalDpi xmlns:a14="http://schemas.microsoft.com/office/drawing/2010/main" val="0"/>
+              </a:ext>
+            </a:extLst>
+          </a:blip>
+          <a:stretch>
+            <a:fillRect/>
+          </a:stretch>
+        </p:blipFill>
+        <p:spPr>
+          <a:xfrm>
+            <a:off x="62144" y="112237"/>
+            <a:ext cx="588096" cy="1228523"/>
+          </a:xfrm>
+          <a:prstGeom prst="rect">
+            <a:avLst/>
+          </a:prstGeom>
+        </p:spPr>
+      </p:pic>
+    </p:spTree>
+    <p:extLst>
+      <p:ext uri="{BB962C8B-B14F-4D97-AF65-F5344CB8AC3E}">
+        <p14:creationId xmlns:p14="http://schemas.microsoft.com/office/powerpoint/2010/main" val="3902405498"/>
+      </p:ext>
+    </p:extLst>
+  </p:cSld>
+  <p:clrMapOvr>
+    <a:masterClrMapping/>
+  </p:clrMapOvr>
+</p:sld>
+</file>
+
+<file path=ppt/slides/slide21.xml><?xml version="1.0" encoding="utf-8"?>
+<p:sld xmlns:a="http://schemas.openxmlformats.org/drawingml/2006/main" xmlns:r="http://schemas.openxmlformats.org/officeDocument/2006/relationships" xmlns:p="http://schemas.openxmlformats.org/presentationml/2006/main">
+  <p:cSld>
+    <p:bg>
+      <p:bgPr>
+        <a:solidFill>
+          <a:srgbClr val="E6CCCC"/>
+        </a:solidFill>
+        <a:effectLst/>
+      </p:bgPr>
+    </p:bg>
+    <p:spTree>
+      <p:nvGrpSpPr>
+        <p:cNvPr id="1" name=""/>
+        <p:cNvGrpSpPr/>
+        <p:nvPr/>
+      </p:nvGrpSpPr>
+      <p:grpSpPr>
+        <a:xfrm>
+          <a:off x="0" y="0"/>
+          <a:ext cx="0" cy="0"/>
+          <a:chOff x="0" y="0"/>
+          <a:chExt cx="0" cy="0"/>
+        </a:xfrm>
+      </p:grpSpPr>
+      <p:sp>
+        <p:nvSpPr>
+          <p:cNvPr id="2" name="Oval 1"/>
+          <p:cNvSpPr/>
+          <p:nvPr/>
+        </p:nvSpPr>
+        <p:spPr>
+          <a:xfrm>
+            <a:off x="5775960" y="457200"/>
+            <a:ext cx="640080" cy="640080"/>
+          </a:xfrm>
+          <a:prstGeom prst="ellipse">
+            <a:avLst/>
+          </a:prstGeom>
+          <a:solidFill>
+            <a:srgbClr val="8A3B3F"/>
+          </a:solidFill>
+          <a:ln>
+            <a:noFill/>
+          </a:ln>
+        </p:spPr>
+        <p:style>
+          <a:lnRef idx="1">
+            <a:schemeClr val="accent1"/>
+          </a:lnRef>
+          <a:fillRef idx="3">
+            <a:schemeClr val="accent1"/>
+          </a:fillRef>
+          <a:effectRef idx="2">
+            <a:schemeClr val="accent1"/>
+          </a:effectRef>
+          <a:fontRef idx="minor">
+            <a:schemeClr val="lt1"/>
+          </a:fontRef>
+        </p:style>
+        <p:txBody>
+          <a:bodyPr wrap="none" rtlCol="0" anchor="ctr"/>
+          <a:lstStyle/>
+          <a:p>
+            <a:pPr algn="ctr"/>
+            <a:r>
+              <a:rPr sz="2800" b="1">
+                <a:solidFill>
+                  <a:srgbClr val="FFFFFF"/>
+                </a:solidFill>
+              </a:rPr>
+              <a:t>!</a:t>
+            </a:r>
+          </a:p>
+        </p:txBody>
+      </p:sp>
+      <p:sp>
+        <p:nvSpPr>
+          <p:cNvPr id="3" name="TextBox 2"/>
+          <p:cNvSpPr txBox="1"/>
+          <p:nvPr/>
+        </p:nvSpPr>
+        <p:spPr>
+          <a:xfrm>
+            <a:off x="914400" y="1371600"/>
+            <a:ext cx="10363200" cy="457200"/>
+          </a:xfrm>
+          <a:prstGeom prst="rect">
+            <a:avLst/>
+          </a:prstGeom>
+          <a:noFill/>
+        </p:spPr>
+        <p:txBody>
+          <a:bodyPr wrap="square">
+            <a:spAutoFit/>
+          </a:bodyPr>
+          <a:lstStyle/>
+          <a:p>
+            <a:pPr algn="ctr"/>
+            <a:r>
+              <a:rPr sz="1800" b="1">
+                <a:solidFill>
+                  <a:srgbClr val="8A3B3F"/>
+                </a:solidFill>
+              </a:rPr>
+              <a:t>VERIFICAÇÃO RÁPIDA</a:t>
+            </a:r>
+          </a:p>
+        </p:txBody>
+      </p:sp>
+      <p:sp>
+        <p:nvSpPr>
+          <p:cNvPr id="4" name="TextBox 3"/>
+          <p:cNvSpPr txBox="1"/>
+          <p:nvPr/>
+        </p:nvSpPr>
+        <p:spPr>
+          <a:xfrm>
+            <a:off x="1188720" y="2103120"/>
+            <a:ext cx="9814560" cy="2926080"/>
+          </a:xfrm>
+          <a:prstGeom prst="rect">
+            <a:avLst/>
+          </a:prstGeom>
+          <a:noFill/>
+        </p:spPr>
+        <p:txBody>
+          <a:bodyPr wrap="square">
+            <a:spAutoFit/>
+          </a:bodyPr>
+          <a:lstStyle/>
+          <a:p>
+            <a:pPr algn="ctr">
+              <a:lnSpc>
+                <a:spcPct val="130000"/>
+              </a:lnSpc>
+            </a:pPr>
+            <a:r>
+              <a:rPr sz="2800" b="1">
+                <a:solidFill>
+                  <a:srgbClr val="3D1F21"/>
+                </a:solidFill>
+              </a:rPr>
+              <a:t>Quantos elementos tem o espaço amostral desse experimento?</a:t>
+            </a:r>
+          </a:p>
+        </p:txBody>
+      </p:sp>
+      <p:sp>
+        <p:nvSpPr>
+          <p:cNvPr id="5" name="TextBox 4"/>
+          <p:cNvSpPr txBox="1"/>
+          <p:nvPr/>
+        </p:nvSpPr>
+        <p:spPr>
+          <a:xfrm>
+            <a:off x="914400" y="5577840"/>
+            <a:ext cx="10363200" cy="457200"/>
+          </a:xfrm>
+          <a:prstGeom prst="rect">
+            <a:avLst/>
+          </a:prstGeom>
+          <a:noFill/>
+        </p:spPr>
+        <p:txBody>
+          <a:bodyPr wrap="square">
+            <a:spAutoFit/>
+          </a:bodyPr>
+          <a:lstStyle/>
+          <a:p>
+            <a:pPr algn="ctr"/>
+            <a:r>
+              <a:rPr sz="1600" i="1">
+                <a:solidFill>
+                  <a:srgbClr val="8A5C5E"/>
+                </a:solidFill>
+              </a:rPr>
+              <a:t>Sorteie um aluno antes de continuar</a:t>
+            </a:r>
+          </a:p>
+        </p:txBody>
+      </p:sp>
+      <p:sp>
+        <p:nvSpPr>
+          <p:cNvPr id="6" name="TextBox 5"/>
+          <p:cNvSpPr txBox="1"/>
+          <p:nvPr/>
+        </p:nvSpPr>
+        <p:spPr>
+          <a:xfrm>
+            <a:off x="365760" y="6464808"/>
+            <a:ext cx="4828032" cy="310896"/>
+          </a:xfrm>
+          <a:prstGeom prst="rect">
+            <a:avLst/>
+          </a:prstGeom>
+          <a:noFill/>
+        </p:spPr>
+        <p:txBody>
+          <a:bodyPr wrap="none">
+            <a:spAutoFit/>
+          </a:bodyPr>
+          <a:lstStyle/>
+          <a:p>
+            <a:r>
+              <a:rPr sz="1400">
+                <a:solidFill>
+                  <a:srgbClr val="8A5C5E"/>
+                </a:solidFill>
+              </a:rPr>
+              <a:t>Professor: Marcos Goulart Lima</a:t>
+            </a:r>
+          </a:p>
+        </p:txBody>
+      </p:sp>
+    </p:spTree>
+  </p:cSld>
+  <p:clrMapOvr>
+    <a:masterClrMapping/>
+  </p:clrMapOvr>
+</p:sld>
+</file>
+
+<file path=ppt/slides/slide22.xml><?xml version="1.0" encoding="utf-8"?>
+<p:sld xmlns:a="http://schemas.openxmlformats.org/drawingml/2006/main" xmlns:r="http://schemas.openxmlformats.org/officeDocument/2006/relationships" xmlns:p="http://schemas.openxmlformats.org/presentationml/2006/main">
+  <p:cSld>
+    <p:spTree>
+      <p:nvGrpSpPr>
+        <p:cNvPr id="1" name=""/>
+        <p:cNvGrpSpPr/>
+        <p:nvPr/>
+      </p:nvGrpSpPr>
+      <p:grpSpPr>
+        <a:xfrm>
+          <a:off x="0" y="0"/>
+          <a:ext cx="0" cy="0"/>
+          <a:chOff x="0" y="0"/>
+          <a:chExt cx="0" cy="0"/>
+        </a:xfrm>
+      </p:grpSpPr>
+      <p:sp>
+        <p:nvSpPr>
+          <p:cNvPr id="2" name="Título 1">
+            <a:extLst>
+              <a:ext uri="{FF2B5EF4-FFF2-40B4-BE49-F238E27FC236}">
+                <a16:creationId xmlns:a16="http://schemas.microsoft.com/office/drawing/2014/main" id="{BC798918-7CB4-450A-A042-F0B538CA25DE}"/>
+              </a:ext>
+            </a:extLst>
+          </p:cNvPr>
+          <p:cNvSpPr>
+            <a:spLocks noGrp="1"/>
+          </p:cNvSpPr>
+          <p:nvPr>
+            <p:ph type="title"/>
+          </p:nvPr>
+        </p:nvSpPr>
+        <p:spPr>
+          <a:xfrm>
+            <a:off x="1032611" y="0"/>
+            <a:ext cx="10827959" cy="1574800"/>
+          </a:xfrm>
+        </p:spPr>
+        <p:txBody>
+          <a:bodyPr>
+            <a:normAutofit/>
+          </a:bodyPr>
+          <a:lstStyle/>
+          <a:p>
+            <a:pPr algn="ctr"/>
+            <a:r>
+              <a:rPr lang="pt-BR" dirty="0">
+                <a:latin typeface="AlternateGothic2 BT" panose="020B0608020202050204" pitchFamily="34" charset="0"/>
+              </a:rPr>
+              <a:t>CEA055 – Estatística e Probabilidade</a:t>
+            </a:r>
+            <a:br>
+              <a:rPr lang="pt-BR" dirty="0">
+                <a:latin typeface="AlternateGothic2 BT" panose="020B0608020202050204" pitchFamily="34" charset="0"/>
+              </a:rPr>
+            </a:br>
+            <a:r>
+              <a:rPr lang="pt-BR" sz="2200" b="1" dirty="0"/>
+              <a:t>Espaço Amostral e Eventos</a:t>
+            </a:r>
+            <a:endParaRPr lang="pt-BR" dirty="0">
+              <a:latin typeface="AlternateGothic2 BT" panose="020B0608020202050204" pitchFamily="34" charset="0"/>
+            </a:endParaRPr>
+          </a:p>
+        </p:txBody>
+      </p:sp>
+      <mc:AlternateContent xmlns:mc="http://schemas.openxmlformats.org/markup-compatibility/2006" xmlns:a14="http://schemas.microsoft.com/office/drawing/2010/main">
+        <mc:Choice Requires="a14">
+          <p:sp>
+            <p:nvSpPr>
+              <p:cNvPr id="6" name="CaixaDeTexto 5">
+                <a:extLst>
+                  <a:ext uri="{FF2B5EF4-FFF2-40B4-BE49-F238E27FC236}">
+                    <a16:creationId xmlns:a16="http://schemas.microsoft.com/office/drawing/2014/main" id="{720B10DA-C761-4DEE-8D86-E170E1C2E981}"/>
+                  </a:ext>
+                </a:extLst>
+              </p:cNvPr>
+              <p:cNvSpPr txBox="1"/>
+              <p:nvPr/>
+            </p:nvSpPr>
+            <p:spPr>
+              <a:xfrm>
+                <a:off x="881687" y="1506234"/>
+                <a:ext cx="10067277" cy="3255571"/>
+              </a:xfrm>
+              <a:prstGeom prst="rect">
+                <a:avLst/>
+              </a:prstGeom>
+              <a:noFill/>
+            </p:spPr>
+            <p:txBody>
+              <a:bodyPr wrap="square" rtlCol="0">
+                <a:spAutoFit/>
+              </a:bodyPr>
+              <a:lstStyle/>
+              <a:p>
+                <a:pPr>
+                  <a:lnSpc>
+                    <a:spcPct val="150000"/>
+                  </a:lnSpc>
+                </a:pPr>
+                <a:r>
+                  <a:rPr lang="pt-BR" sz="2800" b="1" dirty="0"/>
+                  <a:t>Operações com eventos aleatórios</a:t>
+                </a:r>
+              </a:p>
+              <a:p>
+                <a:pPr>
+                  <a:lnSpc>
+                    <a:spcPct val="150000"/>
+                  </a:lnSpc>
+                </a:pPr>
+                <a:endParaRPr lang="pt-BR" sz="2800" b="1" dirty="0"/>
+              </a:p>
+              <a:p>
+                <a:pPr marL="457200" indent="-457200">
+                  <a:lnSpc>
+                    <a:spcPct val="150000"/>
+                  </a:lnSpc>
+                  <a:buFont typeface="Arial" panose="020B0604020202020204" pitchFamily="34" charset="0"/>
+                  <a:buChar char="•"/>
+                </a:pPr>
+                <a:r>
+                  <a:rPr lang="pt-BR" sz="2800" dirty="0"/>
+                  <a:t>União: </a:t>
+                </a:r>
+                <a14:m>
+                  <m:oMath xmlns:m="http://schemas.openxmlformats.org/officeDocument/2006/math">
+                    <m:r>
+                      <a:rPr lang="pt-BR" sz="2800" b="0" i="1" smtClean="0">
+                        <a:latin typeface="Cambria Math" panose="02040503050406030204" pitchFamily="18" charset="0"/>
+                      </a:rPr>
+                      <m:t>𝐴</m:t>
+                    </m:r>
+                    <m:r>
+                      <a:rPr lang="pt-BR" sz="2800" b="0" i="1" smtClean="0">
+                        <a:latin typeface="Cambria Math" panose="02040503050406030204" pitchFamily="18" charset="0"/>
+                      </a:rPr>
+                      <m:t>∪</m:t>
+                    </m:r>
+                    <m:r>
+                      <a:rPr lang="pt-BR" sz="2800" b="0" i="1" smtClean="0">
+                        <a:latin typeface="Cambria Math" panose="02040503050406030204" pitchFamily="18" charset="0"/>
+                      </a:rPr>
+                      <m:t>𝐵</m:t>
+                    </m:r>
+                  </m:oMath>
+                </a14:m>
+                <a:r>
+                  <a:rPr lang="pt-BR" sz="2800" b="0" dirty="0"/>
+                  <a:t> </a:t>
+                </a:r>
+              </a:p>
+              <a:p>
+                <a:pPr marL="457200" indent="-457200">
+                  <a:lnSpc>
+                    <a:spcPct val="150000"/>
+                  </a:lnSpc>
+                  <a:buFont typeface="Arial" panose="020B0604020202020204" pitchFamily="34" charset="0"/>
+                  <a:buChar char="•"/>
+                </a:pPr>
+                <a:r>
+                  <a:rPr lang="pt-BR" sz="2800" dirty="0"/>
+                  <a:t>Intersecção: </a:t>
+                </a:r>
+                <a14:m>
+                  <m:oMath xmlns:m="http://schemas.openxmlformats.org/officeDocument/2006/math">
+                    <m:r>
+                      <a:rPr lang="pt-BR" sz="2800" b="0" i="1" smtClean="0">
+                        <a:latin typeface="Cambria Math" panose="02040503050406030204" pitchFamily="18" charset="0"/>
+                      </a:rPr>
+                      <m:t>𝐴</m:t>
+                    </m:r>
+                    <m:r>
+                      <a:rPr lang="pt-BR" sz="2800" b="0" i="1" smtClean="0">
+                        <a:latin typeface="Cambria Math" panose="02040503050406030204" pitchFamily="18" charset="0"/>
+                      </a:rPr>
+                      <m:t>∩</m:t>
+                    </m:r>
+                    <m:r>
+                      <a:rPr lang="pt-BR" sz="2800" b="0" i="1" smtClean="0">
+                        <a:latin typeface="Cambria Math" panose="02040503050406030204" pitchFamily="18" charset="0"/>
+                      </a:rPr>
+                      <m:t>𝐵</m:t>
+                    </m:r>
+                  </m:oMath>
+                </a14:m>
+                <a:endParaRPr lang="pt-BR" sz="2800" b="0" dirty="0"/>
+              </a:p>
+              <a:p>
+                <a:pPr marL="457200" indent="-457200">
+                  <a:lnSpc>
+                    <a:spcPct val="150000"/>
+                  </a:lnSpc>
+                  <a:buFont typeface="Arial" panose="020B0604020202020204" pitchFamily="34" charset="0"/>
+                  <a:buChar char="•"/>
+                </a:pPr>
+                <a:r>
+                  <a:rPr lang="pt-BR" sz="2800" dirty="0"/>
+                  <a:t>Complementação: </a:t>
+                </a:r>
+                <a14:m>
+                  <m:oMath xmlns:m="http://schemas.openxmlformats.org/officeDocument/2006/math">
+                    <m:sSup>
+                      <m:sSupPr>
+                        <m:ctrlPr>
+                          <a:rPr lang="pt-BR" sz="2800" b="0" i="1" smtClean="0">
+                            <a:latin typeface="Cambria Math" panose="02040503050406030204" pitchFamily="18" charset="0"/>
+                          </a:rPr>
+                        </m:ctrlPr>
+                      </m:sSupPr>
+                      <m:e>
+                        <m:r>
+                          <a:rPr lang="pt-BR" sz="2800" b="0" i="1" smtClean="0">
+                            <a:latin typeface="Cambria Math" panose="02040503050406030204" pitchFamily="18" charset="0"/>
+                          </a:rPr>
+                          <m:t>𝐴</m:t>
+                        </m:r>
+                      </m:e>
+                      <m:sup>
+                        <m:r>
+                          <a:rPr lang="pt-BR" sz="2800" b="0" i="1" smtClean="0">
+                            <a:latin typeface="Cambria Math" panose="02040503050406030204" pitchFamily="18" charset="0"/>
+                          </a:rPr>
+                          <m:t>𝐶</m:t>
+                        </m:r>
+                      </m:sup>
+                    </m:sSup>
+                  </m:oMath>
+                </a14:m>
+                <a:r>
+                  <a:rPr lang="pt-BR" sz="2800" dirty="0"/>
+                  <a:t> ou </a:t>
+                </a:r>
+                <a14:m>
+                  <m:oMath xmlns:m="http://schemas.openxmlformats.org/officeDocument/2006/math">
+                    <m:acc>
+                      <m:accPr>
+                        <m:chr m:val="̅"/>
+                        <m:ctrlPr>
+                          <a:rPr lang="pt-BR" sz="2800" i="1" smtClean="0">
+                            <a:latin typeface="Cambria Math" panose="02040503050406030204" pitchFamily="18" charset="0"/>
+                          </a:rPr>
+                        </m:ctrlPr>
+                      </m:accPr>
+                      <m:e>
+                        <m:r>
+                          <a:rPr lang="pt-BR" sz="2800" b="0" i="1" smtClean="0">
+                            <a:latin typeface="Cambria Math" panose="02040503050406030204" pitchFamily="18" charset="0"/>
+                          </a:rPr>
+                          <m:t>𝐴</m:t>
+                        </m:r>
+                      </m:e>
+                    </m:acc>
+                  </m:oMath>
+                </a14:m>
+                <a:endParaRPr lang="pt-BR" sz="2800" dirty="0"/>
+              </a:p>
+            </p:txBody>
+          </p:sp>
+        </mc:Choice>
+        <mc:Fallback xmlns="">
+          <p:sp>
+            <p:nvSpPr>
+              <p:cNvPr id="6" name="CaixaDeTexto 5">
+                <a:extLst>
+                  <a:ext uri="{FF2B5EF4-FFF2-40B4-BE49-F238E27FC236}">
+                    <a16:creationId xmlns:a16="http://schemas.microsoft.com/office/drawing/2014/main" id="{720B10DA-C761-4DEE-8D86-E170E1C2E981}"/>
+                  </a:ext>
+                </a:extLst>
+              </p:cNvPr>
+              <p:cNvSpPr txBox="1">
+                <a:spLocks noRot="1" noChangeAspect="1" noMove="1" noResize="1" noEditPoints="1" noAdjustHandles="1" noChangeArrowheads="1" noChangeShapeType="1" noTextEdit="1"/>
+              </p:cNvSpPr>
+              <p:nvPr/>
+            </p:nvSpPr>
+            <p:spPr>
+              <a:xfrm>
+                <a:off x="881687" y="1506234"/>
+                <a:ext cx="10067277" cy="3255571"/>
+              </a:xfrm>
+              <a:prstGeom prst="rect">
+                <a:avLst/>
+              </a:prstGeom>
+              <a:blipFill>
+                <a:blip r:embed="rId2"/>
+                <a:stretch>
+                  <a:fillRect l="-1272" b="-4494"/>
+                </a:stretch>
+              </a:blipFill>
+            </p:spPr>
+            <p:txBody>
+              <a:bodyPr/>
+              <a:lstStyle/>
+              <a:p>
+                <a:r>
+                  <a:rPr lang="pt-BR">
+                    <a:noFill/>
+                  </a:rPr>
+                  <a:t> </a:t>
+                </a:r>
+              </a:p>
+            </p:txBody>
+          </p:sp>
+        </mc:Fallback>
+      </mc:AlternateContent>
+      <p:sp>
+        <p:nvSpPr>
+          <p:cNvPr id="3" name="CaixaDeTexto 2">
+            <a:extLst>
+              <a:ext uri="{FF2B5EF4-FFF2-40B4-BE49-F238E27FC236}">
+                <a16:creationId xmlns:a16="http://schemas.microsoft.com/office/drawing/2014/main" id="{19131A04-B5D6-4211-8B49-4615DE5797E9}"/>
+              </a:ext>
+            </a:extLst>
+          </p:cNvPr>
+          <p:cNvSpPr txBox="1"/>
+          <p:nvPr/>
+        </p:nvSpPr>
+        <p:spPr>
+          <a:xfrm>
+            <a:off x="361395" y="6488668"/>
+            <a:ext cx="2395336" cy="300210"/>
+          </a:xfrm>
+          <a:prstGeom prst="rect">
+            <a:avLst/>
+          </a:prstGeom>
+          <a:noFill/>
+        </p:spPr>
+        <p:txBody>
+          <a:bodyPr wrap="none" rtlCol="0">
+            <a:spAutoFit/>
+          </a:bodyPr>
+          <a:lstStyle/>
+          <a:p>
+            <a:r>
+              <a:rPr lang="pt-BR" sz="1351" dirty="0"/>
+              <a:t>Professor: Marcos Goulart Lima</a:t>
+            </a:r>
+          </a:p>
+        </p:txBody>
+      </p:sp>
+      <p:pic>
+        <p:nvPicPr>
+          <p:cNvPr id="8" name="Espaço Reservado para Conteúdo 4">
+            <a:extLst>
+              <a:ext uri="{FF2B5EF4-FFF2-40B4-BE49-F238E27FC236}">
+                <a16:creationId xmlns:a16="http://schemas.microsoft.com/office/drawing/2014/main" id="{65AB402D-D1A8-4F31-BA42-34A6F0FC69F9}"/>
+              </a:ext>
+            </a:extLst>
+          </p:cNvPr>
+          <p:cNvPicPr>
+            <a:picLocks noChangeAspect="1"/>
+          </p:cNvPicPr>
+          <p:nvPr/>
+        </p:nvPicPr>
+        <p:blipFill>
+          <a:blip r:embed="rId3">
+            <a:extLst>
+              <a:ext uri="{28A0092B-C50C-407E-A947-70E740481C1C}">
+                <a14:useLocalDpi xmlns:a14="http://schemas.microsoft.com/office/drawing/2010/main" val="0"/>
+              </a:ext>
+            </a:extLst>
+          </a:blip>
+          <a:stretch>
+            <a:fillRect/>
+          </a:stretch>
+        </p:blipFill>
+        <p:spPr>
+          <a:xfrm>
+            <a:off x="62144" y="112237"/>
+            <a:ext cx="588096" cy="1228523"/>
+          </a:xfrm>
+          <a:prstGeom prst="rect">
+            <a:avLst/>
+          </a:prstGeom>
+        </p:spPr>
+      </p:pic>
+    </p:spTree>
+    <p:extLst>
+      <p:ext uri="{BB962C8B-B14F-4D97-AF65-F5344CB8AC3E}">
+        <p14:creationId xmlns:p14="http://schemas.microsoft.com/office/powerpoint/2010/main" val="2463638904"/>
+      </p:ext>
+    </p:extLst>
+  </p:cSld>
+  <p:clrMapOvr>
+    <a:masterClrMapping/>
+  </p:clrMapOvr>
+</p:sld>
+</file>
+
+<file path=ppt/slides/slide23.xml><?xml version="1.0" encoding="utf-8"?>
+<p:sld xmlns:a="http://schemas.openxmlformats.org/drawingml/2006/main" xmlns:r="http://schemas.openxmlformats.org/officeDocument/2006/relationships" xmlns:p="http://schemas.openxmlformats.org/presentationml/2006/main">
+  <p:cSld>
+    <p:spTree>
+      <p:nvGrpSpPr>
+        <p:cNvPr id="1" name=""/>
+        <p:cNvGrpSpPr/>
+        <p:nvPr/>
+      </p:nvGrpSpPr>
+      <p:grpSpPr>
+        <a:xfrm>
+          <a:off x="0" y="0"/>
+          <a:ext cx="0" cy="0"/>
+          <a:chOff x="0" y="0"/>
+          <a:chExt cx="0" cy="0"/>
+        </a:xfrm>
+      </p:grpSpPr>
+      <p:sp>
+        <p:nvSpPr>
+          <p:cNvPr id="2" name="Título 1">
+            <a:extLst>
+              <a:ext uri="{FF2B5EF4-FFF2-40B4-BE49-F238E27FC236}">
+                <a16:creationId xmlns:a16="http://schemas.microsoft.com/office/drawing/2014/main" id="{BC798918-7CB4-450A-A042-F0B538CA25DE}"/>
+              </a:ext>
+            </a:extLst>
+          </p:cNvPr>
+          <p:cNvSpPr>
+            <a:spLocks noGrp="1"/>
+          </p:cNvSpPr>
+          <p:nvPr>
+            <p:ph type="title"/>
+          </p:nvPr>
+        </p:nvSpPr>
+        <p:spPr>
+          <a:xfrm>
+            <a:off x="1032611" y="0"/>
+            <a:ext cx="10827959" cy="1574800"/>
+          </a:xfrm>
+        </p:spPr>
+        <p:txBody>
+          <a:bodyPr>
+            <a:normAutofit/>
+          </a:bodyPr>
+          <a:lstStyle/>
+          <a:p>
+            <a:pPr algn="ctr"/>
+            <a:r>
+              <a:rPr lang="pt-BR" dirty="0">
+                <a:latin typeface="AlternateGothic2 BT" panose="020B0608020202050204" pitchFamily="34" charset="0"/>
+              </a:rPr>
+              <a:t>CEA055 – Estatística e Probabilidade</a:t>
+            </a:r>
+            <a:br>
+              <a:rPr lang="pt-BR" dirty="0">
+                <a:latin typeface="AlternateGothic2 BT" panose="020B0608020202050204" pitchFamily="34" charset="0"/>
+              </a:rPr>
+            </a:br>
+            <a:r>
+              <a:rPr lang="pt-BR" sz="2200" b="1" dirty="0"/>
+              <a:t>Espaço Amostral e Eventos</a:t>
+            </a:r>
+            <a:endParaRPr lang="pt-BR" dirty="0">
+              <a:latin typeface="AlternateGothic2 BT" panose="020B0608020202050204" pitchFamily="34" charset="0"/>
+            </a:endParaRPr>
+          </a:p>
+        </p:txBody>
+      </p:sp>
+      <mc:AlternateContent xmlns:mc="http://schemas.openxmlformats.org/markup-compatibility/2006" xmlns:a14="http://schemas.microsoft.com/office/drawing/2010/main">
+        <mc:Choice Requires="a14">
+          <p:sp>
+            <p:nvSpPr>
+              <p:cNvPr id="6" name="CaixaDeTexto 5">
+                <a:extLst>
+                  <a:ext uri="{FF2B5EF4-FFF2-40B4-BE49-F238E27FC236}">
+                    <a16:creationId xmlns:a16="http://schemas.microsoft.com/office/drawing/2014/main" id="{720B10DA-C761-4DEE-8D86-E170E1C2E981}"/>
+                  </a:ext>
+                </a:extLst>
+              </p:cNvPr>
+              <p:cNvSpPr txBox="1"/>
+              <p:nvPr/>
+            </p:nvSpPr>
+            <p:spPr>
+              <a:xfrm>
+                <a:off x="881687" y="1506234"/>
+                <a:ext cx="10067277" cy="3901902"/>
+              </a:xfrm>
+              <a:prstGeom prst="rect">
+                <a:avLst/>
+              </a:prstGeom>
+              <a:noFill/>
+            </p:spPr>
+            <p:txBody>
+              <a:bodyPr wrap="square" rtlCol="0">
+                <a:spAutoFit/>
+              </a:bodyPr>
+              <a:lstStyle/>
+              <a:p>
+                <a:pPr>
+                  <a:lnSpc>
+                    <a:spcPct val="150000"/>
+                  </a:lnSpc>
+                </a:pPr>
+                <a:r>
+                  <a:rPr lang="pt-BR" sz="2800" b="1" dirty="0"/>
+                  <a:t>Exemplo</a:t>
+                </a:r>
+                <a:r>
+                  <a:rPr lang="pt-BR" sz="2800" dirty="0"/>
+                  <a:t>: Considere dois lançamento de um dado com 4 faces. Defina os eventos:</a:t>
+                </a:r>
+              </a:p>
+              <a:p>
+                <a:pPr marL="457200" indent="-457200">
+                  <a:lnSpc>
+                    <a:spcPct val="150000"/>
+                  </a:lnSpc>
+                  <a:buFont typeface="Arial" panose="020B0604020202020204" pitchFamily="34" charset="0"/>
+                  <a:buChar char="•"/>
+                </a:pPr>
+                <a14:m>
+                  <m:oMath xmlns:m="http://schemas.openxmlformats.org/officeDocument/2006/math">
+                    <m:r>
+                      <a:rPr lang="pt-BR" sz="2800" i="1" dirty="0" smtClean="0">
+                        <a:latin typeface="Cambria Math" panose="02040503050406030204" pitchFamily="18" charset="0"/>
+                      </a:rPr>
+                      <m:t>𝐴</m:t>
+                    </m:r>
+                  </m:oMath>
+                </a14:m>
+                <a:r>
+                  <a:rPr lang="pt-BR" sz="2800" dirty="0"/>
+                  <a:t>: O primeiro número é par</a:t>
+                </a:r>
+              </a:p>
+              <a:p>
+                <a:pPr marL="457200" indent="-457200">
+                  <a:lnSpc>
+                    <a:spcPct val="150000"/>
+                  </a:lnSpc>
+                  <a:buFont typeface="Arial" panose="020B0604020202020204" pitchFamily="34" charset="0"/>
+                  <a:buChar char="•"/>
+                </a:pPr>
+                <a14:m>
+                  <m:oMath xmlns:m="http://schemas.openxmlformats.org/officeDocument/2006/math">
+                    <m:r>
+                      <a:rPr lang="pt-BR" sz="2800" b="0" i="1" smtClean="0">
+                        <a:latin typeface="Cambria Math" panose="02040503050406030204" pitchFamily="18" charset="0"/>
+                      </a:rPr>
+                      <m:t>𝐵</m:t>
+                    </m:r>
+                  </m:oMath>
+                </a14:m>
+                <a:r>
+                  <a:rPr lang="pt-BR" sz="2800" dirty="0"/>
+                  <a:t>: A soma dos dois lançamentos é  menor que 4</a:t>
+                </a:r>
+              </a:p>
+              <a:p>
+                <a:pPr>
+                  <a:lnSpc>
+                    <a:spcPct val="150000"/>
+                  </a:lnSpc>
+                </a:pPr>
+                <a:endParaRPr lang="pt-BR" sz="2800" dirty="0"/>
+              </a:p>
+              <a:p>
+                <a:pPr>
+                  <a:lnSpc>
+                    <a:spcPct val="150000"/>
+                  </a:lnSpc>
+                </a:pPr>
+                <a:r>
+                  <a:rPr lang="pt-BR" sz="2800" dirty="0"/>
+                  <a:t>Encontre </a:t>
+                </a:r>
+                <a14:m>
+                  <m:oMath xmlns:m="http://schemas.openxmlformats.org/officeDocument/2006/math">
+                    <m:r>
+                      <a:rPr lang="pt-BR" sz="2800" b="0" i="1" smtClean="0">
+                        <a:latin typeface="Cambria Math" panose="02040503050406030204" pitchFamily="18" charset="0"/>
+                      </a:rPr>
+                      <m:t>𝐴</m:t>
+                    </m:r>
+                    <m:r>
+                      <a:rPr lang="pt-BR" sz="2800" b="0" i="1" smtClean="0">
+                        <a:latin typeface="Cambria Math" panose="02040503050406030204" pitchFamily="18" charset="0"/>
+                      </a:rPr>
+                      <m:t>∩</m:t>
+                    </m:r>
+                    <m:r>
+                      <a:rPr lang="pt-BR" sz="2800" b="0" i="1" smtClean="0">
+                        <a:latin typeface="Cambria Math" panose="02040503050406030204" pitchFamily="18" charset="0"/>
+                      </a:rPr>
+                      <m:t>𝐵</m:t>
+                    </m:r>
+                  </m:oMath>
+                </a14:m>
+                <a:r>
+                  <a:rPr lang="pt-BR" sz="2800" dirty="0"/>
+                  <a:t>, </a:t>
+                </a:r>
+                <a14:m>
+                  <m:oMath xmlns:m="http://schemas.openxmlformats.org/officeDocument/2006/math">
+                    <m:r>
+                      <a:rPr lang="pt-BR" sz="2800" b="0" i="1" smtClean="0">
+                        <a:latin typeface="Cambria Math" panose="02040503050406030204" pitchFamily="18" charset="0"/>
+                      </a:rPr>
+                      <m:t>𝐴</m:t>
+                    </m:r>
+                    <m:r>
+                      <a:rPr lang="pt-BR" sz="2800" b="0" i="1" smtClean="0">
+                        <a:latin typeface="Cambria Math" panose="02040503050406030204" pitchFamily="18" charset="0"/>
+                      </a:rPr>
+                      <m:t>∪</m:t>
+                    </m:r>
+                    <m:r>
+                      <a:rPr lang="pt-BR" sz="2800" b="0" i="1" smtClean="0">
+                        <a:latin typeface="Cambria Math" panose="02040503050406030204" pitchFamily="18" charset="0"/>
+                      </a:rPr>
+                      <m:t>𝐵</m:t>
+                    </m:r>
+                  </m:oMath>
+                </a14:m>
+                <a:r>
+                  <a:rPr lang="pt-BR" sz="2800" dirty="0"/>
+                  <a:t>, </a:t>
+                </a:r>
+                <a14:m>
+                  <m:oMath xmlns:m="http://schemas.openxmlformats.org/officeDocument/2006/math">
+                    <m:sSup>
+                      <m:sSupPr>
+                        <m:ctrlPr>
+                          <a:rPr lang="pt-BR" sz="2800" b="0" i="1" smtClean="0">
+                            <a:latin typeface="Cambria Math" panose="02040503050406030204" pitchFamily="18" charset="0"/>
+                          </a:rPr>
+                        </m:ctrlPr>
+                      </m:sSupPr>
+                      <m:e>
+                        <m:r>
+                          <a:rPr lang="pt-BR" sz="2800" b="0" i="1" smtClean="0">
+                            <a:latin typeface="Cambria Math" panose="02040503050406030204" pitchFamily="18" charset="0"/>
+                          </a:rPr>
+                          <m:t>𝐴</m:t>
+                        </m:r>
+                      </m:e>
+                      <m:sup>
+                        <m:r>
+                          <a:rPr lang="pt-BR" sz="2800" b="0" i="1" smtClean="0">
+                            <a:latin typeface="Cambria Math" panose="02040503050406030204" pitchFamily="18" charset="0"/>
+                          </a:rPr>
+                          <m:t>𝐶</m:t>
+                        </m:r>
+                      </m:sup>
+                    </m:sSup>
+                  </m:oMath>
+                </a14:m>
+                <a:r>
+                  <a:rPr lang="pt-BR" sz="2800" dirty="0"/>
+                  <a:t>e </a:t>
+                </a:r>
+                <a14:m>
+                  <m:oMath xmlns:m="http://schemas.openxmlformats.org/officeDocument/2006/math">
+                    <m:sSup>
+                      <m:sSupPr>
+                        <m:ctrlPr>
+                          <a:rPr lang="pt-BR" sz="2800" b="0" i="1" smtClean="0">
+                            <a:latin typeface="Cambria Math" panose="02040503050406030204" pitchFamily="18" charset="0"/>
+                          </a:rPr>
+                        </m:ctrlPr>
+                      </m:sSupPr>
+                      <m:e>
+                        <m:r>
+                          <a:rPr lang="pt-BR" sz="2800" b="0" i="1" smtClean="0">
+                            <a:latin typeface="Cambria Math" panose="02040503050406030204" pitchFamily="18" charset="0"/>
+                          </a:rPr>
+                          <m:t>𝐵</m:t>
+                        </m:r>
+                      </m:e>
+                      <m:sup>
+                        <m:r>
+                          <a:rPr lang="pt-BR" sz="2800" b="0" i="1" smtClean="0">
+                            <a:latin typeface="Cambria Math" panose="02040503050406030204" pitchFamily="18" charset="0"/>
+                          </a:rPr>
+                          <m:t>𝐶</m:t>
+                        </m:r>
+                      </m:sup>
+                    </m:sSup>
+                  </m:oMath>
+                </a14:m>
+                <a:r>
+                  <a:rPr lang="pt-BR" sz="2800" dirty="0"/>
+                  <a:t>.</a:t>
+                </a:r>
+              </a:p>
+            </p:txBody>
+          </p:sp>
+        </mc:Choice>
+        <mc:Fallback xmlns="">
+          <p:sp>
+            <p:nvSpPr>
+              <p:cNvPr id="6" name="CaixaDeTexto 5">
+                <a:extLst>
+                  <a:ext uri="{FF2B5EF4-FFF2-40B4-BE49-F238E27FC236}">
+                    <a16:creationId xmlns:a16="http://schemas.microsoft.com/office/drawing/2014/main" id="{720B10DA-C761-4DEE-8D86-E170E1C2E981}"/>
+                  </a:ext>
+                </a:extLst>
+              </p:cNvPr>
+              <p:cNvSpPr txBox="1">
+                <a:spLocks noRot="1" noChangeAspect="1" noMove="1" noResize="1" noEditPoints="1" noAdjustHandles="1" noChangeArrowheads="1" noChangeShapeType="1" noTextEdit="1"/>
+              </p:cNvSpPr>
+              <p:nvPr/>
+            </p:nvSpPr>
+            <p:spPr>
+              <a:xfrm>
+                <a:off x="881687" y="1506234"/>
+                <a:ext cx="10067277" cy="3901902"/>
+              </a:xfrm>
+              <a:prstGeom prst="rect">
+                <a:avLst/>
+              </a:prstGeom>
+              <a:blipFill>
+                <a:blip r:embed="rId2"/>
+                <a:stretch>
+                  <a:fillRect l="-1272" b="-3594"/>
+                </a:stretch>
+              </a:blipFill>
+            </p:spPr>
+            <p:txBody>
+              <a:bodyPr/>
+              <a:lstStyle/>
+              <a:p>
+                <a:r>
+                  <a:rPr lang="pt-BR">
+                    <a:noFill/>
+                  </a:rPr>
+                  <a:t> </a:t>
+                </a:r>
+              </a:p>
+            </p:txBody>
+          </p:sp>
+        </mc:Fallback>
+      </mc:AlternateContent>
+      <p:sp>
+        <p:nvSpPr>
+          <p:cNvPr id="3" name="CaixaDeTexto 2">
+            <a:extLst>
+              <a:ext uri="{FF2B5EF4-FFF2-40B4-BE49-F238E27FC236}">
+                <a16:creationId xmlns:a16="http://schemas.microsoft.com/office/drawing/2014/main" id="{19131A04-B5D6-4211-8B49-4615DE5797E9}"/>
+              </a:ext>
+            </a:extLst>
+          </p:cNvPr>
+          <p:cNvSpPr txBox="1"/>
+          <p:nvPr/>
+        </p:nvSpPr>
+        <p:spPr>
+          <a:xfrm>
+            <a:off x="361395" y="6488668"/>
+            <a:ext cx="2395336" cy="300210"/>
+          </a:xfrm>
+          <a:prstGeom prst="rect">
+            <a:avLst/>
+          </a:prstGeom>
+          <a:noFill/>
+        </p:spPr>
+        <p:txBody>
+          <a:bodyPr wrap="none" rtlCol="0">
+            <a:spAutoFit/>
+          </a:bodyPr>
+          <a:lstStyle/>
+          <a:p>
+            <a:r>
+              <a:rPr lang="pt-BR" sz="1351" dirty="0"/>
+              <a:t>Professor: Marcos Goulart Lima</a:t>
+            </a:r>
+          </a:p>
+        </p:txBody>
+      </p:sp>
+      <p:pic>
+        <p:nvPicPr>
+          <p:cNvPr id="8" name="Espaço Reservado para Conteúdo 4">
+            <a:extLst>
+              <a:ext uri="{FF2B5EF4-FFF2-40B4-BE49-F238E27FC236}">
+                <a16:creationId xmlns:a16="http://schemas.microsoft.com/office/drawing/2014/main" id="{65AB402D-D1A8-4F31-BA42-34A6F0FC69F9}"/>
+              </a:ext>
+            </a:extLst>
+          </p:cNvPr>
+          <p:cNvPicPr>
+            <a:picLocks noChangeAspect="1"/>
+          </p:cNvPicPr>
+          <p:nvPr/>
+        </p:nvPicPr>
+        <p:blipFill>
+          <a:blip r:embed="rId3">
+            <a:extLst>
+              <a:ext uri="{28A0092B-C50C-407E-A947-70E740481C1C}">
+                <a14:useLocalDpi xmlns:a14="http://schemas.microsoft.com/office/drawing/2010/main" val="0"/>
+              </a:ext>
+            </a:extLst>
+          </a:blip>
+          <a:stretch>
+            <a:fillRect/>
+          </a:stretch>
+        </p:blipFill>
+        <p:spPr>
+          <a:xfrm>
+            <a:off x="62144" y="112237"/>
+            <a:ext cx="588096" cy="1228523"/>
+          </a:xfrm>
+          <a:prstGeom prst="rect">
+            <a:avLst/>
+          </a:prstGeom>
+        </p:spPr>
+      </p:pic>
+    </p:spTree>
+    <p:extLst>
+      <p:ext uri="{BB962C8B-B14F-4D97-AF65-F5344CB8AC3E}">
+        <p14:creationId xmlns:p14="http://schemas.microsoft.com/office/powerpoint/2010/main" val="3013759351"/>
+      </p:ext>
+    </p:extLst>
+  </p:cSld>
+  <p:clrMapOvr>
+    <a:masterClrMapping/>
+  </p:clrMapOvr>
+</p:sld>
+</file>
+
+<file path=ppt/slides/slide24.xml><?xml version="1.0" encoding="utf-8"?>
+<p:sld xmlns:a="http://schemas.openxmlformats.org/drawingml/2006/main" xmlns:r="http://schemas.openxmlformats.org/officeDocument/2006/relationships" xmlns:p="http://schemas.openxmlformats.org/presentationml/2006/main">
+  <p:cSld>
+    <p:spTree>
+      <p:nvGrpSpPr>
+        <p:cNvPr id="1" name=""/>
+        <p:cNvGrpSpPr/>
+        <p:nvPr/>
+      </p:nvGrpSpPr>
+      <p:grpSpPr>
+        <a:xfrm>
+          <a:off x="0" y="0"/>
+          <a:ext cx="0" cy="0"/>
+          <a:chOff x="0" y="0"/>
+          <a:chExt cx="0" cy="0"/>
+        </a:xfrm>
+      </p:grpSpPr>
+      <p:sp>
+        <p:nvSpPr>
+          <p:cNvPr id="2" name="Título 1">
+            <a:extLst>
+              <a:ext uri="{FF2B5EF4-FFF2-40B4-BE49-F238E27FC236}">
+                <a16:creationId xmlns:a16="http://schemas.microsoft.com/office/drawing/2014/main" id="{BC798918-7CB4-450A-A042-F0B538CA25DE}"/>
+              </a:ext>
+            </a:extLst>
+          </p:cNvPr>
+          <p:cNvSpPr>
+            <a:spLocks noGrp="1"/>
+          </p:cNvSpPr>
+          <p:nvPr>
+            <p:ph type="title"/>
+          </p:nvPr>
+        </p:nvSpPr>
+        <p:spPr>
+          <a:xfrm>
+            <a:off x="1032611" y="0"/>
+            <a:ext cx="10827959" cy="1574800"/>
+          </a:xfrm>
+        </p:spPr>
+        <p:txBody>
+          <a:bodyPr>
+            <a:normAutofit/>
+          </a:bodyPr>
+          <a:lstStyle/>
+          <a:p>
+            <a:pPr algn="ctr"/>
+            <a:r>
+              <a:rPr lang="pt-BR" dirty="0">
+                <a:latin typeface="AlternateGothic2 BT" panose="020B0608020202050204" pitchFamily="34" charset="0"/>
+              </a:rPr>
+              <a:t>CEA055 – Estatística e Probabilidade</a:t>
+            </a:r>
+            <a:br>
+              <a:rPr lang="pt-BR" dirty="0">
+                <a:latin typeface="AlternateGothic2 BT" panose="020B0608020202050204" pitchFamily="34" charset="0"/>
+              </a:rPr>
+            </a:br>
+            <a:r>
+              <a:rPr lang="pt-BR" sz="2200" b="1" dirty="0"/>
+              <a:t>Espaço Amostral e Eventos</a:t>
+            </a:r>
+            <a:endParaRPr lang="pt-BR" dirty="0">
+              <a:latin typeface="AlternateGothic2 BT" panose="020B0608020202050204" pitchFamily="34" charset="0"/>
+            </a:endParaRPr>
+          </a:p>
+        </p:txBody>
+      </p:sp>
       <mc:AlternateContent xmlns:mc="http://schemas.openxmlformats.org/markup-compatibility/2006" xmlns:a14="http://schemas.microsoft.com/office/drawing/2010/main">
         <mc:Choice Requires="a14">
           <p:sp>
@@ -8215,7 +9607,7 @@
               <a:p>
                 <a:r>
                   <a:rPr lang="pt-BR" sz="2800" dirty="0"/>
-                  <a:t xml:space="preserve">Dizemos que os eventos </a:t>
+                  <a:t>Dizemos que os eventos </a:t>
                 </a:r>
                 <a14:m>
                   <m:oMath xmlns:m="http://schemas.openxmlformats.org/officeDocument/2006/math">
@@ -8322,7 +9714,7 @@
                 </a14:m>
                 <a:r>
                   <a:rPr lang="pt-BR" sz="2800" dirty="0"/>
-                  <a:t xml:space="preserve">, formam uma partição do espaço amostral </a:t>
+                  <a:t>, formam uma partição do espaço amostral </a:t>
                 </a:r>
                 <a14:m>
                   <m:oMath xmlns:m="http://schemas.openxmlformats.org/officeDocument/2006/math">
@@ -8339,7 +9731,7 @@
                 </a14:m>
                 <a:r>
                   <a:rPr lang="pt-BR" sz="2800" dirty="0"/>
-                  <a:t xml:space="preserve"> se:</a:t>
+                  <a:t> se:</a:t>
                 </a:r>
               </a:p>
               <a:p>
@@ -8352,7 +9744,7 @@
                 </a:pPr>
                 <a:r>
                   <a:rPr lang="pt-BR" sz="2800" b="0" dirty="0"/>
-                  <a:t xml:space="preserve"> </a:t>
+                  <a:t> </a:t>
                 </a:r>
                 <a14:m>
                   <m:oMath xmlns:m="http://schemas.openxmlformats.org/officeDocument/2006/math">
@@ -8398,7 +9790,7 @@
                 </a14:m>
                 <a:r>
                   <a:rPr lang="pt-BR" sz="2800" dirty="0"/>
-                  <a:t xml:space="preserve">, </a:t>
+                  <a:t>, </a:t>
                 </a:r>
                 <a14:m>
                   <m:oMath xmlns:m="http://schemas.openxmlformats.org/officeDocument/2006/math">
@@ -8438,7 +9830,7 @@
                 </a:pPr>
                 <a:r>
                   <a:rPr lang="pt-BR" sz="2800" dirty="0"/>
-                  <a:t xml:space="preserve"> </a:t>
+                  <a:t> </a:t>
                 </a:r>
                 <a14:m>
                   <m:oMath xmlns:m="http://schemas.openxmlformats.org/officeDocument/2006/math">
@@ -8502,13 +9894,25 @@
                       <a:rPr lang="pt-BR" sz="2800" b="0" i="1" smtClean="0">
                         <a:latin typeface="Cambria Math" panose="02040503050406030204" pitchFamily="18" charset="0"/>
                       </a:rPr>
-                      <m:t>=∅,</m:t>
+                      <m:t>=</m:t>
+                    </m:r>
+                    <m:r>
+                      <a:rPr lang="pt-BR" sz="2800" i="1">
+                        <a:latin typeface="Cambria Math" panose="02040503050406030204" pitchFamily="18" charset="0"/>
+                      </a:rPr>
+                      <m:t>∅</m:t>
+                    </m:r>
+                    <m:r>
+                      <a:rPr lang="pt-BR" sz="2800" b="0" i="1" smtClean="0">
+                        <a:latin typeface="Cambria Math" panose="02040503050406030204" pitchFamily="18" charset="0"/>
+                      </a:rPr>
+                      <m:t>,</m:t>
                     </m:r>
                   </m:oMath>
                 </a14:m>
                 <a:r>
                   <a:rPr lang="pt-BR" sz="2800" dirty="0"/>
-                  <a:t xml:space="preserve"> para </a:t>
+                  <a:t> para </a:t>
                 </a:r>
                 <a14:m>
                   <m:oMath xmlns:m="http://schemas.openxmlformats.org/officeDocument/2006/math">
@@ -8548,7 +9952,7 @@
                 </a:pPr>
                 <a:r>
                   <a:rPr lang="pt-BR" sz="2800" dirty="0"/>
-                  <a:t xml:space="preserve"> </a:t>
+                  <a:t> </a:t>
                 </a:r>
                 <a14:m>
                   <m:oMath xmlns:m="http://schemas.openxmlformats.org/officeDocument/2006/math">
@@ -8808,7 +10212,7 @@
 </p:sld>
 </file>
 
-<file path=ppt/slides/slide21.xml><?xml version="1.0" encoding="utf-8"?>
+<file path=ppt/slides/slide25.xml><?xml version="1.0" encoding="utf-8"?>
 <p:sld xmlns:a="http://schemas.openxmlformats.org/drawingml/2006/main" xmlns:r="http://schemas.openxmlformats.org/officeDocument/2006/relationships" xmlns:p="http://schemas.openxmlformats.org/presentationml/2006/main">
   <p:cSld>
     <p:spTree>
@@ -8892,7 +10296,7 @@
             <p:spPr>
               <a:xfrm>
                 <a:off x="881687" y="1506234"/>
-                <a:ext cx="10748061" cy="4217821"/>
+                <a:ext cx="10748061" cy="3849131"/>
               </a:xfrm>
               <a:prstGeom prst="rect">
                 <a:avLst/>
@@ -8905,18 +10309,25 @@
               </a:bodyPr>
               <a:lstStyle/>
               <a:p>
+                <a:pPr>
+                  <a:lnSpc>
+                    <a:spcPct val="150000"/>
+                  </a:lnSpc>
+                </a:pPr>
                 <a:r>
                   <a:rPr lang="pt-BR" sz="2400" b="1" dirty="0"/>
                   <a:t>Definição</a:t>
                 </a:r>
               </a:p>
               <a:p>
-                <a:endParaRPr lang="pt-BR" sz="2400" b="1" dirty="0"/>
-              </a:p>
-              <a:p>
+                <a:pPr>
+                  <a:lnSpc>
+                    <a:spcPct val="150000"/>
+                  </a:lnSpc>
+                </a:pPr>
                 <a:r>
                   <a:rPr lang="pt-BR" sz="2400" dirty="0"/>
-                  <a:t xml:space="preserve">Seja </a:t>
+                  <a:t>Seja </a:t>
                 </a:r>
                 <a14:m>
                   <m:oMath xmlns:m="http://schemas.openxmlformats.org/officeDocument/2006/math">
@@ -8933,7 +10344,7 @@
                 </a14:m>
                 <a:r>
                   <a:rPr lang="pt-BR" sz="2400" dirty="0"/>
-                  <a:t xml:space="preserve"> o conjunto de todos os eventos possíveis de um fenômeno aleatório. Uma função </a:t>
+                  <a:t> o conjunto de todos os eventos possíveis de um fenômeno aleatório. Uma função </a:t>
                 </a:r>
                 <a14:m>
                   <m:oMath xmlns:m="http://schemas.openxmlformats.org/officeDocument/2006/math">
@@ -8959,22 +10370,22 @@
                 </a14:m>
                 <a:r>
                   <a:rPr lang="pt-BR" sz="2400" dirty="0"/>
-                  <a:t xml:space="preserve"> é denominada </a:t>
+                  <a:t> é denominada </a:t>
                 </a:r>
                 <a:r>
-                  <a:rPr lang="pt-BR" sz="2400" i="1" dirty="0"/>
+                  <a:rPr lang="pt-BR" sz="2400" b="1" i="1" dirty="0"/>
                   <a:t>probabilidade</a:t>
                 </a:r>
                 <a:r>
                   <a:rPr lang="pt-BR" sz="2400" dirty="0"/>
-                  <a:t xml:space="preserve"> se satisfaz as seguintes condições:</a:t>
+                  <a:t> se satisfaz as seguintes condições:</a:t>
                 </a:r>
               </a:p>
               <a:p>
-                <a:endParaRPr lang="pt-BR" sz="2400" dirty="0"/>
-              </a:p>
-              <a:p>
                 <a:pPr marL="1028689" lvl="1" indent="-571500">
+                  <a:lnSpc>
+                    <a:spcPct val="150000"/>
+                  </a:lnSpc>
                   <a:buFont typeface="+mj-lt"/>
                   <a:buAutoNum type="romanLcPeriod"/>
                 </a:pPr>
@@ -9019,7 +10430,7 @@
                 </a14:m>
                 <a:r>
                   <a:rPr lang="pt-BR" sz="2400" dirty="0"/>
-                  <a:t xml:space="preserve">, para todo </a:t>
+                  <a:t>, para todo </a:t>
                 </a:r>
                 <a14:m>
                   <m:oMath xmlns:m="http://schemas.openxmlformats.org/officeDocument/2006/math">
@@ -9056,13 +10467,9 @@
               </a:p>
               <a:p>
                 <a:pPr marL="1028689" lvl="1" indent="-571500">
-                  <a:buFont typeface="+mj-lt"/>
-                  <a:buAutoNum type="romanLcPeriod"/>
-                </a:pPr>
-                <a:endParaRPr lang="pt-BR" sz="2400" b="0" dirty="0"/>
-              </a:p>
-              <a:p>
-                <a:pPr marL="1028689" lvl="1" indent="-571500">
+                  <a:lnSpc>
+                    <a:spcPct val="150000"/>
+                  </a:lnSpc>
                   <a:buFont typeface="+mj-lt"/>
                   <a:buAutoNum type="romanLcPeriod"/>
                 </a:pPr>
@@ -9109,13 +10516,9 @@
               </a:p>
               <a:p>
                 <a:pPr marL="1028689" lvl="1" indent="-571500">
-                  <a:buFont typeface="+mj-lt"/>
-                  <a:buAutoNum type="romanLcPeriod"/>
-                </a:pPr>
-                <a:endParaRPr lang="pt-BR" sz="2400" b="0" dirty="0"/>
-              </a:p>
-              <a:p>
-                <a:pPr marL="1028689" lvl="1" indent="-571500">
+                  <a:lnSpc>
+                    <a:spcPct val="150000"/>
+                  </a:lnSpc>
                   <a:buFont typeface="+mj-lt"/>
                   <a:buAutoNum type="romanLcPeriod"/>
                 </a:pPr>
@@ -9348,7 +10751,7 @@
                 </a14:m>
                 <a:r>
                   <a:rPr lang="pt-BR" sz="2400" b="0" dirty="0"/>
-                  <a:t xml:space="preserve">, com os </a:t>
+                  <a:t>, com os </a:t>
                 </a:r>
                 <a14:m>
                   <m:oMath xmlns:m="http://schemas.openxmlformats.org/officeDocument/2006/math">
@@ -9412,7 +10815,7 @@
             <p:spPr>
               <a:xfrm>
                 <a:off x="881687" y="1506234"/>
-                <a:ext cx="10748061" cy="4217821"/>
+                <a:ext cx="10748061" cy="3849131"/>
               </a:xfrm>
               <a:prstGeom prst="rect">
                 <a:avLst/>
@@ -9420,7 +10823,7 @@
               <a:blipFill>
                 <a:blip r:embed="rId2"/>
                 <a:stretch>
-                  <a:fillRect l="-908" t="-1156" b="-5347"/>
+                  <a:fillRect l="-908" b="-4430"/>
                 </a:stretch>
               </a:blipFill>
             </p:spPr>
@@ -9523,7 +10926,7 @@
 </p:sld>
 </file>
 
-<file path=ppt/slides/slide22.xml><?xml version="1.0" encoding="utf-8"?>
+<file path=ppt/slides/slide26.xml><?xml version="1.0" encoding="utf-8"?>
 <p:sld xmlns:a="http://schemas.openxmlformats.org/drawingml/2006/main" xmlns:r="http://schemas.openxmlformats.org/officeDocument/2006/relationships" xmlns:p="http://schemas.openxmlformats.org/presentationml/2006/main">
   <p:cSld>
     <p:spTree>
@@ -9633,7 +11036,7 @@
             </a:pPr>
             <a:r>
               <a:rPr lang="pt-BR" sz="2400" b="1" dirty="0"/>
-              <a:t xml:space="preserve"> </a:t>
+              <a:t> </a:t>
             </a:r>
             <a:r>
               <a:rPr lang="pt-BR" sz="2400" dirty="0"/>
@@ -9790,7 +11193,7 @@
 </p:sld>
 </file>
 
-<file path=ppt/slides/slide23.xml><?xml version="1.0" encoding="utf-8"?>
+<file path=ppt/slides/slide27.xml><?xml version="1.0" encoding="utf-8"?>
 <p:sld xmlns:a="http://schemas.openxmlformats.org/drawingml/2006/main" xmlns:r="http://schemas.openxmlformats.org/officeDocument/2006/relationships" xmlns:p="http://schemas.openxmlformats.org/presentationml/2006/main">
   <p:cSld>
     <p:spTree>
@@ -9872,7 +11275,7 @@
         <p:spPr>
           <a:xfrm>
             <a:off x="881687" y="1506234"/>
-            <a:ext cx="10067277" cy="3970318"/>
+            <a:ext cx="10067277" cy="4339650"/>
           </a:xfrm>
           <a:prstGeom prst="rect">
             <a:avLst/>
@@ -9900,7 +11303,7 @@
             </a:pPr>
             <a:r>
               <a:rPr lang="pt-BR" sz="2400" b="1" dirty="0"/>
-              <a:t xml:space="preserve"> </a:t>
+              <a:t> </a:t>
             </a:r>
             <a:r>
               <a:rPr lang="pt-BR" sz="2400" dirty="0"/>
@@ -9936,6 +11339,11 @@
             <a:endParaRPr lang="pt-BR" sz="2400" dirty="0"/>
           </a:p>
           <a:p>
+            <a:pPr>
+              <a:lnSpc>
+                <a:spcPct val="150000"/>
+              </a:lnSpc>
+            </a:pPr>
             <a:r>
               <a:rPr lang="pt-BR" sz="2400" dirty="0"/>
               <a:t>Qual a probabilidade que um homem seja escolhido aleatoriamente no grupo? E uma mulher?</a:t>
@@ -10000,7 +11408,7 @@
           <p:nvPr/>
         </p:nvPicPr>
         <p:blipFill>
-          <a:blip r:embed="rId2">
+          <a:blip r:embed="rId3">
             <a:extLst>
               <a:ext uri="{28A0092B-C50C-407E-A947-70E740481C1C}">
                 <a14:useLocalDpi xmlns:a14="http://schemas.microsoft.com/office/drawing/2010/main" val="0"/>
@@ -10036,7 +11444,7 @@
           <p:nvPr/>
         </p:nvPicPr>
         <p:blipFill>
-          <a:blip r:embed="rId3"/>
+          <a:blip r:embed="rId4"/>
           <a:stretch>
             <a:fillRect/>
           </a:stretch>
@@ -10064,7 +11472,230 @@
 </p:sld>
 </file>
 
-<file path=ppt/slides/slide24.xml><?xml version="1.0" encoding="utf-8"?>
+<file path=ppt/slides/slide28.xml><?xml version="1.0" encoding="utf-8"?>
+<p:sld xmlns:a="http://schemas.openxmlformats.org/drawingml/2006/main" xmlns:r="http://schemas.openxmlformats.org/officeDocument/2006/relationships" xmlns:p="http://schemas.openxmlformats.org/presentationml/2006/main">
+  <p:cSld>
+    <p:bg>
+      <p:bgPr>
+        <a:solidFill>
+          <a:srgbClr val="E6CCCC"/>
+        </a:solidFill>
+        <a:effectLst/>
+      </p:bgPr>
+    </p:bg>
+    <p:spTree>
+      <p:nvGrpSpPr>
+        <p:cNvPr id="1" name=""/>
+        <p:cNvGrpSpPr/>
+        <p:nvPr/>
+      </p:nvGrpSpPr>
+      <p:grpSpPr>
+        <a:xfrm>
+          <a:off x="0" y="0"/>
+          <a:ext cx="0" cy="0"/>
+          <a:chOff x="0" y="0"/>
+          <a:chExt cx="0" cy="0"/>
+        </a:xfrm>
+      </p:grpSpPr>
+      <p:sp>
+        <p:nvSpPr>
+          <p:cNvPr id="2" name="Oval 1"/>
+          <p:cNvSpPr/>
+          <p:nvPr/>
+        </p:nvSpPr>
+        <p:spPr>
+          <a:xfrm>
+            <a:off x="5775960" y="457200"/>
+            <a:ext cx="640080" cy="640080"/>
+          </a:xfrm>
+          <a:prstGeom prst="ellipse">
+            <a:avLst/>
+          </a:prstGeom>
+          <a:solidFill>
+            <a:srgbClr val="8A3B3F"/>
+          </a:solidFill>
+          <a:ln>
+            <a:noFill/>
+          </a:ln>
+        </p:spPr>
+        <p:style>
+          <a:lnRef idx="1">
+            <a:schemeClr val="accent1"/>
+          </a:lnRef>
+          <a:fillRef idx="3">
+            <a:schemeClr val="accent1"/>
+          </a:fillRef>
+          <a:effectRef idx="2">
+            <a:schemeClr val="accent1"/>
+          </a:effectRef>
+          <a:fontRef idx="minor">
+            <a:schemeClr val="lt1"/>
+          </a:fontRef>
+        </p:style>
+        <p:txBody>
+          <a:bodyPr wrap="none" rtlCol="0" anchor="ctr"/>
+          <a:lstStyle/>
+          <a:p>
+            <a:pPr algn="ctr"/>
+            <a:r>
+              <a:rPr sz="2800" b="1">
+                <a:solidFill>
+                  <a:srgbClr val="FFFFFF"/>
+                </a:solidFill>
+              </a:rPr>
+              <a:t>!</a:t>
+            </a:r>
+          </a:p>
+        </p:txBody>
+      </p:sp>
+      <p:sp>
+        <p:nvSpPr>
+          <p:cNvPr id="3" name="TextBox 2"/>
+          <p:cNvSpPr txBox="1"/>
+          <p:nvPr/>
+        </p:nvSpPr>
+        <p:spPr>
+          <a:xfrm>
+            <a:off x="914400" y="1371600"/>
+            <a:ext cx="10363200" cy="457200"/>
+          </a:xfrm>
+          <a:prstGeom prst="rect">
+            <a:avLst/>
+          </a:prstGeom>
+          <a:noFill/>
+        </p:spPr>
+        <p:txBody>
+          <a:bodyPr wrap="square">
+            <a:spAutoFit/>
+          </a:bodyPr>
+          <a:lstStyle/>
+          <a:p>
+            <a:pPr algn="ctr"/>
+            <a:r>
+              <a:rPr sz="1800" b="1">
+                <a:solidFill>
+                  <a:srgbClr val="8A3B3F"/>
+                </a:solidFill>
+              </a:rPr>
+              <a:t>VERIFICAÇÃO RÁPIDA</a:t>
+            </a:r>
+          </a:p>
+        </p:txBody>
+      </p:sp>
+      <p:sp>
+        <p:nvSpPr>
+          <p:cNvPr id="4" name="TextBox 3"/>
+          <p:cNvSpPr txBox="1"/>
+          <p:nvPr/>
+        </p:nvSpPr>
+        <p:spPr>
+          <a:xfrm>
+            <a:off x="1188720" y="2103120"/>
+            <a:ext cx="9814560" cy="2926080"/>
+          </a:xfrm>
+          <a:prstGeom prst="rect">
+            <a:avLst/>
+          </a:prstGeom>
+          <a:noFill/>
+        </p:spPr>
+        <p:txBody>
+          <a:bodyPr wrap="square">
+            <a:spAutoFit/>
+          </a:bodyPr>
+          <a:lstStyle/>
+          <a:p>
+            <a:pPr algn="ctr">
+              <a:lnSpc>
+                <a:spcPct val="130000"/>
+              </a:lnSpc>
+            </a:pPr>
+            <a:r>
+              <a:rPr sz="2800" b="1">
+                <a:solidFill>
+                  <a:srgbClr val="3D1F21"/>
+                </a:solidFill>
+              </a:rPr>
+              <a:t>Qual é a probabilidade de escolher uma mulher aleatoriamente nesse grupo?</a:t>
+            </a:r>
+          </a:p>
+        </p:txBody>
+      </p:sp>
+      <p:sp>
+        <p:nvSpPr>
+          <p:cNvPr id="5" name="TextBox 4"/>
+          <p:cNvSpPr txBox="1"/>
+          <p:nvPr/>
+        </p:nvSpPr>
+        <p:spPr>
+          <a:xfrm>
+            <a:off x="914400" y="5577840"/>
+            <a:ext cx="10363200" cy="457200"/>
+          </a:xfrm>
+          <a:prstGeom prst="rect">
+            <a:avLst/>
+          </a:prstGeom>
+          <a:noFill/>
+        </p:spPr>
+        <p:txBody>
+          <a:bodyPr wrap="square">
+            <a:spAutoFit/>
+          </a:bodyPr>
+          <a:lstStyle/>
+          <a:p>
+            <a:pPr algn="ctr"/>
+            <a:r>
+              <a:rPr sz="1600" i="1">
+                <a:solidFill>
+                  <a:srgbClr val="8A5C5E"/>
+                </a:solidFill>
+              </a:rPr>
+              <a:t>Sorteie um aluno antes de continuar</a:t>
+            </a:r>
+          </a:p>
+        </p:txBody>
+      </p:sp>
+      <p:sp>
+        <p:nvSpPr>
+          <p:cNvPr id="6" name="TextBox 5"/>
+          <p:cNvSpPr txBox="1"/>
+          <p:nvPr/>
+        </p:nvSpPr>
+        <p:spPr>
+          <a:xfrm>
+            <a:off x="365760" y="6464808"/>
+            <a:ext cx="4828032" cy="310896"/>
+          </a:xfrm>
+          <a:prstGeom prst="rect">
+            <a:avLst/>
+          </a:prstGeom>
+          <a:noFill/>
+        </p:spPr>
+        <p:txBody>
+          <a:bodyPr wrap="none">
+            <a:spAutoFit/>
+          </a:bodyPr>
+          <a:lstStyle/>
+          <a:p>
+            <a:r>
+              <a:rPr sz="1400">
+                <a:solidFill>
+                  <a:srgbClr val="8A5C5E"/>
+                </a:solidFill>
+              </a:rPr>
+              <a:t>Professor: Marcos Goulart Lima</a:t>
+            </a:r>
+          </a:p>
+        </p:txBody>
+      </p:sp>
+    </p:spTree>
+  </p:cSld>
+  <p:clrMapOvr>
+    <a:masterClrMapping/>
+  </p:clrMapOvr>
+</p:sld>
+</file>
+
+<file path=ppt/slides/slide29.xml><?xml version="1.0" encoding="utf-8"?>
 <p:sld xmlns:a="http://schemas.openxmlformats.org/drawingml/2006/main" xmlns:r="http://schemas.openxmlformats.org/officeDocument/2006/relationships" xmlns:p="http://schemas.openxmlformats.org/presentationml/2006/main">
   <p:cSld>
     <p:spTree>
@@ -10176,7 +11807,7 @@
                 </a:pPr>
                 <a:r>
                   <a:rPr lang="pt-BR" sz="2800" dirty="0"/>
-                  <a:t xml:space="preserve">Se os eventos </a:t>
+                  <a:t>Se os eventos </a:t>
                 </a:r>
                 <a14:m>
                   <m:oMath xmlns:m="http://schemas.openxmlformats.org/officeDocument/2006/math">
@@ -10240,7 +11871,7 @@
                 </a14:m>
                 <a:r>
                   <a:rPr lang="pt-BR" sz="2800" dirty="0"/>
-                  <a:t xml:space="preserve"> formam um partição do espaço amostral, então </a:t>
+                  <a:t> formam um partição do espaço amostral, então </a:t>
                 </a:r>
                 <a14:m>
                   <m:oMath xmlns:m="http://schemas.openxmlformats.org/officeDocument/2006/math">
@@ -10345,7 +11976,7 @@
                 </a:pPr>
                 <a:r>
                   <a:rPr lang="pt-BR" sz="2800" dirty="0"/>
-                  <a:t xml:space="preserve">Se o evento </a:t>
+                  <a:t>Se o evento </a:t>
                 </a:r>
                 <a14:m>
                   <m:oMath xmlns:m="http://schemas.openxmlformats.org/officeDocument/2006/math">
@@ -10359,7 +11990,7 @@
                 </a14:m>
                 <a:r>
                   <a:rPr lang="pt-BR" sz="2800" dirty="0"/>
-                  <a:t xml:space="preserve"> é impossível, então </a:t>
+                  <a:t> é impossível, então </a:t>
                 </a:r>
                 <a14:m>
                   <m:oMath xmlns:m="http://schemas.openxmlformats.org/officeDocument/2006/math">
@@ -10379,10 +12010,10 @@
                       </m:dPr>
                       <m:e>
                         <m:r>
-                          <a:rPr lang="pt-BR" sz="2800" b="0" i="1" smtClean="0">
-                            <a:latin typeface="Cambria Math" panose="02040503050406030204" pitchFamily="18" charset="0"/>
-                          </a:rPr>
-                          <m:t>𝜙</m:t>
+                          <a:rPr lang="pt-BR" sz="2800" i="1">
+                            <a:latin typeface="Cambria Math" panose="02040503050406030204" pitchFamily="18" charset="0"/>
+                          </a:rPr>
+                          <m:t>∅</m:t>
                         </m:r>
                       </m:e>
                     </m:d>
@@ -10414,7 +12045,7 @@
                 </a:pPr>
                 <a:r>
                   <a:rPr lang="pt-BR" sz="2800" dirty="0"/>
-                  <a:t xml:space="preserve"> </a:t>
+                  <a:t> </a:t>
                 </a:r>
                 <a14:m>
                   <m:oMath xmlns:m="http://schemas.openxmlformats.org/officeDocument/2006/math">
@@ -10513,7 +12144,7 @@
                 </a:pPr>
                 <a:r>
                   <a:rPr lang="pt-BR" sz="2800" dirty="0"/>
-                  <a:t xml:space="preserve"> </a:t>
+                  <a:t> </a:t>
                 </a:r>
                 <a14:m>
                   <m:oMath xmlns:m="http://schemas.openxmlformats.org/officeDocument/2006/math">
@@ -10788,7 +12419,428 @@
 </p:sld>
 </file>
 
-<file path=ppt/slides/slide25.xml><?xml version="1.0" encoding="utf-8"?>
+<file path=ppt/slides/slide3.xml><?xml version="1.0" encoding="utf-8"?>
+<p:sld xmlns:a="http://schemas.openxmlformats.org/drawingml/2006/main" xmlns:r="http://schemas.openxmlformats.org/officeDocument/2006/relationships" xmlns:p="http://schemas.openxmlformats.org/presentationml/2006/main">
+  <p:cSld>
+    <p:spTree>
+      <p:nvGrpSpPr>
+        <p:cNvPr id="1" name=""/>
+        <p:cNvGrpSpPr/>
+        <p:nvPr/>
+      </p:nvGrpSpPr>
+      <p:grpSpPr>
+        <a:xfrm>
+          <a:off x="0" y="0"/>
+          <a:ext cx="0" cy="0"/>
+          <a:chOff x="0" y="0"/>
+          <a:chExt cx="0" cy="0"/>
+        </a:xfrm>
+      </p:grpSpPr>
+      <p:sp>
+        <p:nvSpPr>
+          <p:cNvPr id="2" name="Título 1">
+            <a:extLst>
+              <a:ext uri="{FF2B5EF4-FFF2-40B4-BE49-F238E27FC236}">
+                <a16:creationId xmlns:a16="http://schemas.microsoft.com/office/drawing/2014/main" id="{BC798918-7CB4-450A-A042-F0B538CA25DE}"/>
+              </a:ext>
+            </a:extLst>
+          </p:cNvPr>
+          <p:cNvSpPr>
+            <a:spLocks noGrp="1"/>
+          </p:cNvSpPr>
+          <p:nvPr>
+            <p:ph type="title"/>
+          </p:nvPr>
+        </p:nvSpPr>
+        <p:spPr>
+          <a:xfrm>
+            <a:off x="1032611" y="0"/>
+            <a:ext cx="10827959" cy="1574800"/>
+          </a:xfrm>
+        </p:spPr>
+        <p:txBody>
+          <a:bodyPr>
+            <a:normAutofit/>
+          </a:bodyPr>
+          <a:lstStyle/>
+          <a:p>
+            <a:pPr algn="ctr"/>
+            <a:r>
+              <a:rPr lang="pt-BR" dirty="0">
+                <a:latin typeface="AlternateGothic2 BT" panose="020B0608020202050204" pitchFamily="34" charset="0"/>
+              </a:rPr>
+              <a:t>CEA055 – Estatística e Probabilidade</a:t>
+            </a:r>
+            <a:br>
+              <a:rPr lang="pt-BR" dirty="0">
+                <a:latin typeface="AlternateGothic2 BT" panose="020B0608020202050204" pitchFamily="34" charset="0"/>
+              </a:rPr>
+            </a:br>
+            <a:r>
+              <a:rPr lang="pt-BR" sz="2200" dirty="0">
+                <a:latin typeface="AlternateGothic2 BT" panose="020B0608020202050204" pitchFamily="34" charset="0"/>
+              </a:rPr>
+              <a:t>E</a:t>
+            </a:r>
+            <a:r>
+              <a:rPr lang="pt-BR" sz="2200" b="1" dirty="0"/>
+              <a:t>spaço Amostral e Eventos</a:t>
+            </a:r>
+            <a:endParaRPr lang="pt-BR" dirty="0">
+              <a:latin typeface="AlternateGothic2 BT" panose="020B0608020202050204" pitchFamily="34" charset="0"/>
+            </a:endParaRPr>
+          </a:p>
+        </p:txBody>
+      </p:sp>
+      <mc:AlternateContent xmlns:mc="http://schemas.openxmlformats.org/markup-compatibility/2006" xmlns:a14="http://schemas.microsoft.com/office/drawing/2010/main">
+        <mc:Choice Requires="a14">
+          <p:sp>
+            <p:nvSpPr>
+              <p:cNvPr id="6" name="CaixaDeTexto 5">
+                <a:extLst>
+                  <a:ext uri="{FF2B5EF4-FFF2-40B4-BE49-F238E27FC236}">
+                    <a16:creationId xmlns:a16="http://schemas.microsoft.com/office/drawing/2014/main" id="{720B10DA-C761-4DEE-8D86-E170E1C2E981}"/>
+                  </a:ext>
+                </a:extLst>
+              </p:cNvPr>
+              <p:cNvSpPr txBox="1"/>
+              <p:nvPr/>
+            </p:nvSpPr>
+            <p:spPr>
+              <a:xfrm>
+                <a:off x="881687" y="1506234"/>
+                <a:ext cx="10827959" cy="4401205"/>
+              </a:xfrm>
+              <a:prstGeom prst="rect">
+                <a:avLst/>
+              </a:prstGeom>
+              <a:noFill/>
+            </p:spPr>
+            <p:txBody>
+              <a:bodyPr wrap="square" rtlCol="0">
+                <a:spAutoFit/>
+              </a:bodyPr>
+              <a:lstStyle/>
+              <a:p>
+                <a:r>
+                  <a:rPr lang="pt-BR" sz="2800" b="1" dirty="0"/>
+                  <a:t>Relação de pertinência</a:t>
+                </a:r>
+              </a:p>
+              <a:p>
+                <a:endParaRPr lang="pt-BR" sz="2800" b="1" dirty="0"/>
+              </a:p>
+              <a:p>
+                <a:pPr marL="342900" indent="-342900">
+                  <a:buFont typeface="Arial" panose="020B0604020202020204" pitchFamily="34" charset="0"/>
+                  <a:buChar char="•"/>
+                </a:pPr>
+                <a:r>
+                  <a:rPr lang="pt-BR" sz="2800" dirty="0"/>
+                  <a:t>Para indicar que um elemento </a:t>
+                </a:r>
+                <a14:m>
+                  <m:oMath xmlns:m="http://schemas.openxmlformats.org/officeDocument/2006/math">
+                    <m:r>
+                      <a:rPr lang="pt-BR" sz="2800" b="0" i="1" smtClean="0">
+                        <a:latin typeface="Cambria Math" panose="02040503050406030204" pitchFamily="18" charset="0"/>
+                      </a:rPr>
+                      <m:t>𝑥</m:t>
+                    </m:r>
+                  </m:oMath>
+                </a14:m>
+                <a:r>
+                  <a:rPr lang="pt-BR" sz="2800" dirty="0"/>
+                  <a:t> pertence ao conjunto A, escrevemos</a:t>
+                </a:r>
+              </a:p>
+              <a:p>
+                <a:pPr algn="ctr"/>
+                <a:endParaRPr lang="pt-BR" sz="2800" b="0" i="1" dirty="0">
+                  <a:latin typeface="Cambria Math" panose="02040503050406030204" pitchFamily="18" charset="0"/>
+                </a:endParaRPr>
+              </a:p>
+              <a:p>
+                <a:pPr algn="ctr"/>
+                <a14:m>
+                  <m:oMath xmlns:m="http://schemas.openxmlformats.org/officeDocument/2006/math">
+                    <m:r>
+                      <a:rPr lang="pt-BR" sz="2800" b="0" i="1" smtClean="0">
+                        <a:latin typeface="Cambria Math" panose="02040503050406030204" pitchFamily="18" charset="0"/>
+                      </a:rPr>
+                      <m:t>𝑥</m:t>
+                    </m:r>
+                    <m:r>
+                      <a:rPr lang="pt-BR" sz="2800" b="0" i="1" smtClean="0">
+                        <a:latin typeface="Cambria Math" panose="02040503050406030204" pitchFamily="18" charset="0"/>
+                      </a:rPr>
+                      <m:t>∈</m:t>
+                    </m:r>
+                    <m:r>
+                      <a:rPr lang="pt-BR" sz="2800" b="0" i="1" smtClean="0">
+                        <a:latin typeface="Cambria Math" panose="02040503050406030204" pitchFamily="18" charset="0"/>
+                      </a:rPr>
+                      <m:t>𝐴</m:t>
+                    </m:r>
+                  </m:oMath>
+                </a14:m>
+                <a:r>
+                  <a:rPr lang="pt-BR" sz="2800" dirty="0"/>
+                  <a:t>. </a:t>
+                </a:r>
+              </a:p>
+              <a:p>
+                <a:endParaRPr lang="pt-BR" sz="2800" b="1" dirty="0"/>
+              </a:p>
+              <a:p>
+                <a:pPr marL="457200" indent="-457200">
+                  <a:buFont typeface="Arial" panose="020B0604020202020204" pitchFamily="34" charset="0"/>
+                  <a:buChar char="•"/>
+                </a:pPr>
+                <a:r>
+                  <a:rPr lang="pt-BR" sz="2800" dirty="0"/>
+                  <a:t>Caso contrário: </a:t>
+                </a:r>
+                <a14:m>
+                  <m:oMath xmlns:m="http://schemas.openxmlformats.org/officeDocument/2006/math">
+                    <m:r>
+                      <a:rPr lang="pt-BR" sz="2800" b="0" i="1" smtClean="0">
+                        <a:latin typeface="Cambria Math" panose="02040503050406030204" pitchFamily="18" charset="0"/>
+                      </a:rPr>
+                      <m:t>𝑥</m:t>
+                    </m:r>
+                    <m:r>
+                      <a:rPr lang="pt-BR" sz="2800" b="0" i="1" smtClean="0">
+                        <a:latin typeface="Cambria Math" panose="02040503050406030204" pitchFamily="18" charset="0"/>
+                      </a:rPr>
+                      <m:t>∉</m:t>
+                    </m:r>
+                    <m:r>
+                      <a:rPr lang="pt-BR" sz="2800" b="0" i="1" smtClean="0">
+                        <a:latin typeface="Cambria Math" panose="02040503050406030204" pitchFamily="18" charset="0"/>
+                      </a:rPr>
+                      <m:t>𝐴</m:t>
+                    </m:r>
+                    <m:r>
+                      <a:rPr lang="pt-BR" sz="2800" b="0" i="1" smtClean="0">
+                        <a:latin typeface="Cambria Math" panose="02040503050406030204" pitchFamily="18" charset="0"/>
+                      </a:rPr>
+                      <m:t>.</m:t>
+                    </m:r>
+                  </m:oMath>
+                </a14:m>
+                <a:endParaRPr lang="pt-BR" sz="2800" dirty="0"/>
+              </a:p>
+              <a:p>
+                <a:endParaRPr lang="pt-BR" sz="2800" dirty="0"/>
+              </a:p>
+              <a:p>
+                <a:pPr marL="457200" indent="-457200">
+                  <a:buFont typeface="Arial" panose="020B0604020202020204" pitchFamily="34" charset="0"/>
+                  <a:buChar char="•"/>
+                </a:pPr>
+                <a14:m>
+                  <m:oMath xmlns:m="http://schemas.openxmlformats.org/officeDocument/2006/math">
+                    <m:r>
+                      <a:rPr lang="pt-BR" sz="2800" b="0" i="1" smtClean="0">
+                        <a:latin typeface="Cambria Math" panose="02040503050406030204" pitchFamily="18" charset="0"/>
+                      </a:rPr>
+                      <m:t>𝐴</m:t>
+                    </m:r>
+                    <m:r>
+                      <a:rPr lang="pt-BR" sz="2800" b="0" i="1" smtClean="0">
+                        <a:latin typeface="Cambria Math" panose="02040503050406030204" pitchFamily="18" charset="0"/>
+                      </a:rPr>
+                      <m:t>={</m:t>
+                    </m:r>
+                    <m:r>
+                      <a:rPr lang="pt-BR" sz="2800" b="0" i="1" smtClean="0">
+                        <a:latin typeface="Cambria Math" panose="02040503050406030204" pitchFamily="18" charset="0"/>
+                      </a:rPr>
+                      <m:t>𝑎</m:t>
+                    </m:r>
+                    <m:r>
+                      <a:rPr lang="pt-BR" sz="2800" b="0" i="1" smtClean="0">
+                        <a:latin typeface="Cambria Math" panose="02040503050406030204" pitchFamily="18" charset="0"/>
+                      </a:rPr>
+                      <m:t>,</m:t>
+                    </m:r>
+                    <m:r>
+                      <a:rPr lang="pt-BR" sz="2800" b="0" i="1" smtClean="0">
+                        <a:latin typeface="Cambria Math" panose="02040503050406030204" pitchFamily="18" charset="0"/>
+                      </a:rPr>
+                      <m:t>𝑏</m:t>
+                    </m:r>
+                    <m:r>
+                      <a:rPr lang="pt-BR" sz="2800" b="0" i="1" smtClean="0">
+                        <a:latin typeface="Cambria Math" panose="02040503050406030204" pitchFamily="18" charset="0"/>
+                      </a:rPr>
+                      <m:t>,</m:t>
+                    </m:r>
+                    <m:r>
+                      <a:rPr lang="pt-BR" sz="2800" b="0" i="1" smtClean="0">
+                        <a:latin typeface="Cambria Math" panose="02040503050406030204" pitchFamily="18" charset="0"/>
+                      </a:rPr>
+                      <m:t>𝑐</m:t>
+                    </m:r>
+                    <m:r>
+                      <a:rPr lang="pt-BR" sz="2800" b="0" i="1" smtClean="0">
+                        <a:latin typeface="Cambria Math" panose="02040503050406030204" pitchFamily="18" charset="0"/>
+                      </a:rPr>
+                      <m:t>,</m:t>
+                    </m:r>
+                    <m:r>
+                      <a:rPr lang="pt-BR" sz="2800" b="0" i="1" smtClean="0">
+                        <a:latin typeface="Cambria Math" panose="02040503050406030204" pitchFamily="18" charset="0"/>
+                      </a:rPr>
+                      <m:t>𝑑</m:t>
+                    </m:r>
+                    <m:r>
+                      <a:rPr lang="pt-BR" sz="2800" b="0" i="1" smtClean="0">
+                        <a:latin typeface="Cambria Math" panose="02040503050406030204" pitchFamily="18" charset="0"/>
+                      </a:rPr>
+                      <m:t>}</m:t>
+                    </m:r>
+                  </m:oMath>
+                </a14:m>
+                <a:endParaRPr lang="pt-BR" sz="2800" dirty="0"/>
+              </a:p>
+              <a:p>
+                <a:endParaRPr lang="pt-BR" sz="2800" b="1" dirty="0"/>
+              </a:p>
+            </p:txBody>
+          </p:sp>
+        </mc:Choice>
+        <mc:Fallback xmlns="">
+          <p:sp>
+            <p:nvSpPr>
+              <p:cNvPr id="6" name="CaixaDeTexto 5">
+                <a:extLst>
+                  <a:ext uri="{FF2B5EF4-FFF2-40B4-BE49-F238E27FC236}">
+                    <a16:creationId xmlns:a16="http://schemas.microsoft.com/office/drawing/2014/main" id="{720B10DA-C761-4DEE-8D86-E170E1C2E981}"/>
+                  </a:ext>
+                </a:extLst>
+              </p:cNvPr>
+              <p:cNvSpPr txBox="1">
+                <a:spLocks noRot="1" noChangeAspect="1" noMove="1" noResize="1" noEditPoints="1" noAdjustHandles="1" noChangeArrowheads="1" noChangeShapeType="1" noTextEdit="1"/>
+              </p:cNvSpPr>
+              <p:nvPr/>
+            </p:nvSpPr>
+            <p:spPr>
+              <a:xfrm>
+                <a:off x="881687" y="1506234"/>
+                <a:ext cx="10827959" cy="4401205"/>
+              </a:xfrm>
+              <a:prstGeom prst="rect">
+                <a:avLst/>
+              </a:prstGeom>
+              <a:blipFill>
+                <a:blip r:embed="rId2"/>
+                <a:stretch>
+                  <a:fillRect l="-1182" t="-1247"/>
+                </a:stretch>
+              </a:blipFill>
+            </p:spPr>
+            <p:txBody>
+              <a:bodyPr/>
+              <a:lstStyle/>
+              <a:p>
+                <a:r>
+                  <a:rPr lang="pt-BR">
+                    <a:noFill/>
+                  </a:rPr>
+                  <a:t> </a:t>
+                </a:r>
+              </a:p>
+            </p:txBody>
+          </p:sp>
+        </mc:Fallback>
+      </mc:AlternateContent>
+      <p:sp>
+        <p:nvSpPr>
+          <p:cNvPr id="3" name="CaixaDeTexto 2">
+            <a:extLst>
+              <a:ext uri="{FF2B5EF4-FFF2-40B4-BE49-F238E27FC236}">
+                <a16:creationId xmlns:a16="http://schemas.microsoft.com/office/drawing/2014/main" id="{19131A04-B5D6-4211-8B49-4615DE5797E9}"/>
+              </a:ext>
+            </a:extLst>
+          </p:cNvPr>
+          <p:cNvSpPr txBox="1"/>
+          <p:nvPr/>
+        </p:nvSpPr>
+        <p:spPr>
+          <a:xfrm>
+            <a:off x="361395" y="6488668"/>
+            <a:ext cx="2395336" cy="300210"/>
+          </a:xfrm>
+          <a:prstGeom prst="rect">
+            <a:avLst/>
+          </a:prstGeom>
+          <a:noFill/>
+        </p:spPr>
+        <p:txBody>
+          <a:bodyPr wrap="none" rtlCol="0">
+            <a:spAutoFit/>
+          </a:bodyPr>
+          <a:lstStyle/>
+          <a:p>
+            <a:r>
+              <a:rPr lang="pt-BR" sz="1351" dirty="0"/>
+              <a:t>Professor: Marcos Goulart Lima</a:t>
+            </a:r>
+          </a:p>
+        </p:txBody>
+      </p:sp>
+      <p:pic>
+        <p:nvPicPr>
+          <p:cNvPr id="8" name="Espaço Reservado para Conteúdo 4">
+            <a:extLst>
+              <a:ext uri="{FF2B5EF4-FFF2-40B4-BE49-F238E27FC236}">
+                <a16:creationId xmlns:a16="http://schemas.microsoft.com/office/drawing/2014/main" id="{65AB402D-D1A8-4F31-BA42-34A6F0FC69F9}"/>
+              </a:ext>
+            </a:extLst>
+          </p:cNvPr>
+          <p:cNvPicPr>
+            <a:picLocks noChangeAspect="1"/>
+          </p:cNvPicPr>
+          <p:nvPr/>
+        </p:nvPicPr>
+        <p:blipFill>
+          <a:blip r:embed="rId3">
+            <a:extLst>
+              <a:ext uri="{28A0092B-C50C-407E-A947-70E740481C1C}">
+                <a14:useLocalDpi xmlns:a14="http://schemas.microsoft.com/office/drawing/2010/main" val="0"/>
+              </a:ext>
+            </a:extLst>
+          </a:blip>
+          <a:stretch>
+            <a:fillRect/>
+          </a:stretch>
+        </p:blipFill>
+        <p:spPr>
+          <a:xfrm>
+            <a:off x="62144" y="112237"/>
+            <a:ext cx="588096" cy="1228523"/>
+          </a:xfrm>
+          <a:prstGeom prst="rect">
+            <a:avLst/>
+          </a:prstGeom>
+        </p:spPr>
+      </p:pic>
+    </p:spTree>
+    <p:extLst>
+      <p:ext uri="{BB962C8B-B14F-4D97-AF65-F5344CB8AC3E}">
+        <p14:creationId xmlns:p14="http://schemas.microsoft.com/office/powerpoint/2010/main" val="2063977868"/>
+      </p:ext>
+    </p:extLst>
+  </p:cSld>
+  <p:clrMapOvr>
+    <a:masterClrMapping/>
+  </p:clrMapOvr>
+</p:sld>
+</file>
+
+<file path=ppt/slides/slide30.xml><?xml version="1.0" encoding="utf-8"?>
 <p:sld xmlns:a="http://schemas.openxmlformats.org/drawingml/2006/main" xmlns:r="http://schemas.openxmlformats.org/officeDocument/2006/relationships" xmlns:p="http://schemas.openxmlformats.org/presentationml/2006/main">
   <p:cSld>
     <p:spTree>
@@ -10887,11 +12939,11 @@
               <a:p>
                 <a:r>
                   <a:rPr lang="pt-BR" sz="2800" b="1" dirty="0"/>
-                  <a:t xml:space="preserve">Exemplos: </a:t>
+                  <a:t>Exemplos: </a:t>
                 </a:r>
                 <a:r>
                   <a:rPr lang="pt-BR" sz="2800" dirty="0"/>
-                  <a:t xml:space="preserve">Suponha que </a:t>
+                  <a:t>Suponha que </a:t>
                 </a:r>
                 <a14:m>
                   <m:oMath xmlns:m="http://schemas.openxmlformats.org/officeDocument/2006/math">
@@ -10940,7 +12992,7 @@
                 </a14:m>
                 <a:r>
                   <a:rPr lang="pt-BR" sz="2800" dirty="0"/>
-                  <a:t xml:space="preserve"> </a:t>
+                  <a:t> </a:t>
                 </a:r>
                 <a14:m>
                   <m:oMath xmlns:m="http://schemas.openxmlformats.org/officeDocument/2006/math">
@@ -10983,7 +13035,7 @@
                 </a14:m>
                 <a:r>
                   <a:rPr lang="pt-BR" sz="2800" dirty="0"/>
-                  <a:t xml:space="preserve"> e </a:t>
+                  <a:t> e </a:t>
                 </a:r>
                 <a14:m>
                   <m:oMath xmlns:m="http://schemas.openxmlformats.org/officeDocument/2006/math">
@@ -11220,7 +13272,7 @@
                 </a:pPr>
                 <a:r>
                   <a:rPr lang="pt-BR" sz="2800" dirty="0"/>
-                  <a:t xml:space="preserve"> </a:t>
+                  <a:t> </a:t>
                 </a:r>
                 <a14:m>
                   <m:oMath xmlns:m="http://schemas.openxmlformats.org/officeDocument/2006/math">
@@ -11315,7 +13367,7 @@
                 </a:pPr>
                 <a:r>
                   <a:rPr lang="pt-BR" sz="2800" dirty="0"/>
-                  <a:t xml:space="preserve"> </a:t>
+                  <a:t> </a:t>
                 </a:r>
                 <a14:m>
                   <m:oMath xmlns:m="http://schemas.openxmlformats.org/officeDocument/2006/math">
@@ -11509,7 +13561,7 @@
 </p:sld>
 </file>
 
-<file path=ppt/slides/slide26.xml><?xml version="1.0" encoding="utf-8"?>
+<file path=ppt/slides/slide31.xml><?xml version="1.0" encoding="utf-8"?>
 <p:sld xmlns:a="http://schemas.openxmlformats.org/drawingml/2006/main" xmlns:r="http://schemas.openxmlformats.org/officeDocument/2006/relationships" xmlns:p="http://schemas.openxmlformats.org/presentationml/2006/main">
   <p:cSld>
     <p:spTree>
@@ -11617,7 +13669,7 @@
               <a:p>
                 <a:r>
                   <a:rPr lang="pt-BR" sz="2800" dirty="0"/>
-                  <a:t xml:space="preserve">Dado um espaço amostral </a:t>
+                  <a:t>Dado um espaço amostral </a:t>
                 </a:r>
                 <a14:m>
                   <m:oMath xmlns:m="http://schemas.openxmlformats.org/officeDocument/2006/math">
@@ -11634,7 +13686,7 @@
                 </a14:m>
                 <a:r>
                   <a:rPr lang="pt-BR" sz="2800" dirty="0"/>
-                  <a:t xml:space="preserve">, os eventos </a:t>
+                  <a:t>, os eventos </a:t>
                 </a:r>
                 <a14:m>
                   <m:oMath xmlns:m="http://schemas.openxmlformats.org/officeDocument/2006/math">
@@ -11715,7 +13767,7 @@
                 </a14:m>
                 <a:r>
                   <a:rPr lang="pt-BR" sz="2800" dirty="0"/>
-                  <a:t xml:space="preserve"> são ditos equiprováveis se </a:t>
+                  <a:t> são ditos equiprováveis se </a:t>
                 </a:r>
                 <a14:m>
                   <m:oMath xmlns:m="http://schemas.openxmlformats.org/officeDocument/2006/math">
@@ -11813,7 +13865,7 @@
               <a:p>
                 <a:r>
                   <a:rPr lang="pt-BR" sz="2800" dirty="0"/>
-                  <a:t xml:space="preserve">Logo, se os </a:t>
+                  <a:t>Logo, se os </a:t>
                 </a:r>
                 <a14:m>
                   <m:oMath xmlns:m="http://schemas.openxmlformats.org/officeDocument/2006/math">
@@ -11827,7 +13879,7 @@
                 </a14:m>
                 <a:r>
                   <a:rPr lang="pt-BR" sz="2800" dirty="0"/>
-                  <a:t xml:space="preserve"> pontos amostrais são equiprováveis, a probabilidade de cada ponto é </a:t>
+                  <a:t> pontos amostrais são equiprováveis, a probabilidade de cada ponto é </a:t>
                 </a:r>
                 <a14:m>
                   <m:oMath xmlns:m="http://schemas.openxmlformats.org/officeDocument/2006/math">
@@ -11856,7 +13908,7 @@
               <a:p>
                 <a:r>
                   <a:rPr lang="pt-BR" sz="2800" dirty="0"/>
-                  <a:t xml:space="preserve">Se o evento </a:t>
+                  <a:t>Se o evento </a:t>
                 </a:r>
                 <a14:m>
                   <m:oMath xmlns:m="http://schemas.openxmlformats.org/officeDocument/2006/math">
@@ -11870,7 +13922,7 @@
                 </a14:m>
                 <a:r>
                   <a:rPr lang="pt-BR" sz="2800" dirty="0"/>
-                  <a:t xml:space="preserve"> possui </a:t>
+                  <a:t> possui </a:t>
                 </a:r>
                 <a14:m>
                   <m:oMath xmlns:m="http://schemas.openxmlformats.org/officeDocument/2006/math">
@@ -11884,7 +13936,7 @@
                 </a14:m>
                 <a:r>
                   <a:rPr lang="pt-BR" sz="2800" dirty="0"/>
-                  <a:t xml:space="preserve"> pontos amostrais, então </a:t>
+                  <a:t> pontos amostrais, então </a:t>
                 </a:r>
                 <a14:m>
                   <m:oMath xmlns:m="http://schemas.openxmlformats.org/officeDocument/2006/math">
@@ -11939,7 +13991,7 @@
                 </a14:m>
                 <a:r>
                   <a:rPr lang="pt-BR" sz="2800" dirty="0"/>
-                  <a:t xml:space="preserve">. </a:t>
+                  <a:t>. </a:t>
                 </a:r>
               </a:p>
               <a:p>
@@ -12077,7 +14129,7 @@
 </p:sld>
 </file>
 
-<file path=ppt/slides/slide27.xml><?xml version="1.0" encoding="utf-8"?>
+<file path=ppt/slides/slide32.xml><?xml version="1.0" encoding="utf-8"?>
 <p:sld xmlns:a="http://schemas.openxmlformats.org/drawingml/2006/main" xmlns:r="http://schemas.openxmlformats.org/officeDocument/2006/relationships" xmlns:p="http://schemas.openxmlformats.org/presentationml/2006/main">
   <p:cSld>
     <p:spTree>
@@ -12159,7 +14211,7 @@
         <p:spPr>
           <a:xfrm>
             <a:off x="881687" y="1441868"/>
-            <a:ext cx="10067277" cy="4295185"/>
+            <a:ext cx="10067277" cy="4610365"/>
           </a:xfrm>
           <a:prstGeom prst="rect">
             <a:avLst/>
@@ -12172,80 +14224,113 @@
           </a:bodyPr>
           <a:lstStyle/>
           <a:p>
-            <a:r>
-              <a:rPr lang="pt-BR" sz="2400" b="1" dirty="0"/>
+            <a:pPr>
+              <a:lnSpc>
+                <a:spcPct val="150000"/>
+              </a:lnSpc>
+            </a:pPr>
+            <a:r>
+              <a:rPr lang="pt-BR" sz="2200" b="1" dirty="0"/>
               <a:t>Atividades referentes à aula</a:t>
             </a:r>
           </a:p>
           <a:p>
-            <a:r>
-              <a:rPr lang="pt-BR" sz="2000" dirty="0"/>
-              <a:t xml:space="preserve">Leitura recomendada: </a:t>
+            <a:pPr>
+              <a:lnSpc>
+                <a:spcPct val="150000"/>
+              </a:lnSpc>
+            </a:pPr>
+            <a:r>
+              <a:rPr lang="pt-BR" sz="2200" dirty="0"/>
+              <a:t>Leitura recomendada: </a:t>
             </a:r>
           </a:p>
           <a:p>
             <a:pPr marL="457178" indent="-457178">
+              <a:lnSpc>
+                <a:spcPct val="150000"/>
+              </a:lnSpc>
               <a:buFont typeface="Arial" panose="020B0604020202020204" pitchFamily="34" charset="0"/>
               <a:buChar char="•"/>
             </a:pPr>
             <a:r>
-              <a:rPr lang="pt-BR" sz="2000" dirty="0"/>
+              <a:rPr lang="pt-BR" sz="2200" dirty="0"/>
               <a:t>Bussab &amp; Morettin — Cap. 5: 5.1, 5.2</a:t>
             </a:r>
           </a:p>
           <a:p>
             <a:pPr marL="457178" indent="-457178">
+              <a:lnSpc>
+                <a:spcPct val="150000"/>
+              </a:lnSpc>
               <a:buFont typeface="Arial" panose="020B0604020202020204" pitchFamily="34" charset="0"/>
               <a:buChar char="•"/>
             </a:pPr>
             <a:r>
-              <a:rPr lang="pt-BR" sz="2000" dirty="0"/>
+              <a:rPr lang="pt-BR" sz="2200" dirty="0"/>
               <a:t>Montgomery &amp; Runger — Cap. 2: 2.1, 2.3</a:t>
             </a:r>
           </a:p>
           <a:p>
             <a:pPr marL="457178" indent="-457178">
+              <a:lnSpc>
+                <a:spcPct val="150000"/>
+              </a:lnSpc>
               <a:buFont typeface="Arial" panose="020B0604020202020204" pitchFamily="34" charset="0"/>
               <a:buChar char="•"/>
             </a:pPr>
             <a:r>
-              <a:rPr lang="pt-BR" sz="2000" dirty="0"/>
+              <a:rPr lang="pt-BR" sz="2200" dirty="0"/>
               <a:t>Magalhães &amp; Lima — Cap. 2: 2.1</a:t>
             </a:r>
           </a:p>
           <a:p>
             <a:pPr marL="457178" indent="-457178">
+              <a:lnSpc>
+                <a:spcPct val="150000"/>
+              </a:lnSpc>
               <a:buFont typeface="Arial" panose="020B0604020202020204" pitchFamily="34" charset="0"/>
               <a:buChar char="•"/>
             </a:pPr>
             <a:r>
-              <a:rPr lang="pt-BR" sz="2000" dirty="0"/>
+              <a:rPr lang="pt-BR" sz="2200" dirty="0"/>
               <a:t>Morettin — Cap. 1: 1.1 a 1.6; Cap. 2: 2.1</a:t>
             </a:r>
           </a:p>
           <a:p>
-            <a:r>
-              <a:rPr lang="pt-BR" sz="2000" dirty="0"/>
+            <a:pPr>
+              <a:lnSpc>
+                <a:spcPct val="150000"/>
+              </a:lnSpc>
+            </a:pPr>
+            <a:r>
+              <a:rPr lang="pt-BR" sz="2200" dirty="0"/>
               <a:t>Exercícios recomendados:</a:t>
             </a:r>
           </a:p>
           <a:p>
             <a:pPr marL="457178" indent="-457178">
+              <a:lnSpc>
+                <a:spcPct val="150000"/>
+              </a:lnSpc>
               <a:buFont typeface="Arial" panose="020B0604020202020204" pitchFamily="34" charset="0"/>
               <a:buChar char="•"/>
             </a:pPr>
             <a:r>
-              <a:rPr lang="pt-BR" sz="2000" dirty="0"/>
+              <a:rPr lang="pt-BR" sz="2200" dirty="0"/>
               <a:t>Morettin, Cap. 1: exercícios 1 a 04</a:t>
             </a:r>
           </a:p>
           <a:p>
             <a:pPr marL="457178" indent="-457178">
+              <a:lnSpc>
+                <a:spcPct val="150000"/>
+              </a:lnSpc>
               <a:buFont typeface="Arial" panose="020B0604020202020204" pitchFamily="34" charset="0"/>
               <a:buChar char="•"/>
             </a:pPr>
             <a:r>
-              <a:rPr lang="pt-BR" sz="2000" dirty="0"/>
+              <a:rPr lang="pt-BR" sz="2200" dirty="0"/>
               <a:t>Bussab, Cap. 5: exercícios sobre espaço amostral e axiomas de probabilidade</a:t>
             </a:r>
           </a:p>
@@ -12326,427 +14411,6 @@
     <p:extLst>
       <p:ext uri="{BB962C8B-B14F-4D97-AF65-F5344CB8AC3E}">
         <p14:creationId xmlns:p14="http://schemas.microsoft.com/office/powerpoint/2010/main" val="1670738953"/>
-      </p:ext>
-    </p:extLst>
-  </p:cSld>
-  <p:clrMapOvr>
-    <a:masterClrMapping/>
-  </p:clrMapOvr>
-</p:sld>
-</file>
-
-<file path=ppt/slides/slide3.xml><?xml version="1.0" encoding="utf-8"?>
-<p:sld xmlns:a="http://schemas.openxmlformats.org/drawingml/2006/main" xmlns:r="http://schemas.openxmlformats.org/officeDocument/2006/relationships" xmlns:p="http://schemas.openxmlformats.org/presentationml/2006/main">
-  <p:cSld>
-    <p:spTree>
-      <p:nvGrpSpPr>
-        <p:cNvPr id="1" name=""/>
-        <p:cNvGrpSpPr/>
-        <p:nvPr/>
-      </p:nvGrpSpPr>
-      <p:grpSpPr>
-        <a:xfrm>
-          <a:off x="0" y="0"/>
-          <a:ext cx="0" cy="0"/>
-          <a:chOff x="0" y="0"/>
-          <a:chExt cx="0" cy="0"/>
-        </a:xfrm>
-      </p:grpSpPr>
-      <p:sp>
-        <p:nvSpPr>
-          <p:cNvPr id="2" name="Título 1">
-            <a:extLst>
-              <a:ext uri="{FF2B5EF4-FFF2-40B4-BE49-F238E27FC236}">
-                <a16:creationId xmlns:a16="http://schemas.microsoft.com/office/drawing/2014/main" id="{BC798918-7CB4-450A-A042-F0B538CA25DE}"/>
-              </a:ext>
-            </a:extLst>
-          </p:cNvPr>
-          <p:cNvSpPr>
-            <a:spLocks noGrp="1"/>
-          </p:cNvSpPr>
-          <p:nvPr>
-            <p:ph type="title"/>
-          </p:nvPr>
-        </p:nvSpPr>
-        <p:spPr>
-          <a:xfrm>
-            <a:off x="1032611" y="0"/>
-            <a:ext cx="10827959" cy="1574800"/>
-          </a:xfrm>
-        </p:spPr>
-        <p:txBody>
-          <a:bodyPr>
-            <a:normAutofit/>
-          </a:bodyPr>
-          <a:lstStyle/>
-          <a:p>
-            <a:pPr algn="ctr"/>
-            <a:r>
-              <a:rPr lang="pt-BR" dirty="0">
-                <a:latin typeface="AlternateGothic2 BT" panose="020B0608020202050204" pitchFamily="34" charset="0"/>
-              </a:rPr>
-              <a:t>CEA055 – Estatística e Probabilidade</a:t>
-            </a:r>
-            <a:br>
-              <a:rPr lang="pt-BR" dirty="0">
-                <a:latin typeface="AlternateGothic2 BT" panose="020B0608020202050204" pitchFamily="34" charset="0"/>
-              </a:rPr>
-            </a:br>
-            <a:r>
-              <a:rPr lang="pt-BR" sz="2200" dirty="0">
-                <a:latin typeface="AlternateGothic2 BT" panose="020B0608020202050204" pitchFamily="34" charset="0"/>
-              </a:rPr>
-              <a:t>E</a:t>
-            </a:r>
-            <a:r>
-              <a:rPr lang="pt-BR" sz="2200" b="1" dirty="0"/>
-              <a:t>spaço Amostral e Eventos</a:t>
-            </a:r>
-            <a:endParaRPr lang="pt-BR" dirty="0">
-              <a:latin typeface="AlternateGothic2 BT" panose="020B0608020202050204" pitchFamily="34" charset="0"/>
-            </a:endParaRPr>
-          </a:p>
-        </p:txBody>
-      </p:sp>
-      <mc:AlternateContent xmlns:mc="http://schemas.openxmlformats.org/markup-compatibility/2006" xmlns:a14="http://schemas.microsoft.com/office/drawing/2010/main">
-        <mc:Choice Requires="a14">
-          <p:sp>
-            <p:nvSpPr>
-              <p:cNvPr id="6" name="CaixaDeTexto 5">
-                <a:extLst>
-                  <a:ext uri="{FF2B5EF4-FFF2-40B4-BE49-F238E27FC236}">
-                    <a16:creationId xmlns:a16="http://schemas.microsoft.com/office/drawing/2014/main" id="{720B10DA-C761-4DEE-8D86-E170E1C2E981}"/>
-                  </a:ext>
-                </a:extLst>
-              </p:cNvPr>
-              <p:cNvSpPr txBox="1"/>
-              <p:nvPr/>
-            </p:nvSpPr>
-            <p:spPr>
-              <a:xfrm>
-                <a:off x="881687" y="1506234"/>
-                <a:ext cx="10827959" cy="4401205"/>
-              </a:xfrm>
-              <a:prstGeom prst="rect">
-                <a:avLst/>
-              </a:prstGeom>
-              <a:noFill/>
-            </p:spPr>
-            <p:txBody>
-              <a:bodyPr wrap="square" rtlCol="0">
-                <a:spAutoFit/>
-              </a:bodyPr>
-              <a:lstStyle/>
-              <a:p>
-                <a:r>
-                  <a:rPr lang="pt-BR" sz="2800" b="1" dirty="0"/>
-                  <a:t>Relação de pertinência</a:t>
-                </a:r>
-              </a:p>
-              <a:p>
-                <a:endParaRPr lang="pt-BR" sz="2800" b="1" dirty="0"/>
-              </a:p>
-              <a:p>
-                <a:pPr marL="342900" indent="-342900">
-                  <a:buFont typeface="Arial" panose="020B0604020202020204" pitchFamily="34" charset="0"/>
-                  <a:buChar char="•"/>
-                </a:pPr>
-                <a:r>
-                  <a:rPr lang="pt-BR" sz="2800" dirty="0"/>
-                  <a:t xml:space="preserve">Para indicar que um elemento </a:t>
-                </a:r>
-                <a14:m>
-                  <m:oMath xmlns:m="http://schemas.openxmlformats.org/officeDocument/2006/math">
-                    <m:r>
-                      <a:rPr lang="pt-BR" sz="2800" b="0" i="1" smtClean="0">
-                        <a:latin typeface="Cambria Math" panose="02040503050406030204" pitchFamily="18" charset="0"/>
-                      </a:rPr>
-                      <m:t>𝑥</m:t>
-                    </m:r>
-                  </m:oMath>
-                </a14:m>
-                <a:r>
-                  <a:rPr lang="pt-BR" sz="2800" dirty="0"/>
-                  <a:t xml:space="preserve"> pertence ao conjunto A, escrevemos</a:t>
-                </a:r>
-              </a:p>
-              <a:p>
-                <a:pPr algn="ctr"/>
-                <a:endParaRPr lang="pt-BR" sz="2800" b="0" i="1" dirty="0">
-                  <a:latin typeface="Cambria Math" panose="02040503050406030204" pitchFamily="18" charset="0"/>
-                </a:endParaRPr>
-              </a:p>
-              <a:p>
-                <a:pPr algn="ctr"/>
-                <a14:m>
-                  <m:oMath xmlns:m="http://schemas.openxmlformats.org/officeDocument/2006/math">
-                    <m:r>
-                      <a:rPr lang="pt-BR" sz="2800" b="0" i="1" smtClean="0">
-                        <a:latin typeface="Cambria Math" panose="02040503050406030204" pitchFamily="18" charset="0"/>
-                      </a:rPr>
-                      <m:t>𝑥</m:t>
-                    </m:r>
-                    <m:r>
-                      <a:rPr lang="pt-BR" sz="2800" b="0" i="1" smtClean="0">
-                        <a:latin typeface="Cambria Math" panose="02040503050406030204" pitchFamily="18" charset="0"/>
-                      </a:rPr>
-                      <m:t>∈</m:t>
-                    </m:r>
-                    <m:r>
-                      <a:rPr lang="pt-BR" sz="2800" b="0" i="1" smtClean="0">
-                        <a:latin typeface="Cambria Math" panose="02040503050406030204" pitchFamily="18" charset="0"/>
-                      </a:rPr>
-                      <m:t>𝐴</m:t>
-                    </m:r>
-                  </m:oMath>
-                </a14:m>
-                <a:r>
-                  <a:rPr lang="pt-BR" sz="2800" dirty="0"/>
-                  <a:t xml:space="preserve">. </a:t>
-                </a:r>
-              </a:p>
-              <a:p>
-                <a:endParaRPr lang="pt-BR" sz="2800" b="1" dirty="0"/>
-              </a:p>
-              <a:p>
-                <a:pPr marL="457200" indent="-457200">
-                  <a:buFont typeface="Arial" panose="020B0604020202020204" pitchFamily="34" charset="0"/>
-                  <a:buChar char="•"/>
-                </a:pPr>
-                <a:r>
-                  <a:rPr lang="pt-BR" sz="2800" dirty="0"/>
-                  <a:t xml:space="preserve">Caso contrário: </a:t>
-                </a:r>
-                <a14:m>
-                  <m:oMath xmlns:m="http://schemas.openxmlformats.org/officeDocument/2006/math">
-                    <m:r>
-                      <a:rPr lang="pt-BR" sz="2800" b="0" i="1" smtClean="0">
-                        <a:latin typeface="Cambria Math" panose="02040503050406030204" pitchFamily="18" charset="0"/>
-                      </a:rPr>
-                      <m:t>𝑥</m:t>
-                    </m:r>
-                    <m:r>
-                      <a:rPr lang="pt-BR" sz="2800" b="0" i="1" smtClean="0">
-                        <a:latin typeface="Cambria Math" panose="02040503050406030204" pitchFamily="18" charset="0"/>
-                      </a:rPr>
-                      <m:t>∉</m:t>
-                    </m:r>
-                    <m:r>
-                      <a:rPr lang="pt-BR" sz="2800" b="0" i="1" smtClean="0">
-                        <a:latin typeface="Cambria Math" panose="02040503050406030204" pitchFamily="18" charset="0"/>
-                      </a:rPr>
-                      <m:t>𝐴</m:t>
-                    </m:r>
-                    <m:r>
-                      <a:rPr lang="pt-BR" sz="2800" b="0" i="1" smtClean="0">
-                        <a:latin typeface="Cambria Math" panose="02040503050406030204" pitchFamily="18" charset="0"/>
-                      </a:rPr>
-                      <m:t>.</m:t>
-                    </m:r>
-                  </m:oMath>
-                </a14:m>
-                <a:endParaRPr lang="pt-BR" sz="2800" dirty="0"/>
-              </a:p>
-              <a:p>
-                <a:endParaRPr lang="pt-BR" sz="2800" dirty="0"/>
-              </a:p>
-              <a:p>
-                <a:pPr marL="457200" indent="-457200">
-                  <a:buFont typeface="Arial" panose="020B0604020202020204" pitchFamily="34" charset="0"/>
-                  <a:buChar char="•"/>
-                </a:pPr>
-                <a14:m>
-                  <m:oMath xmlns:m="http://schemas.openxmlformats.org/officeDocument/2006/math">
-                    <m:r>
-                      <a:rPr lang="pt-BR" sz="2800" b="0" i="1" smtClean="0">
-                        <a:latin typeface="Cambria Math" panose="02040503050406030204" pitchFamily="18" charset="0"/>
-                      </a:rPr>
-                      <m:t>𝐴</m:t>
-                    </m:r>
-                    <m:r>
-                      <a:rPr lang="pt-BR" sz="2800" b="0" i="1" smtClean="0">
-                        <a:latin typeface="Cambria Math" panose="02040503050406030204" pitchFamily="18" charset="0"/>
-                      </a:rPr>
-                      <m:t>={</m:t>
-                    </m:r>
-                    <m:r>
-                      <a:rPr lang="pt-BR" sz="2800" b="0" i="1" smtClean="0">
-                        <a:latin typeface="Cambria Math" panose="02040503050406030204" pitchFamily="18" charset="0"/>
-                      </a:rPr>
-                      <m:t>𝑎</m:t>
-                    </m:r>
-                    <m:r>
-                      <a:rPr lang="pt-BR" sz="2800" b="0" i="1" smtClean="0">
-                        <a:latin typeface="Cambria Math" panose="02040503050406030204" pitchFamily="18" charset="0"/>
-                      </a:rPr>
-                      <m:t>,</m:t>
-                    </m:r>
-                    <m:r>
-                      <a:rPr lang="pt-BR" sz="2800" b="0" i="1" smtClean="0">
-                        <a:latin typeface="Cambria Math" panose="02040503050406030204" pitchFamily="18" charset="0"/>
-                      </a:rPr>
-                      <m:t>𝑏</m:t>
-                    </m:r>
-                    <m:r>
-                      <a:rPr lang="pt-BR" sz="2800" b="0" i="1" smtClean="0">
-                        <a:latin typeface="Cambria Math" panose="02040503050406030204" pitchFamily="18" charset="0"/>
-                      </a:rPr>
-                      <m:t>,</m:t>
-                    </m:r>
-                    <m:r>
-                      <a:rPr lang="pt-BR" sz="2800" b="0" i="1" smtClean="0">
-                        <a:latin typeface="Cambria Math" panose="02040503050406030204" pitchFamily="18" charset="0"/>
-                      </a:rPr>
-                      <m:t>𝑐</m:t>
-                    </m:r>
-                    <m:r>
-                      <a:rPr lang="pt-BR" sz="2800" b="0" i="1" smtClean="0">
-                        <a:latin typeface="Cambria Math" panose="02040503050406030204" pitchFamily="18" charset="0"/>
-                      </a:rPr>
-                      <m:t>,</m:t>
-                    </m:r>
-                    <m:r>
-                      <a:rPr lang="pt-BR" sz="2800" b="0" i="1" smtClean="0">
-                        <a:latin typeface="Cambria Math" panose="02040503050406030204" pitchFamily="18" charset="0"/>
-                      </a:rPr>
-                      <m:t>𝑑</m:t>
-                    </m:r>
-                    <m:r>
-                      <a:rPr lang="pt-BR" sz="2800" b="0" i="1" smtClean="0">
-                        <a:latin typeface="Cambria Math" panose="02040503050406030204" pitchFamily="18" charset="0"/>
-                      </a:rPr>
-                      <m:t>}</m:t>
-                    </m:r>
-                  </m:oMath>
-                </a14:m>
-                <a:endParaRPr lang="pt-BR" sz="2800" dirty="0"/>
-              </a:p>
-              <a:p>
-                <a:endParaRPr lang="pt-BR" sz="2800" b="1" dirty="0"/>
-              </a:p>
-            </p:txBody>
-          </p:sp>
-        </mc:Choice>
-        <mc:Fallback xmlns="">
-          <p:sp>
-            <p:nvSpPr>
-              <p:cNvPr id="6" name="CaixaDeTexto 5">
-                <a:extLst>
-                  <a:ext uri="{FF2B5EF4-FFF2-40B4-BE49-F238E27FC236}">
-                    <a16:creationId xmlns:a16="http://schemas.microsoft.com/office/drawing/2014/main" id="{720B10DA-C761-4DEE-8D86-E170E1C2E981}"/>
-                  </a:ext>
-                </a:extLst>
-              </p:cNvPr>
-              <p:cNvSpPr txBox="1">
-                <a:spLocks noRot="1" noChangeAspect="1" noMove="1" noResize="1" noEditPoints="1" noAdjustHandles="1" noChangeArrowheads="1" noChangeShapeType="1" noTextEdit="1"/>
-              </p:cNvSpPr>
-              <p:nvPr/>
-            </p:nvSpPr>
-            <p:spPr>
-              <a:xfrm>
-                <a:off x="881687" y="1506234"/>
-                <a:ext cx="10827959" cy="4401205"/>
-              </a:xfrm>
-              <a:prstGeom prst="rect">
-                <a:avLst/>
-              </a:prstGeom>
-              <a:blipFill>
-                <a:blip r:embed="rId2"/>
-                <a:stretch>
-                  <a:fillRect l="-1182" t="-1247"/>
-                </a:stretch>
-              </a:blipFill>
-            </p:spPr>
-            <p:txBody>
-              <a:bodyPr/>
-              <a:lstStyle/>
-              <a:p>
-                <a:r>
-                  <a:rPr lang="pt-BR">
-                    <a:noFill/>
-                  </a:rPr>
-                  <a:t> </a:t>
-                </a:r>
-              </a:p>
-            </p:txBody>
-          </p:sp>
-        </mc:Fallback>
-      </mc:AlternateContent>
-      <p:sp>
-        <p:nvSpPr>
-          <p:cNvPr id="3" name="CaixaDeTexto 2">
-            <a:extLst>
-              <a:ext uri="{FF2B5EF4-FFF2-40B4-BE49-F238E27FC236}">
-                <a16:creationId xmlns:a16="http://schemas.microsoft.com/office/drawing/2014/main" id="{19131A04-B5D6-4211-8B49-4615DE5797E9}"/>
-              </a:ext>
-            </a:extLst>
-          </p:cNvPr>
-          <p:cNvSpPr txBox="1"/>
-          <p:nvPr/>
-        </p:nvSpPr>
-        <p:spPr>
-          <a:xfrm>
-            <a:off x="361395" y="6488668"/>
-            <a:ext cx="2395336" cy="300210"/>
-          </a:xfrm>
-          <a:prstGeom prst="rect">
-            <a:avLst/>
-          </a:prstGeom>
-          <a:noFill/>
-        </p:spPr>
-        <p:txBody>
-          <a:bodyPr wrap="none" rtlCol="0">
-            <a:spAutoFit/>
-          </a:bodyPr>
-          <a:lstStyle/>
-          <a:p>
-            <a:r>
-              <a:rPr lang="pt-BR" sz="1351" dirty="0"/>
-              <a:t>Professor: Marcos Goulart Lima</a:t>
-            </a:r>
-          </a:p>
-        </p:txBody>
-      </p:sp>
-      <p:pic>
-        <p:nvPicPr>
-          <p:cNvPr id="8" name="Espaço Reservado para Conteúdo 4">
-            <a:extLst>
-              <a:ext uri="{FF2B5EF4-FFF2-40B4-BE49-F238E27FC236}">
-                <a16:creationId xmlns:a16="http://schemas.microsoft.com/office/drawing/2014/main" id="{65AB402D-D1A8-4F31-BA42-34A6F0FC69F9}"/>
-              </a:ext>
-            </a:extLst>
-          </p:cNvPr>
-          <p:cNvPicPr>
-            <a:picLocks noChangeAspect="1"/>
-          </p:cNvPicPr>
-          <p:nvPr/>
-        </p:nvPicPr>
-        <p:blipFill>
-          <a:blip r:embed="rId3">
-            <a:extLst>
-              <a:ext uri="{28A0092B-C50C-407E-A947-70E740481C1C}">
-                <a14:useLocalDpi xmlns:a14="http://schemas.microsoft.com/office/drawing/2010/main" val="0"/>
-              </a:ext>
-            </a:extLst>
-          </a:blip>
-          <a:stretch>
-            <a:fillRect/>
-          </a:stretch>
-        </p:blipFill>
-        <p:spPr>
-          <a:xfrm>
-            <a:off x="62144" y="112237"/>
-            <a:ext cx="588096" cy="1228523"/>
-          </a:xfrm>
-          <a:prstGeom prst="rect">
-            <a:avLst/>
-          </a:prstGeom>
-        </p:spPr>
-      </p:pic>
-    </p:spTree>
-    <p:extLst>
-      <p:ext uri="{BB962C8B-B14F-4D97-AF65-F5344CB8AC3E}">
-        <p14:creationId xmlns:p14="http://schemas.microsoft.com/office/powerpoint/2010/main" val="2063977868"/>
       </p:ext>
     </p:extLst>
   </p:cSld>
@@ -12846,7 +14510,7 @@
             <p:spPr>
               <a:xfrm>
                 <a:off x="881687" y="1506234"/>
-                <a:ext cx="10827959" cy="3308919"/>
+                <a:ext cx="10827959" cy="4120872"/>
               </a:xfrm>
               <a:prstGeom prst="rect">
                 <a:avLst/>
@@ -12859,16 +14523,21 @@
               </a:bodyPr>
               <a:lstStyle/>
               <a:p>
+                <a:pPr>
+                  <a:lnSpc>
+                    <a:spcPct val="150000"/>
+                  </a:lnSpc>
+                </a:pPr>
                 <a:r>
                   <a:rPr lang="pt-BR" sz="2800" b="1" dirty="0"/>
                   <a:t>Exemplos de conjuntos numéricos</a:t>
                 </a:r>
               </a:p>
               <a:p>
-                <a:endParaRPr lang="pt-BR" sz="2800" b="1" dirty="0"/>
-              </a:p>
-              <a:p>
                 <a:pPr marL="342900" indent="-342900">
+                  <a:lnSpc>
+                    <a:spcPct val="150000"/>
+                  </a:lnSpc>
                   <a:buFont typeface="Arial" panose="020B0604020202020204" pitchFamily="34" charset="0"/>
                   <a:buChar char="•"/>
                 </a:pPr>
@@ -12897,6 +14566,9 @@
               </a:p>
               <a:p>
                 <a:pPr marL="342900" indent="-342900">
+                  <a:lnSpc>
+                    <a:spcPct val="150000"/>
+                  </a:lnSpc>
                   <a:buFont typeface="Arial" panose="020B0604020202020204" pitchFamily="34" charset="0"/>
                   <a:buChar char="•"/>
                 </a:pPr>
@@ -12923,6 +14595,9 @@
               </a:p>
               <a:p>
                 <a:pPr marL="342900" indent="-342900">
+                  <a:lnSpc>
+                    <a:spcPct val="150000"/>
+                  </a:lnSpc>
                   <a:buFont typeface="Arial" panose="020B0604020202020204" pitchFamily="34" charset="0"/>
                   <a:buChar char="•"/>
                 </a:pPr>
@@ -13011,11 +14686,14 @@
                 </a14:m>
                 <a:r>
                   <a:rPr lang="pt-BR" sz="2800" dirty="0"/>
-                  <a:t xml:space="preserve"> - números racionais</a:t>
+                  <a:t> - números racionais</a:t>
                 </a:r>
               </a:p>
               <a:p>
                 <a:pPr marL="342900" indent="-342900">
+                  <a:lnSpc>
+                    <a:spcPct val="150000"/>
+                  </a:lnSpc>
                   <a:buFont typeface="Arial" panose="020B0604020202020204" pitchFamily="34" charset="0"/>
                   <a:buChar char="•"/>
                 </a:pPr>
@@ -13042,6 +14720,9 @@
               </a:p>
               <a:p>
                 <a:pPr marL="342900" indent="-342900">
+                  <a:lnSpc>
+                    <a:spcPct val="150000"/>
+                  </a:lnSpc>
                   <a:buFont typeface="Arial" panose="020B0604020202020204" pitchFamily="34" charset="0"/>
                   <a:buChar char="•"/>
                 </a:pPr>
@@ -13148,7 +14829,7 @@
             <p:spPr>
               <a:xfrm>
                 <a:off x="881687" y="1506234"/>
-                <a:ext cx="10827959" cy="3308919"/>
+                <a:ext cx="10827959" cy="4120872"/>
               </a:xfrm>
               <a:prstGeom prst="rect">
                 <a:avLst/>
@@ -13156,7 +14837,7 @@
               <a:blipFill>
                 <a:blip r:embed="rId2"/>
                 <a:stretch>
-                  <a:fillRect l="-1182" t="-1657" b="-2578"/>
+                  <a:fillRect l="-1182" b="-3254"/>
                 </a:stretch>
               </a:blipFill>
             </p:spPr>
@@ -13398,7 +15079,7 @@
                 </a:pPr>
                 <a:r>
                   <a:rPr lang="pt-BR" sz="2800" dirty="0"/>
-                  <a:t xml:space="preserve">Vazio, </a:t>
+                  <a:t>Vazio, </a:t>
                 </a:r>
                 <a14:m>
                   <m:oMath xmlns:m="http://schemas.openxmlformats.org/officeDocument/2006/math">
@@ -13415,9 +15096,8 @@
                       </m:dPr>
                       <m:e>
                         <m:r>
-                          <a:rPr lang="pt-BR" sz="2800" b="0" i="1" smtClean="0">
-                            <a:latin typeface="Cambria Math" panose="02040503050406030204" pitchFamily="18" charset="0"/>
-                            <a:ea typeface="Cambria Math" panose="02040503050406030204" pitchFamily="18" charset="0"/>
+                          <a:rPr lang="pt-BR" sz="2800" i="1" smtClean="0">
+                            <a:latin typeface="Cambria Math" panose="02040503050406030204" pitchFamily="18" charset="0"/>
                           </a:rPr>
                           <m:t>∅</m:t>
                         </m:r>
@@ -13731,7 +15411,7 @@
                 </a14:m>
                 <a:r>
                   <a:rPr lang="pt-BR" sz="2800" dirty="0"/>
-                  <a:t xml:space="preserve">, </a:t>
+                  <a:t>, </a:t>
                 </a:r>
                 <a14:m>
                   <m:oMath xmlns:m="http://schemas.openxmlformats.org/officeDocument/2006/math">
@@ -13762,7 +15442,7 @@
                 </a:pPr>
                 <a:r>
                   <a:rPr lang="pt-BR" sz="2800" dirty="0"/>
-                  <a:t xml:space="preserve">Intervalos: </a:t>
+                  <a:t>Intervalos: </a:t>
                 </a:r>
                 <a:endParaRPr lang="pt-BR" sz="2800" b="0" i="1" dirty="0">
                   <a:latin typeface="Cambria Math" panose="02040503050406030204" pitchFamily="18" charset="0"/>
@@ -14848,7 +16528,7 @@
                 </a:pPr>
                 <a:r>
                   <a:rPr lang="pt-BR" sz="2800" dirty="0"/>
-                  <a:t xml:space="preserve">Todo conjunto finito com n elementos tem </a:t>
+                  <a:t>Todo conjunto finito com n elementos tem </a:t>
                 </a:r>
                 <a14:m>
                   <m:oMath xmlns:m="http://schemas.openxmlformats.org/officeDocument/2006/math">
@@ -14881,7 +16561,7 @@
                 </a14:m>
                 <a:r>
                   <a:rPr lang="pt-BR" sz="2800" dirty="0"/>
-                  <a:t xml:space="preserve"> subconjuntos distintos</a:t>
+                  <a:t> subconjuntos distintos</a:t>
                 </a:r>
               </a:p>
               <a:p>
@@ -14898,7 +16578,7 @@
                 </a:pPr>
                 <a:r>
                   <a:rPr lang="pt-BR" sz="2800" dirty="0"/>
-                  <a:t xml:space="preserve">Conjunto das partes de </a:t>
+                  <a:t>Conjunto das partes de </a:t>
                 </a:r>
                 <a14:m>
                   <m:oMath xmlns:m="http://schemas.openxmlformats.org/officeDocument/2006/math">
@@ -14912,7 +16592,7 @@
                 </a14:m>
                 <a:r>
                   <a:rPr lang="pt-BR" sz="2800" dirty="0"/>
-                  <a:t xml:space="preserve"> é o conjunto cujos elementos são todos os subconjuntos de </a:t>
+                  <a:t> é o conjunto cujos elementos são todos os subconjuntos de </a:t>
                 </a:r>
                 <a14:m>
                   <m:oMath xmlns:m="http://schemas.openxmlformats.org/officeDocument/2006/math">
@@ -15231,7 +16911,7 @@
                 </a:pPr>
                 <a:r>
                   <a:rPr lang="pt-BR" sz="2800" b="0" dirty="0"/>
-                  <a:t xml:space="preserve">Complementar: </a:t>
+                  <a:t>Complementar: </a:t>
                 </a:r>
                 <a14:m>
                   <m:oMath xmlns:m="http://schemas.openxmlformats.org/officeDocument/2006/math">
@@ -15278,7 +16958,7 @@
                 </a:pPr>
                 <a:r>
                   <a:rPr lang="pt-BR" sz="2800" b="0" dirty="0"/>
-                  <a:t xml:space="preserve">União: </a:t>
+                  <a:t>União: </a:t>
                 </a:r>
                 <a14:m>
                   <m:oMath xmlns:m="http://schemas.openxmlformats.org/officeDocument/2006/math">
@@ -15321,7 +17001,7 @@
                 </a:pPr>
                 <a:r>
                   <a:rPr lang="pt-BR" sz="2800" b="0" dirty="0"/>
-                  <a:t xml:space="preserve">Interseção: </a:t>
+                  <a:t>Interseção: </a:t>
                 </a:r>
                 <a14:m>
                   <m:oMath xmlns:m="http://schemas.openxmlformats.org/officeDocument/2006/math">
@@ -15361,7 +17041,7 @@
                 </a:pPr>
                 <a:r>
                   <a:rPr lang="pt-BR" sz="2800" dirty="0"/>
-                  <a:t xml:space="preserve">Subtração: </a:t>
+                  <a:t>Subtração: </a:t>
                 </a:r>
                 <a14:m>
                   <m:oMath xmlns:m="http://schemas.openxmlformats.org/officeDocument/2006/math">
